--- a/decks/stretch-not-strain-lesson-v2.pptx
+++ b/decks/stretch-not-strain-lesson-v2.pptx
@@ -18,6 +18,12 @@
     <p:sldId id="266" r:id="rId18"/>
     <p:sldId id="267" r:id="rId19"/>
     <p:sldId id="268" r:id="rId20"/>
+    <p:sldId id="269" r:id="rId21"/>
+    <p:sldId id="270" r:id="rId22"/>
+    <p:sldId id="271" r:id="rId23"/>
+    <p:sldId id="272" r:id="rId24"/>
+    <p:sldId id="273" r:id="rId25"/>
+    <p:sldId id="274" r:id="rId26"/>
   </p:sldIdLst>
   <p:sldSz cx="12192000" cy="6858000" type="screen4x3"/>
   <p:notesSz cx="6858000" cy="9144000"/>
@@ -584,7 +590,427 @@
           <a:lstStyle/>
           <a:p>
             <a:r>
-              <a:t>2 MINUTES. Invite, don't assign: "Which move will you try?" Share the student card link on this slide. It gives students the same language (stretch vs. shutdown, the hint ladder, the 5-minute rule) and who to talk to. If the department wants, collect anonymous notes on which moves worked for the next meeting.</a:t>
+              <a:t>4 MINUTES. A hard problem can trigger the body's threat response: racing heart, narrowed attention, the urge to escape. The student reads it as "I'm bad at this" and opts out. Relief follows, which reinforces avoidance, the same pattern that keeps anxiety going. Less practice makes the next problem genuinely harder. This is why the next three studies matter: they target the alarm and the meaning students give it. Rick's line for students: look where you want to go. Point their eyes at the next small step, not the whole wall.</a:t>
+            </a:r>
+          </a:p>
+        </p:txBody>
+      </p:sp>
+      <p:sp>
+        <p:nvSpPr>
+          <p:cNvPr id="4" name="Slide Number Placeholder 3"/>
+          <p:cNvSpPr>
+            <a:spLocks noGrp="1"/>
+          </p:cNvSpPr>
+          <p:nvPr>
+            <p:ph type="sldNum" idx="5" sz="quarter"/>
+          </p:nvPr>
+        </p:nvSpPr>
+        <p:spPr/>
+      </p:sp>
+    </p:spTree>
+  </p:cSld>
+  <p:clrMapOvr>
+    <a:masterClrMapping/>
+  </p:clrMapOvr>
+</p:notes>
+</file>
+
+<file path=ppt/notesSlides/notesSlide11.xml><?xml version="1.0" encoding="utf-8"?>
+<p:notes xmlns:a="http://schemas.openxmlformats.org/drawingml/2006/main" xmlns:p="http://schemas.openxmlformats.org/presentationml/2006/main" xmlns:r="http://schemas.openxmlformats.org/officeDocument/2006/relationships">
+  <p:cSld>
+    <p:spTree>
+      <p:nvGrpSpPr>
+        <p:cNvPr id="1" name=""/>
+        <p:cNvGrpSpPr/>
+        <p:nvPr/>
+      </p:nvGrpSpPr>
+      <p:grpSpPr>
+        <a:xfrm>
+          <a:off x="0" y="0"/>
+          <a:ext cx="0" cy="0"/>
+          <a:chOff x="0" y="0"/>
+          <a:chExt cx="0" cy="0"/>
+        </a:xfrm>
+      </p:grpSpPr>
+      <p:sp>
+        <p:nvSpPr>
+          <p:cNvPr id="2" name="Slide Image Placeholder 1"/>
+          <p:cNvSpPr>
+            <a:spLocks noGrp="1"/>
+          </p:cNvSpPr>
+          <p:nvPr>
+            <p:ph type="sldImg" idx="2"/>
+          </p:nvPr>
+        </p:nvSpPr>
+        <p:spPr/>
+      </p:sp>
+      <p:sp>
+        <p:nvSpPr>
+          <p:cNvPr id="3" name="Notes Placeholder 2"/>
+          <p:cNvSpPr>
+            <a:spLocks noGrp="1"/>
+          </p:cNvSpPr>
+          <p:nvPr>
+            <p:ph type="body" idx="3" sz="quarter"/>
+          </p:nvPr>
+        </p:nvSpPr>
+        <p:spPr/>
+        <p:txBody>
+          <a:bodyPr/>
+          <a:lstStyle/>
+          <a:p>
+            <a:r>
+              <a:t>3 MINUTES. Jamieson's reappraisal research: arousal isn't the problem; reading it as danger is. Students who were told arousal can improve performance did better. Be honest that participants were college students. In class this is one sentence, said before a test or a hard lab, never as a lecture.</a:t>
+            </a:r>
+          </a:p>
+        </p:txBody>
+      </p:sp>
+      <p:sp>
+        <p:nvSpPr>
+          <p:cNvPr id="4" name="Slide Number Placeholder 3"/>
+          <p:cNvSpPr>
+            <a:spLocks noGrp="1"/>
+          </p:cNvSpPr>
+          <p:nvPr>
+            <p:ph type="sldNum" idx="5" sz="quarter"/>
+          </p:nvPr>
+        </p:nvSpPr>
+        <p:spPr/>
+      </p:sp>
+    </p:spTree>
+  </p:cSld>
+  <p:clrMapOvr>
+    <a:masterClrMapping/>
+  </p:clrMapOvr>
+</p:notes>
+</file>
+
+<file path=ppt/notesSlides/notesSlide12.xml><?xml version="1.0" encoding="utf-8"?>
+<p:notes xmlns:a="http://schemas.openxmlformats.org/drawingml/2006/main" xmlns:p="http://schemas.openxmlformats.org/presentationml/2006/main" xmlns:r="http://schemas.openxmlformats.org/officeDocument/2006/relationships">
+  <p:cSld>
+    <p:spTree>
+      <p:nvGrpSpPr>
+        <p:cNvPr id="1" name=""/>
+        <p:cNvGrpSpPr/>
+        <p:nvPr/>
+      </p:nvGrpSpPr>
+      <p:grpSpPr>
+        <a:xfrm>
+          <a:off x="0" y="0"/>
+          <a:ext cx="0" cy="0"/>
+          <a:chOff x="0" y="0"/>
+          <a:chExt cx="0" cy="0"/>
+        </a:xfrm>
+      </p:grpSpPr>
+      <p:sp>
+        <p:nvSpPr>
+          <p:cNvPr id="2" name="Slide Image Placeholder 1"/>
+          <p:cNvSpPr>
+            <a:spLocks noGrp="1"/>
+          </p:cNvSpPr>
+          <p:nvPr>
+            <p:ph type="sldImg" idx="2"/>
+          </p:nvPr>
+        </p:nvSpPr>
+        <p:spPr/>
+      </p:sp>
+      <p:sp>
+        <p:nvSpPr>
+          <p:cNvPr id="3" name="Notes Placeholder 2"/>
+          <p:cNvSpPr>
+            <a:spLocks noGrp="1"/>
+          </p:cNvSpPr>
+          <p:nvPr>
+            <p:ph type="body" idx="3" sz="quarter"/>
+          </p:nvPr>
+        </p:nvSpPr>
+        <p:spPr/>
+        <p:txBody>
+          <a:bodyPr/>
+          <a:lstStyle/>
+          <a:p>
+            <a:r>
+              <a:t>3 MINUTES. "Wise feedback" changes what criticism means to a student: from "you think I can't" to "you think I can." The effect was largest for students who had reason to expect bias, which ties to the inclusion page. Pair-share: rewrite one comment you gave this week.</a:t>
+            </a:r>
+          </a:p>
+        </p:txBody>
+      </p:sp>
+      <p:sp>
+        <p:nvSpPr>
+          <p:cNvPr id="4" name="Slide Number Placeholder 3"/>
+          <p:cNvSpPr>
+            <a:spLocks noGrp="1"/>
+          </p:cNvSpPr>
+          <p:nvPr>
+            <p:ph type="sldNum" idx="5" sz="quarter"/>
+          </p:nvPr>
+        </p:nvSpPr>
+        <p:spPr/>
+      </p:sp>
+    </p:spTree>
+  </p:cSld>
+  <p:clrMapOvr>
+    <a:masterClrMapping/>
+  </p:clrMapOvr>
+</p:notes>
+</file>
+
+<file path=ppt/notesSlides/notesSlide13.xml><?xml version="1.0" encoding="utf-8"?>
+<p:notes xmlns:a="http://schemas.openxmlformats.org/drawingml/2006/main" xmlns:p="http://schemas.openxmlformats.org/presentationml/2006/main" xmlns:r="http://schemas.openxmlformats.org/officeDocument/2006/relationships">
+  <p:cSld>
+    <p:spTree>
+      <p:nvGrpSpPr>
+        <p:cNvPr id="1" name=""/>
+        <p:cNvGrpSpPr/>
+        <p:nvPr/>
+      </p:nvGrpSpPr>
+      <p:grpSpPr>
+        <a:xfrm>
+          <a:off x="0" y="0"/>
+          <a:ext cx="0" cy="0"/>
+          <a:chOff x="0" y="0"/>
+          <a:chExt cx="0" cy="0"/>
+        </a:xfrm>
+      </p:grpSpPr>
+      <p:sp>
+        <p:nvSpPr>
+          <p:cNvPr id="2" name="Slide Image Placeholder 1"/>
+          <p:cNvSpPr>
+            <a:spLocks noGrp="1"/>
+          </p:cNvSpPr>
+          <p:nvPr>
+            <p:ph type="sldImg" idx="2"/>
+          </p:nvPr>
+        </p:nvSpPr>
+        <p:spPr/>
+      </p:sp>
+      <p:sp>
+        <p:nvSpPr>
+          <p:cNvPr id="3" name="Notes Placeholder 2"/>
+          <p:cNvSpPr>
+            <a:spLocks noGrp="1"/>
+          </p:cNvSpPr>
+          <p:nvPr>
+            <p:ph type="body" idx="3" sz="quarter"/>
+          </p:nvPr>
+        </p:nvSpPr>
+        <p:spPr/>
+        <p:txBody>
+          <a:bodyPr/>
+          <a:lstStyle/>
+          <a:p>
+            <a:r>
+              <a:t>2 MINUTES. This keeps us honest. Mindset matters most when it's built into how a class runs (what gets praised, how mistakes are treated, whether revision is expected), not when it's a poster. Bridge: "So what does this look like on Monday?"</a:t>
+            </a:r>
+          </a:p>
+        </p:txBody>
+      </p:sp>
+      <p:sp>
+        <p:nvSpPr>
+          <p:cNvPr id="4" name="Slide Number Placeholder 3"/>
+          <p:cNvSpPr>
+            <a:spLocks noGrp="1"/>
+          </p:cNvSpPr>
+          <p:nvPr>
+            <p:ph type="sldNum" idx="5" sz="quarter"/>
+          </p:nvPr>
+        </p:nvSpPr>
+        <p:spPr/>
+      </p:sp>
+    </p:spTree>
+  </p:cSld>
+  <p:clrMapOvr>
+    <a:masterClrMapping/>
+  </p:clrMapOvr>
+</p:notes>
+</file>
+
+<file path=ppt/notesSlides/notesSlide14.xml><?xml version="1.0" encoding="utf-8"?>
+<p:notes xmlns:a="http://schemas.openxmlformats.org/drawingml/2006/main" xmlns:p="http://schemas.openxmlformats.org/presentationml/2006/main" xmlns:r="http://schemas.openxmlformats.org/officeDocument/2006/relationships">
+  <p:cSld>
+    <p:spTree>
+      <p:nvGrpSpPr>
+        <p:cNvPr id="1" name=""/>
+        <p:cNvGrpSpPr/>
+        <p:nvPr/>
+      </p:nvGrpSpPr>
+      <p:grpSpPr>
+        <a:xfrm>
+          <a:off x="0" y="0"/>
+          <a:ext cx="0" cy="0"/>
+          <a:chOff x="0" y="0"/>
+          <a:chExt cx="0" cy="0"/>
+        </a:xfrm>
+      </p:grpSpPr>
+      <p:sp>
+        <p:nvSpPr>
+          <p:cNvPr id="2" name="Slide Image Placeholder 1"/>
+          <p:cNvSpPr>
+            <a:spLocks noGrp="1"/>
+          </p:cNvSpPr>
+          <p:nvPr>
+            <p:ph type="sldImg" idx="2"/>
+          </p:nvPr>
+        </p:nvSpPr>
+        <p:spPr/>
+      </p:sp>
+      <p:sp>
+        <p:nvSpPr>
+          <p:cNvPr id="3" name="Notes Placeholder 2"/>
+          <p:cNvSpPr>
+            <a:spLocks noGrp="1"/>
+          </p:cNvSpPr>
+          <p:nvPr>
+            <p:ph type="body" idx="3" sz="quarter"/>
+          </p:nvPr>
+        </p:nvSpPr>
+        <p:spPr/>
+        <p:txBody>
+          <a:bodyPr/>
+          <a:lstStyle/>
+          <a:p>
+            <a:r>
+              <a:t>5 MINUTES. Sources: worked examples (Sweller, Renkl), reframing (Jamieson), wise feedback (Yeager). Time-boxing and the hint ladder come from classroom practice; they keep struggle while giving an exit ramp before shutdown, and they make help-seeking a normal step rather than a personal risk. Naming the hard part changes what confusion means. Ask each person to circle the move that fits their next unit.</a:t>
+            </a:r>
+          </a:p>
+        </p:txBody>
+      </p:sp>
+      <p:sp>
+        <p:nvSpPr>
+          <p:cNvPr id="4" name="Slide Number Placeholder 3"/>
+          <p:cNvSpPr>
+            <a:spLocks noGrp="1"/>
+          </p:cNvSpPr>
+          <p:nvPr>
+            <p:ph type="sldNum" idx="5" sz="quarter"/>
+          </p:nvPr>
+        </p:nvSpPr>
+        <p:spPr/>
+      </p:sp>
+    </p:spTree>
+  </p:cSld>
+  <p:clrMapOvr>
+    <a:masterClrMapping/>
+  </p:clrMapOvr>
+</p:notes>
+</file>
+
+<file path=ppt/notesSlides/notesSlide15.xml><?xml version="1.0" encoding="utf-8"?>
+<p:notes xmlns:a="http://schemas.openxmlformats.org/drawingml/2006/main" xmlns:p="http://schemas.openxmlformats.org/presentationml/2006/main" xmlns:r="http://schemas.openxmlformats.org/officeDocument/2006/relationships">
+  <p:cSld>
+    <p:spTree>
+      <p:nvGrpSpPr>
+        <p:cNvPr id="1" name=""/>
+        <p:cNvGrpSpPr/>
+        <p:nvPr/>
+      </p:nvGrpSpPr>
+      <p:grpSpPr>
+        <a:xfrm>
+          <a:off x="0" y="0"/>
+          <a:ext cx="0" cy="0"/>
+          <a:chOff x="0" y="0"/>
+          <a:chExt cx="0" cy="0"/>
+        </a:xfrm>
+      </p:grpSpPr>
+      <p:sp>
+        <p:nvSpPr>
+          <p:cNvPr id="2" name="Slide Image Placeholder 1"/>
+          <p:cNvSpPr>
+            <a:spLocks noGrp="1"/>
+          </p:cNvSpPr>
+          <p:nvPr>
+            <p:ph type="sldImg" idx="2"/>
+          </p:nvPr>
+        </p:nvSpPr>
+        <p:spPr/>
+      </p:sp>
+      <p:sp>
+        <p:nvSpPr>
+          <p:cNvPr id="3" name="Notes Placeholder 2"/>
+          <p:cNvSpPr>
+            <a:spLocks noGrp="1"/>
+          </p:cNvSpPr>
+          <p:nvPr>
+            <p:ph type="body" idx="3" sz="quarter"/>
+          </p:nvPr>
+        </p:nvSpPr>
+        <p:spPr/>
+        <p:txBody>
+          <a:bodyPr/>
+          <a:lstStyle/>
+          <a:p>
+            <a:r>
+              <a:t>8 MINUTES. One card per group, using the five moves and their opening cards. Maya: likely shutdown hidden as "fine." Offer a worked example with the first step done and a 5-minute check-back. Theo: name the hard part ("write-ups are where everyone stalls"), shrink the task to one section, check in privately later; if it happens a lot, loop in learning support or a counselor. Ana: she's in the stretch zone but doesn't trust it. Fade your help: "Which step do you trust? Do two more, then I'll check." Families: when calling home, a useful frame is "She's working on hard material, and here's the one thing that helps her stay in it," rather than "She gives up."</a:t>
+            </a:r>
+          </a:p>
+        </p:txBody>
+      </p:sp>
+      <p:sp>
+        <p:nvSpPr>
+          <p:cNvPr id="4" name="Slide Number Placeholder 3"/>
+          <p:cNvSpPr>
+            <a:spLocks noGrp="1"/>
+          </p:cNvSpPr>
+          <p:nvPr>
+            <p:ph type="sldNum" idx="5" sz="quarter"/>
+          </p:nvPr>
+        </p:nvSpPr>
+        <p:spPr/>
+      </p:sp>
+    </p:spTree>
+  </p:cSld>
+  <p:clrMapOvr>
+    <a:masterClrMapping/>
+  </p:clrMapOvr>
+</p:notes>
+</file>
+
+<file path=ppt/notesSlides/notesSlide16.xml><?xml version="1.0" encoding="utf-8"?>
+<p:notes xmlns:a="http://schemas.openxmlformats.org/drawingml/2006/main" xmlns:p="http://schemas.openxmlformats.org/presentationml/2006/main" xmlns:r="http://schemas.openxmlformats.org/officeDocument/2006/relationships">
+  <p:cSld>
+    <p:spTree>
+      <p:nvGrpSpPr>
+        <p:cNvPr id="1" name=""/>
+        <p:cNvGrpSpPr/>
+        <p:nvPr/>
+      </p:nvGrpSpPr>
+      <p:grpSpPr>
+        <a:xfrm>
+          <a:off x="0" y="0"/>
+          <a:ext cx="0" cy="0"/>
+          <a:chOff x="0" y="0"/>
+          <a:chExt cx="0" cy="0"/>
+        </a:xfrm>
+      </p:grpSpPr>
+      <p:sp>
+        <p:nvSpPr>
+          <p:cNvPr id="2" name="Slide Image Placeholder 1"/>
+          <p:cNvSpPr>
+            <a:spLocks noGrp="1"/>
+          </p:cNvSpPr>
+          <p:nvPr>
+            <p:ph type="sldImg" idx="2"/>
+          </p:nvPr>
+        </p:nvSpPr>
+        <p:spPr/>
+      </p:sp>
+      <p:sp>
+        <p:nvSpPr>
+          <p:cNvPr id="3" name="Notes Placeholder 2"/>
+          <p:cNvSpPr>
+            <a:spLocks noGrp="1"/>
+          </p:cNvSpPr>
+          <p:nvPr>
+            <p:ph type="body" idx="3" sz="quarter"/>
+          </p:nvPr>
+        </p:nvSpPr>
+        <p:spPr/>
+        <p:txBody>
+          <a:bodyPr/>
+          <a:lstStyle/>
+          <a:p>
+            <a:r>
+              <a:t>4 MINUTES. Invite, don't assign: "Which move will you try?" The student card on this slide gives students the same language (stretch vs. shutdown, the hint ladder, the 5-minute rule) and who to talk to. Teachers can share it after naming the idea in class. If the department wants a follow-up, collect anonymous notes on which moves worked.</a:t>
             </a:r>
           </a:p>
         </p:txBody>
@@ -654,7 +1080,7 @@
           <a:lstStyle/>
           <a:p>
             <a:r>
-              <a:t>Open with why we're here: the department asked how to help students face challenging content. Something like: "We all want students to work hard on hard things. Today is about the space between too easy and too much, and how to keep them in it."</a:t>
+              <a:t>Introduce both presenters and why you're here: the science department asked how to support students facing challenging content. Something like: "You asked a big question, and there's good research on it. Today we'll walk through what it says and land on a few things you can try next week."</a:t>
             </a:r>
           </a:p>
         </p:txBody>
@@ -724,7 +1150,7 @@
           <a:lstStyle/>
           <a:p>
             <a:r>
-              <a:t>5 MINUTES. Private writing. Then ask for a few volunteers to describe what they noticed (not who). Expect: blank page, head down, "I don't get any of this," phone out, bathroom requests, jokes, tears, anger. Write a few on the board under SHUTDOWN. Keep the cards; groups use them later.</a:t>
+              <a:t>5 MINUTES. Private writing, then a few volunteers describe what they noticed (not who). Expect: blank page, head down, "I don't get any of this," phone out, bathroom requests, jokes, tears, anger. Write a few on the board. Teachers keep their cards for the small-group part.</a:t>
             </a:r>
           </a:p>
         </p:txBody>
@@ -794,7 +1220,7 @@
           <a:lstStyle/>
           <a:p>
             <a:r>
-              <a:t>8 MINUTES. The teacher's job is reading this line. On the left, frustration is a sign of learning, and stepping in too soon takes the learning away. On the right, more effort won't help; the task or the support needs to change. Ask: "What do you usually do when you see the right column?" Most will say rescue (give the answer) or push harder. Both are understandable. Today is a third option: adjust the task so the student can get back to the left column. A line you can borrow: hard means keep going, stuck means change something.</a:t>
+              <a:t>3 MINUTES. Read the department's questions aloud if helpful: hot spots, why students struggle, how to scaffold, what to say to families, a strategy menu, and whether teachers need training. Say what today covers (the scaffolding question, and some of the messaging) and what it doesn't (school-specific data on hot spots, which would need a quick survey or exit cards). Then: "Here's what the research says about the right amount of struggle."</a:t>
             </a:r>
           </a:p>
         </p:txBody>
@@ -864,7 +1290,7 @@
           <a:lstStyle/>
           <a:p>
             <a:r>
-              <a:t>3 MINUTES. Rosenshine's review of effective teachers found they kept practice success around 80%. Pair it with Bjork's desirable difficulties: effort during practice is good for memory, as long as students keep succeeding often enough to stay in it. Vygotsky's zone of proximal development is the older name for the same sweet spot: what a student can do with help but not yet alone. Ask: "In your last problem set, roughly what percent did most students get on their own?" If it's far below 80%, the next scaffold matters more than another pep talk.</a:t>
+              <a:t>4 MINUTES. Bjork's "desirable difficulties": conditions that slow performance during practice (spacing, interleaving, retrieval practice) often improve long-term retention and transfer. The catch is in the word desirable: the difficulty has to be one the learner can overcome. Vygotsky's zone of proximal development names the target, the space between what a student can do alone and what they can do with support. Ask: "Where in your course do students feel most confident and learn least?" (Often: rereading notes, copying examples.)</a:t>
             </a:r>
           </a:p>
         </p:txBody>
@@ -934,7 +1360,7 @@
           <a:lstStyle/>
           <a:p>
             <a:r>
-              <a:t>4 MINUTES. A hard problem can trip the same alarm as a threat: racing heart, blank mind, urge to escape. The student reads the alarm as "I'm bad at this" and opts out. Relief follows, which teaches the brain that escaping works. Less practice means the next problem really is harder. The loop is the same one anxiety runs on. The way out is small: one step back into the task with enough support to succeed. Rick's version for students: look where you want to go. Point their eyes at the next small step, not the whole wall.</a:t>
+              <a:t>3 MINUTES. Rosenshine's Principles of Instruction drew on classroom observation studies of effective teachers. One principle: obtain a high success rate, around 80%, during guided and independent practice. That still leaves 20% that's hard, which is where Bjork's difficulties live. Ask: "In your last problem set, roughly what percent did most students get on their own?"</a:t>
             </a:r>
           </a:p>
         </p:txBody>
@@ -1004,7 +1430,7 @@
           <a:lstStyle/>
           <a:p>
             <a:r>
-              <a:t>10 MINUTES. Walk through each with an example from science. Worked examples: Sweller showed novices learn more from studying a solved problem than from struggling cold; Renkl showed fading steps builds independence. Time-boxing keeps struggle but gives an exit ramp before shutdown. A hint ladder posted in the room makes help-seeking a normal step instead of a personal risk. Naming the hard part changes what confusion means: it becomes a sign they've reached the right spot, not proof they don't belong. Reframing: Jamieson's GRE study. Ask each table to pick the move that would fit their next unit best.</a:t>
+              <a:t>3 MINUTES. Cognitive load: beginners have little room in working memory, and searching for a solution eats it up, leaving little for learning the method. Worked examples free that room. Renkl and Atkinson showed that fading steps from examples (backward fading works well) helps students take over. Note the word novices: as students gain skill, examples help less and practice helps more.</a:t>
             </a:r>
           </a:p>
         </p:txBody>
@@ -1074,7 +1500,7 @@
           <a:lstStyle/>
           <a:p>
             <a:r>
-              <a:t>8 MINUTES. One card per group, using the five moves. Maya: likely shutdown hidden as "fine." Offer a worked example with the first step done, and a 5-minute check-back. Theo: name the hard part ("write-ups are where everyone stalls"), shrink the task to one section, and check in privately later; if this happens a lot, loop in the counselor or learning specialist. Ana: she's in the stretch zone but doesn't trust it. Fade your help: "Which step do you trust? Do two more, then I'll check." Invite groups to use their cards from the opening too. Families: when a teacher calls home, a useful message is "She's working on hard material, and here's the one thing that helps her stay in it," rather than "She gives up."</a:t>
+              <a:t>2 MINUTES. Kapur's productive failure is the main counterpoint to "always show examples first." It fits concept-heavy learning (why a formula works), with a problem students can make some progress on, followed by instruction that compares their attempts with the expert solution. It doesn't mean leaving students to flounder. Bridge: "So the research supports struggle, in the right dose, with support. The hard part is seeing in the moment which side of the line a student is on."</a:t>
             </a:r>
           </a:p>
         </p:txBody>
@@ -1144,7 +1570,7 @@
           <a:lstStyle/>
           <a:p>
             <a:r>
-              <a:t>5 MINUTES. The top line on the right is close to the note Yeager and Cohen tested: critical feedback plus high standards plus belief in the student. Middle schoolers who got it revised their essays more often, and the effect was largest for Black students who had less reason to trust school. Praise the strategy and the revision, not the person. Pair-share: rewrite one comment you gave this week.</a:t>
+              <a:t>4 MINUTES. This one is from classroom practice rather than a single study. On the left, frustration is a sign of learning, and stepping in too soon takes the learning away. On the right, more effort won't help; the task or the support needs to change. Ask teachers to compare with their opening cards. A line to borrow: hard means keep going, stuck means change something.</a:t>
             </a:r>
           </a:p>
         </p:txBody>
@@ -4236,7 +4662,7 @@
                 </a:solidFill>
                 <a:latin typeface="Inter Tight"/>
               </a:rPr>
-              <a:t>TEACHER PAGE  ·  skipped when you present  ·  Lesson plan</a:t>
+              <a:t>TEACHER PAGE  ·  skipped when you present  ·  Session plan</a:t>
             </a:r>
           </a:p>
         </p:txBody>
@@ -4314,7 +4740,7 @@
                 </a:solidFill>
                 <a:latin typeface="Inter Tight"/>
               </a:rPr>
-              <a:t>For teachers  ·  45-minute department meeting (20-minute version below)  ·  Middle and Upper School, any subject</a:t>
+              <a:t>Faculty professional development  ·  45 to 60 minutes (30-minute version below)  ·  Led by counseling and learning support  ·  Middle and Upper School, any subject</a:t>
             </a:r>
           </a:p>
         </p:txBody>
@@ -4369,7 +4795,7 @@
                 </a:solidFill>
                 <a:latin typeface="Source Serif 4"/>
               </a:rPr>
-              <a:t>Teachers leave able to tell productive struggle from shutdown, and with two or three moves they can use next week to keep students working on hard material without rescuing them or losing them.</a:t>
+              <a:t>Teachers leave knowing what the research says about productive struggle, able to tell a student who is stretching from one who is shutting down, and with two or three classroom moves to try the next week.</a:t>
             </a:r>
           </a:p>
           <a:p>
@@ -4433,7 +4859,7 @@
                 </a:solidFill>
                 <a:latin typeface="Source Serif 4"/>
               </a:rPr>
-              <a:t>One upcoming unit or problem set per person (their own)</a:t>
+              <a:t>Teachers bring one upcoming unit or problem set of their own</a:t>
             </a:r>
           </a:p>
           <a:p>
@@ -4449,7 +4875,7 @@
                 </a:solidFill>
                 <a:latin typeface="Source Serif 4"/>
               </a:rPr>
-              <a:t>The student card link (last slide) to share with classes</a:t>
+              <a:t>The student card link (last slide) for teachers to share with classes</a:t>
             </a:r>
           </a:p>
         </p:txBody>
@@ -4513,7 +4939,7 @@
                 </a:solidFill>
                 <a:latin typeface="Source Serif 4"/>
               </a:rPr>
-              <a:t>A student who shut down (private cards)</a:t>
+              <a:t>Opening: a student who shut down (private cards)</a:t>
             </a:r>
           </a:p>
           <a:p>
@@ -4529,6 +4955,56 @@
                 </a:solidFill>
                 <a:latin typeface="Inter Tight"/>
               </a:rPr>
+              <a:t>5 min   </a:t>
+            </a:r>
+            <a:r>
+              <a:rPr sz="1400" b="0" i="0">
+                <a:solidFill>
+                  <a:srgbClr val="1C1B19"/>
+                </a:solidFill>
+                <a:latin typeface="Source Serif 4"/>
+              </a:rPr>
+              <a:t>The question the department asked</a:t>
+            </a:r>
+          </a:p>
+          <a:p>
+            <a:pPr algn="l">
+              <a:spcAft>
+                <a:spcPts val="630"/>
+              </a:spcAft>
+            </a:pPr>
+            <a:r>
+              <a:rPr sz="1300" b="1" i="0">
+                <a:solidFill>
+                  <a:srgbClr val="F47B20"/>
+                </a:solidFill>
+                <a:latin typeface="Inter Tight"/>
+              </a:rPr>
+              <a:t>12 min   </a:t>
+            </a:r>
+            <a:r>
+              <a:rPr sz="1400" b="0" i="0">
+                <a:solidFill>
+                  <a:srgbClr val="1C1B19"/>
+                </a:solidFill>
+                <a:latin typeface="Source Serif 4"/>
+              </a:rPr>
+              <a:t>The research on the right amount of struggle (4 studies)</a:t>
+            </a:r>
+          </a:p>
+          <a:p>
+            <a:pPr algn="l">
+              <a:spcAft>
+                <a:spcPts val="630"/>
+              </a:spcAft>
+            </a:pPr>
+            <a:r>
+              <a:rPr sz="1300" b="1" i="0">
+                <a:solidFill>
+                  <a:srgbClr val="F47B20"/>
+                </a:solidFill>
+                <a:latin typeface="Inter Tight"/>
+              </a:rPr>
               <a:t>8 min   </a:t>
             </a:r>
             <a:r>
@@ -4538,7 +5014,7 @@
                 </a:solidFill>
                 <a:latin typeface="Source Serif 4"/>
               </a:rPr>
-              <a:t>Stretch or shutdown: what it looks like</a:t>
+              <a:t>Stretch or shutdown, and why students opt out</a:t>
             </a:r>
           </a:p>
           <a:p>
@@ -4554,7 +5030,7 @@
                 </a:solidFill>
                 <a:latin typeface="Inter Tight"/>
               </a:rPr>
-              <a:t>7 min   </a:t>
+              <a:t>8 min   </a:t>
             </a:r>
             <a:r>
               <a:rPr sz="1400" b="0" i="0">
@@ -4563,7 +5039,7 @@
                 </a:solidFill>
                 <a:latin typeface="Source Serif 4"/>
               </a:rPr>
-              <a:t>The 80% target and the shutdown loop</a:t>
+              <a:t>The research on getting them back in (3 studies)</a:t>
             </a:r>
           </a:p>
           <a:p>
@@ -4579,7 +5055,7 @@
                 </a:solidFill>
                 <a:latin typeface="Inter Tight"/>
               </a:rPr>
-              <a:t>10 min   </a:t>
+              <a:t>5 min   </a:t>
             </a:r>
             <a:r>
               <a:rPr sz="1400" b="0" i="0">
@@ -4588,7 +5064,7 @@
                 </a:solidFill>
                 <a:latin typeface="Source Serif 4"/>
               </a:rPr>
-              <a:t>Five scaffolds that keep the struggle</a:t>
+              <a:t>Five moves for Monday</a:t>
             </a:r>
           </a:p>
           <a:p>
@@ -4629,7 +5105,7 @@
                 </a:solidFill>
                 <a:latin typeface="Inter Tight"/>
               </a:rPr>
-              <a:t>5 min   </a:t>
+              <a:t>4 min   </a:t>
             </a:r>
             <a:r>
               <a:rPr sz="1400" b="0" i="0">
@@ -4638,7 +5114,7 @@
                 </a:solidFill>
                 <a:latin typeface="Source Serif 4"/>
               </a:rPr>
-              <a:t>Feedback that keeps them in it</a:t>
+              <a:t>One move this week</a:t>
             </a:r>
           </a:p>
           <a:p>
@@ -4648,14 +5124,37 @@
               </a:spcAft>
             </a:pPr>
             <a:r>
-              <a:rPr sz="1300" b="1" i="0">
-                <a:solidFill>
-                  <a:srgbClr val="F47B20"/>
+              <a:rPr sz="1400" b="0" i="0">
+                <a:solidFill>
+                  <a:srgbClr val="1C1B19"/>
+                </a:solidFill>
+                <a:latin typeface="Source Serif 4"/>
+              </a:rPr>
+              <a:t/>
+            </a:r>
+          </a:p>
+          <a:p>
+            <a:pPr algn="l">
+              <a:spcAft>
+                <a:spcPts val="630"/>
+              </a:spcAft>
+            </a:pPr>
+            <a:r>
+              <a:rPr sz="1100" b="1" i="0">
+                <a:solidFill>
+                  <a:srgbClr val="0B2D5B"/>
                 </a:solidFill>
                 <a:latin typeface="Inter Tight"/>
               </a:rPr>
-              <a:t>2 min   </a:t>
-            </a:r>
+              <a:t>SHORT ON TIME (20-MINUTE ADVISORY)</a:t>
+            </a:r>
+          </a:p>
+          <a:p>
+            <a:pPr algn="l">
+              <a:spcAft>
+                <a:spcPts val="630"/>
+              </a:spcAft>
+            </a:pPr>
             <a:r>
               <a:rPr sz="1400" b="0" i="0">
                 <a:solidFill>
@@ -4663,55 +5162,7 @@
                 </a:solidFill>
                 <a:latin typeface="Source Serif 4"/>
               </a:rPr>
-              <a:t>One move this week</a:t>
-            </a:r>
-          </a:p>
-          <a:p>
-            <a:pPr algn="l">
-              <a:spcAft>
-                <a:spcPts val="630"/>
-              </a:spcAft>
-            </a:pPr>
-            <a:r>
-              <a:rPr sz="1400" b="0" i="0">
-                <a:solidFill>
-                  <a:srgbClr val="1C1B19"/>
-                </a:solidFill>
-                <a:latin typeface="Source Serif 4"/>
-              </a:rPr>
-              <a:t/>
-            </a:r>
-          </a:p>
-          <a:p>
-            <a:pPr algn="l">
-              <a:spcAft>
-                <a:spcPts val="630"/>
-              </a:spcAft>
-            </a:pPr>
-            <a:r>
-              <a:rPr sz="1100" b="1" i="0">
-                <a:solidFill>
-                  <a:srgbClr val="0B2D5B"/>
-                </a:solidFill>
-                <a:latin typeface="Inter Tight"/>
-              </a:rPr>
-              <a:t>SHORT ON TIME (20-MINUTE ADVISORY)</a:t>
-            </a:r>
-          </a:p>
-          <a:p>
-            <a:pPr algn="l">
-              <a:spcAft>
-                <a:spcPts val="630"/>
-              </a:spcAft>
-            </a:pPr>
-            <a:r>
-              <a:rPr sz="1400" b="0" i="0">
-                <a:solidFill>
-                  <a:srgbClr val="1C1B19"/>
-                </a:solidFill>
-                <a:latin typeface="Source Serif 4"/>
-              </a:rPr>
-              <a:t>Stretch or shutdown (5), the five scaffolds (8), one of the three students (5), one move this week (2). Share the student card link afterward.</a:t>
+              <a:t>Thirty minutes: the question (3), the 80% finding and worked examples (6), stretch or shutdown (5), wise feedback and reappraisal (6), five moves (5), one move this week (5). Share the student card link afterward.</a:t>
             </a:r>
           </a:p>
         </p:txBody>
@@ -4820,7 +5271,7 @@
                 </a:solidFill>
                 <a:latin typeface="Inter Tight"/>
               </a:rPr>
-              <a:t>SCAFFOLDS</a:t>
+              <a:t>THE RESEARCH</a:t>
             </a:r>
           </a:p>
         </p:txBody>
@@ -4872,8 +5323,8 @@
         </p:nvSpPr>
         <p:spPr>
           <a:xfrm>
-            <a:off x="822960" y="1005840"/>
-            <a:ext cx="10515600" cy="1097280"/>
+            <a:off x="822960" y="914400"/>
+            <a:ext cx="10515600" cy="365760"/>
           </a:xfrm>
           <a:prstGeom prst="rect">
             <a:avLst/>
@@ -4888,17 +5339,17 @@
           <a:p>
             <a:pPr algn="l">
               <a:spcAft>
-                <a:spcPts val="1620"/>
-              </a:spcAft>
-            </a:pPr>
-            <a:r>
-              <a:rPr sz="3600" b="1" i="0">
-                <a:solidFill>
-                  <a:srgbClr val="1C1B19"/>
-                </a:solidFill>
-                <a:latin typeface="Source Serif 4"/>
-              </a:rPr>
-              <a:t>Five moves that keep the struggle</a:t>
+                <a:spcPts val="630"/>
+              </a:spcAft>
+            </a:pPr>
+            <a:r>
+              <a:rPr sz="1400" b="1" i="0">
+                <a:solidFill>
+                  <a:srgbClr val="0B2D5B"/>
+                </a:solidFill>
+                <a:latin typeface="Inter Tight"/>
+              </a:rPr>
+              <a:t>Sweller &amp; Cooper, 1985  ·  Renkl &amp; Atkinson, 2003</a:t>
             </a:r>
           </a:p>
         </p:txBody>
@@ -4911,8 +5362,8 @@
         </p:nvSpPr>
         <p:spPr>
           <a:xfrm>
-            <a:off x="822960" y="2057400"/>
-            <a:ext cx="548640" cy="804672"/>
+            <a:off x="822960" y="1325880"/>
+            <a:ext cx="10515600" cy="1097280"/>
           </a:xfrm>
           <a:prstGeom prst="rect">
             <a:avLst/>
@@ -4927,17 +5378,17 @@
           <a:p>
             <a:pPr algn="l">
               <a:spcAft>
-                <a:spcPts val="1170"/>
-              </a:spcAft>
-            </a:pPr>
-            <a:r>
-              <a:rPr sz="2600" b="1" i="0">
-                <a:solidFill>
-                  <a:srgbClr val="F47B20"/>
-                </a:solidFill>
-                <a:latin typeface="Source Serif 4"/>
-              </a:rPr>
-              <a:t>1</a:t>
+                <a:spcPts val="1440"/>
+              </a:spcAft>
+            </a:pPr>
+            <a:r>
+              <a:rPr sz="3200" b="1" i="0">
+                <a:solidFill>
+                  <a:srgbClr val="1C1B19"/>
+                </a:solidFill>
+                <a:latin typeface="Source Serif 4"/>
+              </a:rPr>
+              <a:t>Novices learn more from solved examples, then fading.</a:t>
             </a:r>
           </a:p>
         </p:txBody>
@@ -4950,8 +5401,8 @@
         </p:nvSpPr>
         <p:spPr>
           <a:xfrm>
-            <a:off x="1463040" y="2093976"/>
-            <a:ext cx="9875520" cy="804672"/>
+            <a:off x="822960" y="2514600"/>
+            <a:ext cx="10515600" cy="2194560"/>
           </a:xfrm>
           <a:prstGeom prst="rect">
             <a:avLst/>
@@ -4966,47 +5417,107 @@
           <a:p>
             <a:pPr algn="l">
               <a:spcAft>
-                <a:spcPts val="945"/>
-              </a:spcAft>
-            </a:pPr>
-            <a:r>
-              <a:rPr sz="2100" b="1" i="0">
+                <a:spcPts val="855"/>
+              </a:spcAft>
+            </a:pPr>
+            <a:r>
+              <a:rPr sz="1900" b="0" i="0">
                 <a:solidFill>
                   <a:srgbClr val="1C1B19"/>
                 </a:solidFill>
                 <a:latin typeface="Source Serif 4"/>
               </a:rPr>
-              <a:t>Worked example, then fade it.</a:t>
-            </a:r>
-          </a:p>
-          <a:p>
-            <a:pPr algn="l">
-              <a:spcAft>
-                <a:spcPts val="945"/>
-              </a:spcAft>
-            </a:pPr>
-            <a:r>
-              <a:rPr sz="1600" b="0" i="0">
-                <a:solidFill>
-                  <a:srgbClr val="5D5A54"/>
-                </a:solidFill>
-                <a:latin typeface="Source Serif 4"/>
-              </a:rPr>
-              <a:t>Solved, then half-solved, then on their own.</a:t>
-            </a:r>
-          </a:p>
-        </p:txBody>
-      </p:sp>
-      <p:sp>
-        <p:nvSpPr>
-          <p:cNvPr id="8" name="TextBox 7"/>
+              <a:t>•  Algebra students who studied worked examples learned faster than those who solved problems cold.</a:t>
+            </a:r>
+          </a:p>
+          <a:p>
+            <a:pPr algn="l">
+              <a:spcAft>
+                <a:spcPts val="855"/>
+              </a:spcAft>
+            </a:pPr>
+            <a:r>
+              <a:rPr sz="1900" b="0" i="0">
+                <a:solidFill>
+                  <a:srgbClr val="1C1B19"/>
+                </a:solidFill>
+                <a:latin typeface="Source Serif 4"/>
+              </a:rPr>
+              <a:t>•  Solving cold overloads working memory for beginners.</a:t>
+            </a:r>
+          </a:p>
+          <a:p>
+            <a:pPr algn="l">
+              <a:spcAft>
+                <a:spcPts val="855"/>
+              </a:spcAft>
+            </a:pPr>
+            <a:r>
+              <a:rPr sz="1900" b="0" i="0">
+                <a:solidFill>
+                  <a:srgbClr val="1C1B19"/>
+                </a:solidFill>
+                <a:latin typeface="Source Serif 4"/>
+              </a:rPr>
+              <a:t>•  Removing steps one at a time builds independence.</a:t>
+            </a:r>
+          </a:p>
+        </p:txBody>
+      </p:sp>
+      <p:sp>
+        <p:nvSpPr>
+          <p:cNvPr id="8" name="Rectangle 7"/>
+          <p:cNvSpPr/>
+          <p:nvPr/>
+        </p:nvSpPr>
+        <p:spPr>
+          <a:xfrm>
+            <a:off x="822960" y="4892040"/>
+            <a:ext cx="73152" cy="1097280"/>
+          </a:xfrm>
+          <a:prstGeom prst="rect">
+            <a:avLst/>
+          </a:prstGeom>
+          <a:solidFill>
+            <a:srgbClr val="F47B20"/>
+          </a:solidFill>
+          <a:ln>
+            <a:noFill/>
+          </a:ln>
+          <a:effectLst/>
+        </p:spPr>
+        <p:style>
+          <a:lnRef idx="1">
+            <a:schemeClr val="accent1"/>
+          </a:lnRef>
+          <a:fillRef idx="3">
+            <a:schemeClr val="accent1"/>
+          </a:fillRef>
+          <a:effectRef idx="2">
+            <a:schemeClr val="accent1"/>
+          </a:effectRef>
+          <a:fontRef idx="minor">
+            <a:schemeClr val="lt1"/>
+          </a:fontRef>
+        </p:style>
+        <p:txBody>
+          <a:bodyPr rtlCol="0" anchor="ctr"/>
+          <a:lstStyle/>
+          <a:p>
+            <a:pPr algn="ctr"/>
+          </a:p>
+        </p:txBody>
+      </p:sp>
+      <p:sp>
+        <p:nvSpPr>
+          <p:cNvPr id="9" name="TextBox 8"/>
           <p:cNvSpPr txBox="1"/>
           <p:nvPr/>
         </p:nvSpPr>
         <p:spPr>
           <a:xfrm>
-            <a:off x="822960" y="2862072"/>
-            <a:ext cx="548640" cy="804672"/>
+            <a:off x="1097280" y="4892040"/>
+            <a:ext cx="10241280" cy="1188720"/>
           </a:xfrm>
           <a:prstGeom prst="rect">
             <a:avLst/>
@@ -5021,354 +5532,33 @@
           <a:p>
             <a:pPr algn="l">
               <a:spcAft>
-                <a:spcPts val="1170"/>
-              </a:spcAft>
-            </a:pPr>
-            <a:r>
-              <a:rPr sz="2600" b="1" i="0">
+                <a:spcPts val="855"/>
+              </a:spcAft>
+            </a:pPr>
+            <a:r>
+              <a:rPr sz="1200" b="1" i="0">
                 <a:solidFill>
                   <a:srgbClr val="F47B20"/>
                 </a:solidFill>
-                <a:latin typeface="Source Serif 4"/>
-              </a:rPr>
-              <a:t>2</a:t>
-            </a:r>
-          </a:p>
-        </p:txBody>
-      </p:sp>
-      <p:sp>
-        <p:nvSpPr>
-          <p:cNvPr id="9" name="TextBox 8"/>
-          <p:cNvSpPr txBox="1"/>
-          <p:nvPr/>
-        </p:nvSpPr>
-        <p:spPr>
-          <a:xfrm>
-            <a:off x="1463040" y="2898648"/>
-            <a:ext cx="9875520" cy="804672"/>
-          </a:xfrm>
-          <a:prstGeom prst="rect">
-            <a:avLst/>
-          </a:prstGeom>
-          <a:noFill/>
-        </p:spPr>
-        <p:txBody>
-          <a:bodyPr wrap="square" anchor="t" lIns="0" rIns="0" tIns="0" bIns="0">
-            <a:spAutoFit/>
-          </a:bodyPr>
-          <a:lstStyle/>
-          <a:p>
-            <a:pPr algn="l">
-              <a:spcAft>
-                <a:spcPts val="945"/>
-              </a:spcAft>
-            </a:pPr>
-            <a:r>
-              <a:rPr sz="2100" b="1" i="0">
+                <a:latin typeface="Inter Tight"/>
+              </a:rPr>
+              <a:t>IN CLASS</a:t>
+            </a:r>
+          </a:p>
+          <a:p>
+            <a:pPr algn="l">
+              <a:spcAft>
+                <a:spcPts val="855"/>
+              </a:spcAft>
+            </a:pPr>
+            <a:r>
+              <a:rPr sz="1900" b="0" i="0">
                 <a:solidFill>
                   <a:srgbClr val="1C1B19"/>
                 </a:solidFill>
                 <a:latin typeface="Source Serif 4"/>
               </a:rPr>
-              <a:t>Time-box the struggle.</a:t>
-            </a:r>
-          </a:p>
-          <a:p>
-            <a:pPr algn="l">
-              <a:spcAft>
-                <a:spcPts val="945"/>
-              </a:spcAft>
-            </a:pPr>
-            <a:r>
-              <a:rPr sz="1600" b="0" i="0">
-                <a:solidFill>
-                  <a:srgbClr val="5D5A54"/>
-                </a:solidFill>
-                <a:latin typeface="Source Serif 4"/>
-              </a:rPr>
-              <a:t>"Try it for 5 minutes, then use a hint."</a:t>
-            </a:r>
-          </a:p>
-        </p:txBody>
-      </p:sp>
-      <p:sp>
-        <p:nvSpPr>
-          <p:cNvPr id="10" name="TextBox 9"/>
-          <p:cNvSpPr txBox="1"/>
-          <p:nvPr/>
-        </p:nvSpPr>
-        <p:spPr>
-          <a:xfrm>
-            <a:off x="822960" y="3666744"/>
-            <a:ext cx="548640" cy="804672"/>
-          </a:xfrm>
-          <a:prstGeom prst="rect">
-            <a:avLst/>
-          </a:prstGeom>
-          <a:noFill/>
-        </p:spPr>
-        <p:txBody>
-          <a:bodyPr wrap="square" anchor="t" lIns="0" rIns="0" tIns="0" bIns="0">
-            <a:spAutoFit/>
-          </a:bodyPr>
-          <a:lstStyle/>
-          <a:p>
-            <a:pPr algn="l">
-              <a:spcAft>
-                <a:spcPts val="1170"/>
-              </a:spcAft>
-            </a:pPr>
-            <a:r>
-              <a:rPr sz="2600" b="1" i="0">
-                <a:solidFill>
-                  <a:srgbClr val="F47B20"/>
-                </a:solidFill>
-                <a:latin typeface="Source Serif 4"/>
-              </a:rPr>
-              <a:t>3</a:t>
-            </a:r>
-          </a:p>
-        </p:txBody>
-      </p:sp>
-      <p:sp>
-        <p:nvSpPr>
-          <p:cNvPr id="11" name="TextBox 10"/>
-          <p:cNvSpPr txBox="1"/>
-          <p:nvPr/>
-        </p:nvSpPr>
-        <p:spPr>
-          <a:xfrm>
-            <a:off x="1463040" y="3703320"/>
-            <a:ext cx="9875520" cy="804672"/>
-          </a:xfrm>
-          <a:prstGeom prst="rect">
-            <a:avLst/>
-          </a:prstGeom>
-          <a:noFill/>
-        </p:spPr>
-        <p:txBody>
-          <a:bodyPr wrap="square" anchor="t" lIns="0" rIns="0" tIns="0" bIns="0">
-            <a:spAutoFit/>
-          </a:bodyPr>
-          <a:lstStyle/>
-          <a:p>
-            <a:pPr algn="l">
-              <a:spcAft>
-                <a:spcPts val="945"/>
-              </a:spcAft>
-            </a:pPr>
-            <a:r>
-              <a:rPr sz="2100" b="1" i="0">
-                <a:solidFill>
-                  <a:srgbClr val="1C1B19"/>
-                </a:solidFill>
-                <a:latin typeface="Source Serif 4"/>
-              </a:rPr>
-              <a:t>Build a hint ladder.</a:t>
-            </a:r>
-          </a:p>
-          <a:p>
-            <a:pPr algn="l">
-              <a:spcAft>
-                <a:spcPts val="945"/>
-              </a:spcAft>
-            </a:pPr>
-            <a:r>
-              <a:rPr sz="1600" b="0" i="0">
-                <a:solidFill>
-                  <a:srgbClr val="5D5A54"/>
-                </a:solidFill>
-                <a:latin typeface="Source Serif 4"/>
-              </a:rPr>
-              <a:t>Re-read, find an example, ask a peer, then ask me.</a:t>
-            </a:r>
-          </a:p>
-        </p:txBody>
-      </p:sp>
-      <p:sp>
-        <p:nvSpPr>
-          <p:cNvPr id="12" name="TextBox 11"/>
-          <p:cNvSpPr txBox="1"/>
-          <p:nvPr/>
-        </p:nvSpPr>
-        <p:spPr>
-          <a:xfrm>
-            <a:off x="822960" y="4471416"/>
-            <a:ext cx="548640" cy="804672"/>
-          </a:xfrm>
-          <a:prstGeom prst="rect">
-            <a:avLst/>
-          </a:prstGeom>
-          <a:noFill/>
-        </p:spPr>
-        <p:txBody>
-          <a:bodyPr wrap="square" anchor="t" lIns="0" rIns="0" tIns="0" bIns="0">
-            <a:spAutoFit/>
-          </a:bodyPr>
-          <a:lstStyle/>
-          <a:p>
-            <a:pPr algn="l">
-              <a:spcAft>
-                <a:spcPts val="1170"/>
-              </a:spcAft>
-            </a:pPr>
-            <a:r>
-              <a:rPr sz="2600" b="1" i="0">
-                <a:solidFill>
-                  <a:srgbClr val="F47B20"/>
-                </a:solidFill>
-                <a:latin typeface="Source Serif 4"/>
-              </a:rPr>
-              <a:t>4</a:t>
-            </a:r>
-          </a:p>
-        </p:txBody>
-      </p:sp>
-      <p:sp>
-        <p:nvSpPr>
-          <p:cNvPr id="13" name="TextBox 12"/>
-          <p:cNvSpPr txBox="1"/>
-          <p:nvPr/>
-        </p:nvSpPr>
-        <p:spPr>
-          <a:xfrm>
-            <a:off x="1463040" y="4507992"/>
-            <a:ext cx="9875520" cy="804672"/>
-          </a:xfrm>
-          <a:prstGeom prst="rect">
-            <a:avLst/>
-          </a:prstGeom>
-          <a:noFill/>
-        </p:spPr>
-        <p:txBody>
-          <a:bodyPr wrap="square" anchor="t" lIns="0" rIns="0" tIns="0" bIns="0">
-            <a:spAutoFit/>
-          </a:bodyPr>
-          <a:lstStyle/>
-          <a:p>
-            <a:pPr algn="l">
-              <a:spcAft>
-                <a:spcPts val="945"/>
-              </a:spcAft>
-            </a:pPr>
-            <a:r>
-              <a:rPr sz="2100" b="1" i="0">
-                <a:solidFill>
-                  <a:srgbClr val="1C1B19"/>
-                </a:solidFill>
-                <a:latin typeface="Source Serif 4"/>
-              </a:rPr>
-              <a:t>Name the hard part.</a:t>
-            </a:r>
-          </a:p>
-          <a:p>
-            <a:pPr algn="l">
-              <a:spcAft>
-                <a:spcPts val="945"/>
-              </a:spcAft>
-            </a:pPr>
-            <a:r>
-              <a:rPr sz="1600" b="0" i="0">
-                <a:solidFill>
-                  <a:srgbClr val="5D5A54"/>
-                </a:solidFill>
-                <a:latin typeface="Source Serif 4"/>
-              </a:rPr>
-              <a:t>"This is where most people get stuck."</a:t>
-            </a:r>
-          </a:p>
-        </p:txBody>
-      </p:sp>
-      <p:sp>
-        <p:nvSpPr>
-          <p:cNvPr id="14" name="TextBox 13"/>
-          <p:cNvSpPr txBox="1"/>
-          <p:nvPr/>
-        </p:nvSpPr>
-        <p:spPr>
-          <a:xfrm>
-            <a:off x="822960" y="5276088"/>
-            <a:ext cx="548640" cy="804672"/>
-          </a:xfrm>
-          <a:prstGeom prst="rect">
-            <a:avLst/>
-          </a:prstGeom>
-          <a:noFill/>
-        </p:spPr>
-        <p:txBody>
-          <a:bodyPr wrap="square" anchor="t" lIns="0" rIns="0" tIns="0" bIns="0">
-            <a:spAutoFit/>
-          </a:bodyPr>
-          <a:lstStyle/>
-          <a:p>
-            <a:pPr algn="l">
-              <a:spcAft>
-                <a:spcPts val="1170"/>
-              </a:spcAft>
-            </a:pPr>
-            <a:r>
-              <a:rPr sz="2600" b="1" i="0">
-                <a:solidFill>
-                  <a:srgbClr val="F47B20"/>
-                </a:solidFill>
-                <a:latin typeface="Source Serif 4"/>
-              </a:rPr>
-              <a:t>5</a:t>
-            </a:r>
-          </a:p>
-        </p:txBody>
-      </p:sp>
-      <p:sp>
-        <p:nvSpPr>
-          <p:cNvPr id="15" name="TextBox 14"/>
-          <p:cNvSpPr txBox="1"/>
-          <p:nvPr/>
-        </p:nvSpPr>
-        <p:spPr>
-          <a:xfrm>
-            <a:off x="1463040" y="5312664"/>
-            <a:ext cx="9875520" cy="804672"/>
-          </a:xfrm>
-          <a:prstGeom prst="rect">
-            <a:avLst/>
-          </a:prstGeom>
-          <a:noFill/>
-        </p:spPr>
-        <p:txBody>
-          <a:bodyPr wrap="square" anchor="t" lIns="0" rIns="0" tIns="0" bIns="0">
-            <a:spAutoFit/>
-          </a:bodyPr>
-          <a:lstStyle/>
-          <a:p>
-            <a:pPr algn="l">
-              <a:spcAft>
-                <a:spcPts val="945"/>
-              </a:spcAft>
-            </a:pPr>
-            <a:r>
-              <a:rPr sz="2100" b="1" i="0">
-                <a:solidFill>
-                  <a:srgbClr val="1C1B19"/>
-                </a:solidFill>
-                <a:latin typeface="Source Serif 4"/>
-              </a:rPr>
-              <a:t>Reframe the racing heart.</a:t>
-            </a:r>
-          </a:p>
-          <a:p>
-            <a:pPr algn="l">
-              <a:spcAft>
-                <a:spcPts val="945"/>
-              </a:spcAft>
-            </a:pPr>
-            <a:r>
-              <a:rPr sz="1600" b="0" i="0">
-                <a:solidFill>
-                  <a:srgbClr val="5D5A54"/>
-                </a:solidFill>
-                <a:latin typeface="Source Serif 4"/>
-              </a:rPr>
-              <a:t>"That's your body gearing up to work."</a:t>
+              <a:t>Show a solved problem, then a half-solved one, then let them solve alone.</a:t>
             </a:r>
           </a:p>
         </p:txBody>
@@ -5477,7 +5667,7 @@
                 </a:solidFill>
                 <a:latin typeface="Inter Tight"/>
               </a:rPr>
-              <a:t>THREE STUDENTS</a:t>
+              <a:t>THE RESEARCH</a:t>
             </a:r>
           </a:p>
         </p:txBody>
@@ -5529,8 +5719,8 @@
         </p:nvSpPr>
         <p:spPr>
           <a:xfrm>
-            <a:off x="822960" y="1005840"/>
-            <a:ext cx="10515600" cy="914400"/>
+            <a:off x="822960" y="914400"/>
+            <a:ext cx="10515600" cy="365760"/>
           </a:xfrm>
           <a:prstGeom prst="rect">
             <a:avLst/>
@@ -5545,42 +5735,150 @@
           <a:p>
             <a:pPr algn="l">
               <a:spcAft>
-                <a:spcPts val="1530"/>
-              </a:spcAft>
-            </a:pPr>
-            <a:r>
-              <a:rPr sz="3400" b="1" i="0">
+                <a:spcPts val="630"/>
+              </a:spcAft>
+            </a:pPr>
+            <a:r>
+              <a:rPr sz="1400" b="1" i="0">
+                <a:solidFill>
+                  <a:srgbClr val="0B2D5B"/>
+                </a:solidFill>
+                <a:latin typeface="Inter Tight"/>
+              </a:rPr>
+              <a:t>Kapur, 2016, Educational Psychologist</a:t>
+            </a:r>
+          </a:p>
+        </p:txBody>
+      </p:sp>
+      <p:sp>
+        <p:nvSpPr>
+          <p:cNvPr id="6" name="TextBox 5"/>
+          <p:cNvSpPr txBox="1"/>
+          <p:nvPr/>
+        </p:nvSpPr>
+        <p:spPr>
+          <a:xfrm>
+            <a:off x="822960" y="1325880"/>
+            <a:ext cx="10515600" cy="1097280"/>
+          </a:xfrm>
+          <a:prstGeom prst="rect">
+            <a:avLst/>
+          </a:prstGeom>
+          <a:noFill/>
+        </p:spPr>
+        <p:txBody>
+          <a:bodyPr wrap="square" anchor="t" lIns="0" rIns="0" tIns="0" bIns="0">
+            <a:spAutoFit/>
+          </a:bodyPr>
+          <a:lstStyle/>
+          <a:p>
+            <a:pPr algn="l">
+              <a:spcAft>
+                <a:spcPts val="1440"/>
+              </a:spcAft>
+            </a:pPr>
+            <a:r>
+              <a:rPr sz="3200" b="1" i="0">
                 <a:solidFill>
                   <a:srgbClr val="1C1B19"/>
                 </a:solidFill>
                 <a:latin typeface="Source Serif 4"/>
               </a:rPr>
-              <a:t>What would you try first?</a:t>
-            </a:r>
-          </a:p>
-        </p:txBody>
-      </p:sp>
-      <p:sp>
-        <p:nvSpPr>
-          <p:cNvPr id="6" name="Rectangle 5"/>
+              <a:t>Struggling first can help, when it's designed.</a:t>
+            </a:r>
+          </a:p>
+        </p:txBody>
+      </p:sp>
+      <p:sp>
+        <p:nvSpPr>
+          <p:cNvPr id="7" name="TextBox 6"/>
+          <p:cNvSpPr txBox="1"/>
+          <p:nvPr/>
+        </p:nvSpPr>
+        <p:spPr>
+          <a:xfrm>
+            <a:off x="822960" y="2514600"/>
+            <a:ext cx="10515600" cy="2194560"/>
+          </a:xfrm>
+          <a:prstGeom prst="rect">
+            <a:avLst/>
+          </a:prstGeom>
+          <a:noFill/>
+        </p:spPr>
+        <p:txBody>
+          <a:bodyPr wrap="square" anchor="t" lIns="0" rIns="0" tIns="0" bIns="0">
+            <a:spAutoFit/>
+          </a:bodyPr>
+          <a:lstStyle/>
+          <a:p>
+            <a:pPr algn="l">
+              <a:spcAft>
+                <a:spcPts val="855"/>
+              </a:spcAft>
+            </a:pPr>
+            <a:r>
+              <a:rPr sz="1900" b="0" i="0">
+                <a:solidFill>
+                  <a:srgbClr val="1C1B19"/>
+                </a:solidFill>
+                <a:latin typeface="Source Serif 4"/>
+              </a:rPr>
+              <a:t>•  Students who tried a new problem before instruction often understood it more deeply.</a:t>
+            </a:r>
+          </a:p>
+          <a:p>
+            <a:pPr algn="l">
+              <a:spcAft>
+                <a:spcPts val="855"/>
+              </a:spcAft>
+            </a:pPr>
+            <a:r>
+              <a:rPr sz="1900" b="0" i="0">
+                <a:solidFill>
+                  <a:srgbClr val="1C1B19"/>
+                </a:solidFill>
+                <a:latin typeface="Source Serif 4"/>
+              </a:rPr>
+              <a:t>•  It worked when teaching afterward built on their attempts.</a:t>
+            </a:r>
+          </a:p>
+          <a:p>
+            <a:pPr algn="l">
+              <a:spcAft>
+                <a:spcPts val="855"/>
+              </a:spcAft>
+            </a:pPr>
+            <a:r>
+              <a:rPr sz="1900" b="0" i="0">
+                <a:solidFill>
+                  <a:srgbClr val="1C1B19"/>
+                </a:solidFill>
+                <a:latin typeface="Source Serif 4"/>
+              </a:rPr>
+              <a:t>•  Struggle with no follow-up taught little.</a:t>
+            </a:r>
+          </a:p>
+        </p:txBody>
+      </p:sp>
+      <p:sp>
+        <p:nvSpPr>
+          <p:cNvPr id="8" name="Rectangle 7"/>
           <p:cNvSpPr/>
           <p:nvPr/>
         </p:nvSpPr>
         <p:spPr>
           <a:xfrm>
-            <a:off x="822960" y="2103120"/>
-            <a:ext cx="3322320" cy="3840480"/>
+            <a:off x="822960" y="4892040"/>
+            <a:ext cx="73152" cy="1097280"/>
           </a:xfrm>
           <a:prstGeom prst="rect">
             <a:avLst/>
           </a:prstGeom>
           <a:solidFill>
-            <a:srgbClr val="FFFFFF"/>
+            <a:srgbClr val="F47B20"/>
           </a:solidFill>
-          <a:ln w="15875">
-            <a:solidFill>
-              <a:srgbClr val="D8D2C6"/>
-            </a:solidFill>
+          <a:ln>
+            <a:noFill/>
           </a:ln>
           <a:effectLst/>
         </p:spPr>
@@ -5608,14 +5906,14 @@
       </p:sp>
       <p:sp>
         <p:nvSpPr>
-          <p:cNvPr id="7" name="TextBox 6"/>
+          <p:cNvPr id="9" name="TextBox 8"/>
           <p:cNvSpPr txBox="1"/>
           <p:nvPr/>
         </p:nvSpPr>
         <p:spPr>
           <a:xfrm>
-            <a:off x="1051560" y="2286000"/>
-            <a:ext cx="2865120" cy="365760"/>
+            <a:off x="1097280" y="4892040"/>
+            <a:ext cx="10241280" cy="1188720"/>
           </a:xfrm>
           <a:prstGeom prst="rect">
             <a:avLst/>
@@ -5630,304 +5928,33 @@
           <a:p>
             <a:pPr algn="l">
               <a:spcAft>
-                <a:spcPts val="585"/>
-              </a:spcAft>
-            </a:pPr>
-            <a:r>
-              <a:rPr sz="1300" b="1" i="0">
-                <a:solidFill>
-                  <a:srgbClr val="0B2D5B"/>
+                <a:spcPts val="855"/>
+              </a:spcAft>
+            </a:pPr>
+            <a:r>
+              <a:rPr sz="1200" b="1" i="0">
+                <a:solidFill>
+                  <a:srgbClr val="F47B20"/>
                 </a:solidFill>
                 <a:latin typeface="Inter Tight"/>
               </a:rPr>
-              <a:t>MAYA, 9TH GRADE CHEMISTRY</a:t>
-            </a:r>
-          </a:p>
-        </p:txBody>
-      </p:sp>
-      <p:sp>
-        <p:nvSpPr>
-          <p:cNvPr id="8" name="TextBox 7"/>
-          <p:cNvSpPr txBox="1"/>
-          <p:nvPr/>
-        </p:nvSpPr>
-        <p:spPr>
-          <a:xfrm>
-            <a:off x="1051560" y="2743200"/>
-            <a:ext cx="2865120" cy="3017520"/>
-          </a:xfrm>
-          <a:prstGeom prst="rect">
-            <a:avLst/>
-          </a:prstGeom>
-          <a:noFill/>
-        </p:spPr>
-        <p:txBody>
-          <a:bodyPr wrap="square" anchor="t" lIns="0" rIns="0" tIns="0" bIns="0">
-            <a:spAutoFit/>
-          </a:bodyPr>
-          <a:lstStyle/>
-          <a:p>
-            <a:pPr algn="l">
-              <a:spcAft>
-                <a:spcPts val="810"/>
-              </a:spcAft>
-            </a:pPr>
-            <a:r>
-              <a:rPr sz="1800" b="0" i="0">
+              <a:t>IN CLASS</a:t>
+            </a:r>
+          </a:p>
+          <a:p>
+            <a:pPr algn="l">
+              <a:spcAft>
+                <a:spcPts val="855"/>
+              </a:spcAft>
+            </a:pPr>
+            <a:r>
+              <a:rPr sz="1900" b="0" i="0">
                 <a:solidFill>
                   <a:srgbClr val="1C1B19"/>
                 </a:solidFill>
                 <a:latin typeface="Source Serif 4"/>
               </a:rPr>
-              <a:t>Ten minutes into a stoichiometry set, her page is blank. When you walk by she says, "I'm fine."</a:t>
-            </a:r>
-          </a:p>
-        </p:txBody>
-      </p:sp>
-      <p:sp>
-        <p:nvSpPr>
-          <p:cNvPr id="9" name="Rectangle 8"/>
-          <p:cNvSpPr/>
-          <p:nvPr/>
-        </p:nvSpPr>
-        <p:spPr>
-          <a:xfrm>
-            <a:off x="4419600" y="2103120"/>
-            <a:ext cx="3322320" cy="3840480"/>
-          </a:xfrm>
-          <a:prstGeom prst="rect">
-            <a:avLst/>
-          </a:prstGeom>
-          <a:solidFill>
-            <a:srgbClr val="FFFFFF"/>
-          </a:solidFill>
-          <a:ln w="15875">
-            <a:solidFill>
-              <a:srgbClr val="D8D2C6"/>
-            </a:solidFill>
-          </a:ln>
-          <a:effectLst/>
-        </p:spPr>
-        <p:style>
-          <a:lnRef idx="1">
-            <a:schemeClr val="accent1"/>
-          </a:lnRef>
-          <a:fillRef idx="3">
-            <a:schemeClr val="accent1"/>
-          </a:fillRef>
-          <a:effectRef idx="2">
-            <a:schemeClr val="accent1"/>
-          </a:effectRef>
-          <a:fontRef idx="minor">
-            <a:schemeClr val="lt1"/>
-          </a:fontRef>
-        </p:style>
-        <p:txBody>
-          <a:bodyPr rtlCol="0" anchor="ctr"/>
-          <a:lstStyle/>
-          <a:p>
-            <a:pPr algn="ctr"/>
-          </a:p>
-        </p:txBody>
-      </p:sp>
-      <p:sp>
-        <p:nvSpPr>
-          <p:cNvPr id="10" name="TextBox 9"/>
-          <p:cNvSpPr txBox="1"/>
-          <p:nvPr/>
-        </p:nvSpPr>
-        <p:spPr>
-          <a:xfrm>
-            <a:off x="4648200" y="2286000"/>
-            <a:ext cx="2865120" cy="365760"/>
-          </a:xfrm>
-          <a:prstGeom prst="rect">
-            <a:avLst/>
-          </a:prstGeom>
-          <a:noFill/>
-        </p:spPr>
-        <p:txBody>
-          <a:bodyPr wrap="square" anchor="t" lIns="0" rIns="0" tIns="0" bIns="0">
-            <a:spAutoFit/>
-          </a:bodyPr>
-          <a:lstStyle/>
-          <a:p>
-            <a:pPr algn="l">
-              <a:spcAft>
-                <a:spcPts val="585"/>
-              </a:spcAft>
-            </a:pPr>
-            <a:r>
-              <a:rPr sz="1300" b="1" i="0">
-                <a:solidFill>
-                  <a:srgbClr val="0B2D5B"/>
-                </a:solidFill>
-                <a:latin typeface="Inter Tight"/>
-              </a:rPr>
-              <a:t>THEO, 7TH GRADE SCIENCE</a:t>
-            </a:r>
-          </a:p>
-        </p:txBody>
-      </p:sp>
-      <p:sp>
-        <p:nvSpPr>
-          <p:cNvPr id="11" name="TextBox 10"/>
-          <p:cNvSpPr txBox="1"/>
-          <p:nvPr/>
-        </p:nvSpPr>
-        <p:spPr>
-          <a:xfrm>
-            <a:off x="4648200" y="2743200"/>
-            <a:ext cx="2865120" cy="3017520"/>
-          </a:xfrm>
-          <a:prstGeom prst="rect">
-            <a:avLst/>
-          </a:prstGeom>
-          <a:noFill/>
-        </p:spPr>
-        <p:txBody>
-          <a:bodyPr wrap="square" anchor="t" lIns="0" rIns="0" tIns="0" bIns="0">
-            <a:spAutoFit/>
-          </a:bodyPr>
-          <a:lstStyle/>
-          <a:p>
-            <a:pPr algn="l">
-              <a:spcAft>
-                <a:spcPts val="810"/>
-              </a:spcAft>
-            </a:pPr>
-            <a:r>
-              <a:rPr sz="1800" b="0" i="0">
-                <a:solidFill>
-                  <a:srgbClr val="1C1B19"/>
-                </a:solidFill>
-                <a:latin typeface="Source Serif 4"/>
-              </a:rPr>
-              <a:t>Halfway through the lab write-up he says, "I'm just not a science person," and asks for the nurse.</a:t>
-            </a:r>
-          </a:p>
-        </p:txBody>
-      </p:sp>
-      <p:sp>
-        <p:nvSpPr>
-          <p:cNvPr id="12" name="Rectangle 11"/>
-          <p:cNvSpPr/>
-          <p:nvPr/>
-        </p:nvSpPr>
-        <p:spPr>
-          <a:xfrm>
-            <a:off x="8016239" y="2103120"/>
-            <a:ext cx="3322320" cy="3840480"/>
-          </a:xfrm>
-          <a:prstGeom prst="rect">
-            <a:avLst/>
-          </a:prstGeom>
-          <a:solidFill>
-            <a:srgbClr val="FFFFFF"/>
-          </a:solidFill>
-          <a:ln w="15875">
-            <a:solidFill>
-              <a:srgbClr val="D8D2C6"/>
-            </a:solidFill>
-          </a:ln>
-          <a:effectLst/>
-        </p:spPr>
-        <p:style>
-          <a:lnRef idx="1">
-            <a:schemeClr val="accent1"/>
-          </a:lnRef>
-          <a:fillRef idx="3">
-            <a:schemeClr val="accent1"/>
-          </a:fillRef>
-          <a:effectRef idx="2">
-            <a:schemeClr val="accent1"/>
-          </a:effectRef>
-          <a:fontRef idx="minor">
-            <a:schemeClr val="lt1"/>
-          </a:fontRef>
-        </p:style>
-        <p:txBody>
-          <a:bodyPr rtlCol="0" anchor="ctr"/>
-          <a:lstStyle/>
-          <a:p>
-            <a:pPr algn="ctr"/>
-          </a:p>
-        </p:txBody>
-      </p:sp>
-      <p:sp>
-        <p:nvSpPr>
-          <p:cNvPr id="13" name="TextBox 12"/>
-          <p:cNvSpPr txBox="1"/>
-          <p:nvPr/>
-        </p:nvSpPr>
-        <p:spPr>
-          <a:xfrm>
-            <a:off x="8244839" y="2286000"/>
-            <a:ext cx="2865120" cy="365760"/>
-          </a:xfrm>
-          <a:prstGeom prst="rect">
-            <a:avLst/>
-          </a:prstGeom>
-          <a:noFill/>
-        </p:spPr>
-        <p:txBody>
-          <a:bodyPr wrap="square" anchor="t" lIns="0" rIns="0" tIns="0" bIns="0">
-            <a:spAutoFit/>
-          </a:bodyPr>
-          <a:lstStyle/>
-          <a:p>
-            <a:pPr algn="l">
-              <a:spcAft>
-                <a:spcPts val="585"/>
-              </a:spcAft>
-            </a:pPr>
-            <a:r>
-              <a:rPr sz="1300" b="1" i="0">
-                <a:solidFill>
-                  <a:srgbClr val="0B2D5B"/>
-                </a:solidFill>
-                <a:latin typeface="Inter Tight"/>
-              </a:rPr>
-              <a:t>ANA, 10TH GRADE PHYSICS</a:t>
-            </a:r>
-          </a:p>
-        </p:txBody>
-      </p:sp>
-      <p:sp>
-        <p:nvSpPr>
-          <p:cNvPr id="14" name="TextBox 13"/>
-          <p:cNvSpPr txBox="1"/>
-          <p:nvPr/>
-        </p:nvSpPr>
-        <p:spPr>
-          <a:xfrm>
-            <a:off x="8244839" y="2743200"/>
-            <a:ext cx="2865120" cy="3017520"/>
-          </a:xfrm>
-          <a:prstGeom prst="rect">
-            <a:avLst/>
-          </a:prstGeom>
-          <a:noFill/>
-        </p:spPr>
-        <p:txBody>
-          <a:bodyPr wrap="square" anchor="t" lIns="0" rIns="0" tIns="0" bIns="0">
-            <a:spAutoFit/>
-          </a:bodyPr>
-          <a:lstStyle/>
-          <a:p>
-            <a:pPr algn="l">
-              <a:spcAft>
-                <a:spcPts val="810"/>
-              </a:spcAft>
-            </a:pPr>
-            <a:r>
-              <a:rPr sz="1800" b="0" i="0">
-                <a:solidFill>
-                  <a:srgbClr val="1C1B19"/>
-                </a:solidFill>
-                <a:latin typeface="Source Serif 4"/>
-              </a:rPr>
-              <a:t>Raises her hand after every step to ask, "Is this right?" She's usually right.</a:t>
+              <a:t>Productive failure is planned: a doable problem, then teaching that uses what they tried.</a:t>
             </a:r>
           </a:p>
         </p:txBody>
@@ -6036,7 +6063,7 @@
                 </a:solidFill>
                 <a:latin typeface="Inter Tight"/>
               </a:rPr>
-              <a:t>FEEDBACK</a:t>
+              <a:t>READING THE LINE</a:t>
             </a:r>
           </a:p>
         </p:txBody>
@@ -6114,7 +6141,7 @@
                 </a:solidFill>
                 <a:latin typeface="Source Serif 4"/>
               </a:rPr>
-              <a:t>Feedback that keeps them in it</a:t>
+              <a:t>Stretch or shutdown?</a:t>
             </a:r>
           </a:p>
         </p:txBody>
@@ -6199,7 +6226,7 @@
                 </a:solidFill>
                 <a:latin typeface="Inter Tight"/>
               </a:rPr>
-              <a:t>INSTEAD OF</a:t>
+              <a:t>STRETCH (KEEP GOING)</a:t>
             </a:r>
           </a:p>
         </p:txBody>
@@ -6238,7 +6265,7 @@
                 </a:solidFill>
                 <a:latin typeface="Source Serif 4"/>
               </a:rPr>
-              <a:t>"Good effort, but this is wrong."</a:t>
+              <a:t>Still trying new attempts</a:t>
             </a:r>
           </a:p>
           <a:p>
@@ -6254,7 +6281,7 @@
                 </a:solidFill>
                 <a:latin typeface="Source Serif 4"/>
               </a:rPr>
-              <a:t>"Here, let me show you."</a:t>
+              <a:t>Asks narrower questions</a:t>
             </a:r>
           </a:p>
           <a:p>
@@ -6270,7 +6297,7 @@
                 </a:solidFill>
                 <a:latin typeface="Source Serif 4"/>
               </a:rPr>
-              <a:t>"Don't worry, it's really hard."</a:t>
+              <a:t>Erases and retries</a:t>
             </a:r>
           </a:p>
           <a:p>
@@ -6286,7 +6313,7 @@
                 </a:solidFill>
                 <a:latin typeface="Source Serif 4"/>
               </a:rPr>
-              <a:t>"You're so smart."</a:t>
+              <a:t>Frustrated but still in it</a:t>
             </a:r>
           </a:p>
         </p:txBody>
@@ -6371,7 +6398,7 @@
                 </a:solidFill>
                 <a:latin typeface="Inter Tight"/>
               </a:rPr>
-              <a:t>TRY</a:t>
+              <a:t>SHUTDOWN (CHANGE SOMETHING)</a:t>
             </a:r>
           </a:p>
         </p:txBody>
@@ -6410,7 +6437,7 @@
                 </a:solidFill>
                 <a:latin typeface="Source Serif 4"/>
               </a:rPr>
-              <a:t>"I'm giving you these comments because I know you can reach a high standard."</a:t>
+              <a:t>Nothing on the page</a:t>
             </a:r>
           </a:p>
           <a:p>
@@ -6426,7 +6453,7 @@
                 </a:solidFill>
                 <a:latin typeface="Source Serif 4"/>
               </a:rPr>
-              <a:t>"Which step do you trust? Start there."</a:t>
+              <a:t>"I don't get any of this"</a:t>
             </a:r>
           </a:p>
           <a:p>
@@ -6442,7 +6469,7 @@
                 </a:solidFill>
                 <a:latin typeface="Source Serif 4"/>
               </a:rPr>
-              <a:t>"This is the step where most people get stuck."</a:t>
+              <a:t>Phone out, bathroom, jokes</a:t>
             </a:r>
           </a:p>
           <a:p>
@@ -6458,7 +6485,7 @@
                 </a:solidFill>
                 <a:latin typeface="Source Serif 4"/>
               </a:rPr>
-              <a:t>"Your second try used a better strategy."</a:t>
+              <a:t>Tears, anger, or blank stare</a:t>
             </a:r>
           </a:p>
         </p:txBody>
@@ -6567,7 +6594,7 @@
                 </a:solidFill>
                 <a:latin typeface="Inter Tight"/>
               </a:rPr>
-              <a:t>BEFORE YOU GO</a:t>
+              <a:t>WHY THEY OPT OUT</a:t>
             </a:r>
           </a:p>
         </p:txBody>
@@ -6619,7 +6646,7 @@
         </p:nvSpPr>
         <p:spPr>
           <a:xfrm>
-            <a:off x="822960" y="1188720"/>
+            <a:off x="822960" y="1005840"/>
             <a:ext cx="10515600" cy="914400"/>
           </a:xfrm>
           <a:prstGeom prst="rect">
@@ -6635,70 +6662,31 @@
           <a:p>
             <a:pPr algn="l">
               <a:spcAft>
-                <a:spcPts val="1620"/>
-              </a:spcAft>
-            </a:pPr>
-            <a:r>
-              <a:rPr sz="3600" b="1" i="0">
+                <a:spcPts val="1530"/>
+              </a:spcAft>
+            </a:pPr>
+            <a:r>
+              <a:rPr sz="3400" b="1" i="0">
                 <a:solidFill>
                   <a:srgbClr val="1C1B19"/>
                 </a:solidFill>
                 <a:latin typeface="Source Serif 4"/>
               </a:rPr>
-              <a:t>One move this week</a:t>
-            </a:r>
-          </a:p>
-        </p:txBody>
-      </p:sp>
-      <p:sp>
-        <p:nvSpPr>
-          <p:cNvPr id="6" name="TextBox 5"/>
-          <p:cNvSpPr txBox="1"/>
-          <p:nvPr/>
-        </p:nvSpPr>
-        <p:spPr>
-          <a:xfrm>
-            <a:off x="822960" y="2286000"/>
-            <a:ext cx="10515600" cy="1463040"/>
-          </a:xfrm>
-          <a:prstGeom prst="rect">
-            <a:avLst/>
-          </a:prstGeom>
-          <a:noFill/>
-        </p:spPr>
-        <p:txBody>
-          <a:bodyPr wrap="square" anchor="t" lIns="0" rIns="0" tIns="0" bIns="0">
-            <a:spAutoFit/>
-          </a:bodyPr>
-          <a:lstStyle/>
-          <a:p>
-            <a:pPr algn="l">
-              <a:spcAft>
-                <a:spcPts val="1080"/>
-              </a:spcAft>
-            </a:pPr>
-            <a:r>
-              <a:rPr sz="2400" b="0" i="0">
-                <a:solidFill>
-                  <a:srgbClr val="1C1B19"/>
-                </a:solidFill>
-                <a:latin typeface="Source Serif 4"/>
-              </a:rPr>
-              <a:t>Pick one scaffold to try with one class. We'll swap notes next meeting.</a:t>
-            </a:r>
-          </a:p>
-        </p:txBody>
-      </p:sp>
-      <p:sp>
-        <p:nvSpPr>
-          <p:cNvPr id="7" name="Rectangle 6"/>
+              <a:t>The shutdown loop</a:t>
+            </a:r>
+          </a:p>
+        </p:txBody>
+      </p:sp>
+      <p:sp>
+        <p:nvSpPr>
+          <p:cNvPr id="6" name="Rectangle 5"/>
           <p:cNvSpPr/>
           <p:nvPr/>
         </p:nvSpPr>
         <p:spPr>
           <a:xfrm>
-            <a:off x="822960" y="4023360"/>
-            <a:ext cx="10515600" cy="1371600"/>
+            <a:off x="822960" y="2743200"/>
+            <a:ext cx="1874519" cy="1005840"/>
           </a:xfrm>
           <a:prstGeom prst="rect">
             <a:avLst/>
@@ -6708,7 +6696,7 @@
           </a:solidFill>
           <a:ln w="15875">
             <a:solidFill>
-              <a:srgbClr val="1C1B19"/>
+              <a:srgbClr val="0B2D5B"/>
             </a:solidFill>
           </a:ln>
           <a:effectLst/>
@@ -6737,14 +6725,537 @@
       </p:sp>
       <p:sp>
         <p:nvSpPr>
-          <p:cNvPr id="8" name="TextBox 7"/>
+          <p:cNvPr id="7" name="TextBox 6"/>
           <p:cNvSpPr txBox="1"/>
           <p:nvPr/>
         </p:nvSpPr>
         <p:spPr>
           <a:xfrm>
-            <a:off x="1097280" y="4206240"/>
-            <a:ext cx="10058400" cy="365760"/>
+            <a:off x="822960" y="2743200"/>
+            <a:ext cx="1874519" cy="1005840"/>
+          </a:xfrm>
+          <a:prstGeom prst="rect">
+            <a:avLst/>
+          </a:prstGeom>
+          <a:noFill/>
+        </p:spPr>
+        <p:txBody>
+          <a:bodyPr wrap="square" anchor="ctr" lIns="0" rIns="0" tIns="0" bIns="0">
+            <a:spAutoFit/>
+          </a:bodyPr>
+          <a:lstStyle/>
+          <a:p>
+            <a:pPr algn="ctr">
+              <a:spcAft>
+                <a:spcPts val="900"/>
+              </a:spcAft>
+            </a:pPr>
+            <a:r>
+              <a:rPr sz="2000" b="1" i="0">
+                <a:solidFill>
+                  <a:srgbClr val="1C1B19"/>
+                </a:solidFill>
+                <a:latin typeface="Source Serif 4"/>
+              </a:rPr>
+              <a:t>Hard task</a:t>
+            </a:r>
+          </a:p>
+        </p:txBody>
+      </p:sp>
+      <p:cxnSp>
+        <p:nvCxnSpPr>
+          <p:cNvPr id="8" name="Connector 7"/>
+          <p:cNvCxnSpPr/>
+          <p:nvPr/>
+        </p:nvCxnSpPr>
+        <p:spPr>
+          <a:xfrm>
+            <a:off x="2752344" y="3246120"/>
+            <a:ext cx="176021" cy="0"/>
+          </a:xfrm>
+          <a:prstGeom prst="line">
+            <a:avLst/>
+          </a:prstGeom>
+          <a:ln w="31750">
+            <a:solidFill>
+              <a:srgbClr val="F47B20"/>
+            </a:solidFill>
+            <a:tailEnd type="triangle"/>
+          </a:ln>
+        </p:spPr>
+        <p:style>
+          <a:lnRef idx="2">
+            <a:schemeClr val="accent1"/>
+          </a:lnRef>
+          <a:fillRef idx="0">
+            <a:schemeClr val="accent1"/>
+          </a:fillRef>
+          <a:effectRef idx="1">
+            <a:schemeClr val="accent1"/>
+          </a:effectRef>
+          <a:fontRef idx="minor">
+            <a:schemeClr val="tx1"/>
+          </a:fontRef>
+        </p:style>
+      </p:cxnSp>
+      <p:sp>
+        <p:nvSpPr>
+          <p:cNvPr id="9" name="Rectangle 8"/>
+          <p:cNvSpPr/>
+          <p:nvPr/>
+        </p:nvSpPr>
+        <p:spPr>
+          <a:xfrm>
+            <a:off x="2983229" y="2743200"/>
+            <a:ext cx="1874519" cy="1005840"/>
+          </a:xfrm>
+          <a:prstGeom prst="rect">
+            <a:avLst/>
+          </a:prstGeom>
+          <a:solidFill>
+            <a:srgbClr val="FFFFFF"/>
+          </a:solidFill>
+          <a:ln w="15875">
+            <a:solidFill>
+              <a:srgbClr val="0B2D5B"/>
+            </a:solidFill>
+          </a:ln>
+          <a:effectLst/>
+        </p:spPr>
+        <p:style>
+          <a:lnRef idx="1">
+            <a:schemeClr val="accent1"/>
+          </a:lnRef>
+          <a:fillRef idx="3">
+            <a:schemeClr val="accent1"/>
+          </a:fillRef>
+          <a:effectRef idx="2">
+            <a:schemeClr val="accent1"/>
+          </a:effectRef>
+          <a:fontRef idx="minor">
+            <a:schemeClr val="lt1"/>
+          </a:fontRef>
+        </p:style>
+        <p:txBody>
+          <a:bodyPr rtlCol="0" anchor="ctr"/>
+          <a:lstStyle/>
+          <a:p>
+            <a:pPr algn="ctr"/>
+          </a:p>
+        </p:txBody>
+      </p:sp>
+      <p:sp>
+        <p:nvSpPr>
+          <p:cNvPr id="10" name="TextBox 9"/>
+          <p:cNvSpPr txBox="1"/>
+          <p:nvPr/>
+        </p:nvSpPr>
+        <p:spPr>
+          <a:xfrm>
+            <a:off x="2983229" y="2743200"/>
+            <a:ext cx="1874519" cy="1005840"/>
+          </a:xfrm>
+          <a:prstGeom prst="rect">
+            <a:avLst/>
+          </a:prstGeom>
+          <a:noFill/>
+        </p:spPr>
+        <p:txBody>
+          <a:bodyPr wrap="square" anchor="ctr" lIns="0" rIns="0" tIns="0" bIns="0">
+            <a:spAutoFit/>
+          </a:bodyPr>
+          <a:lstStyle/>
+          <a:p>
+            <a:pPr algn="ctr">
+              <a:spcAft>
+                <a:spcPts val="900"/>
+              </a:spcAft>
+            </a:pPr>
+            <a:r>
+              <a:rPr sz="2000" b="1" i="0">
+                <a:solidFill>
+                  <a:srgbClr val="1C1B19"/>
+                </a:solidFill>
+                <a:latin typeface="Source Serif 4"/>
+              </a:rPr>
+              <a:t>Alarm</a:t>
+            </a:r>
+          </a:p>
+        </p:txBody>
+      </p:sp>
+      <p:cxnSp>
+        <p:nvCxnSpPr>
+          <p:cNvPr id="11" name="Connector 10"/>
+          <p:cNvCxnSpPr/>
+          <p:nvPr/>
+        </p:nvCxnSpPr>
+        <p:spPr>
+          <a:xfrm>
+            <a:off x="4912614" y="3246120"/>
+            <a:ext cx="176022" cy="0"/>
+          </a:xfrm>
+          <a:prstGeom prst="line">
+            <a:avLst/>
+          </a:prstGeom>
+          <a:ln w="31750">
+            <a:solidFill>
+              <a:srgbClr val="F47B20"/>
+            </a:solidFill>
+            <a:tailEnd type="triangle"/>
+          </a:ln>
+        </p:spPr>
+        <p:style>
+          <a:lnRef idx="2">
+            <a:schemeClr val="accent1"/>
+          </a:lnRef>
+          <a:fillRef idx="0">
+            <a:schemeClr val="accent1"/>
+          </a:fillRef>
+          <a:effectRef idx="1">
+            <a:schemeClr val="accent1"/>
+          </a:effectRef>
+          <a:fontRef idx="minor">
+            <a:schemeClr val="tx1"/>
+          </a:fontRef>
+        </p:style>
+      </p:cxnSp>
+      <p:sp>
+        <p:nvSpPr>
+          <p:cNvPr id="12" name="Rectangle 11"/>
+          <p:cNvSpPr/>
+          <p:nvPr/>
+        </p:nvSpPr>
+        <p:spPr>
+          <a:xfrm>
+            <a:off x="5143500" y="2743200"/>
+            <a:ext cx="1874519" cy="1005840"/>
+          </a:xfrm>
+          <a:prstGeom prst="rect">
+            <a:avLst/>
+          </a:prstGeom>
+          <a:solidFill>
+            <a:srgbClr val="FFFFFF"/>
+          </a:solidFill>
+          <a:ln w="15875">
+            <a:solidFill>
+              <a:srgbClr val="0B2D5B"/>
+            </a:solidFill>
+          </a:ln>
+          <a:effectLst/>
+        </p:spPr>
+        <p:style>
+          <a:lnRef idx="1">
+            <a:schemeClr val="accent1"/>
+          </a:lnRef>
+          <a:fillRef idx="3">
+            <a:schemeClr val="accent1"/>
+          </a:fillRef>
+          <a:effectRef idx="2">
+            <a:schemeClr val="accent1"/>
+          </a:effectRef>
+          <a:fontRef idx="minor">
+            <a:schemeClr val="lt1"/>
+          </a:fontRef>
+        </p:style>
+        <p:txBody>
+          <a:bodyPr rtlCol="0" anchor="ctr"/>
+          <a:lstStyle/>
+          <a:p>
+            <a:pPr algn="ctr"/>
+          </a:p>
+        </p:txBody>
+      </p:sp>
+      <p:sp>
+        <p:nvSpPr>
+          <p:cNvPr id="13" name="TextBox 12"/>
+          <p:cNvSpPr txBox="1"/>
+          <p:nvPr/>
+        </p:nvSpPr>
+        <p:spPr>
+          <a:xfrm>
+            <a:off x="5143500" y="2743200"/>
+            <a:ext cx="1874519" cy="1005840"/>
+          </a:xfrm>
+          <a:prstGeom prst="rect">
+            <a:avLst/>
+          </a:prstGeom>
+          <a:noFill/>
+        </p:spPr>
+        <p:txBody>
+          <a:bodyPr wrap="square" anchor="ctr" lIns="0" rIns="0" tIns="0" bIns="0">
+            <a:spAutoFit/>
+          </a:bodyPr>
+          <a:lstStyle/>
+          <a:p>
+            <a:pPr algn="ctr">
+              <a:spcAft>
+                <a:spcPts val="900"/>
+              </a:spcAft>
+            </a:pPr>
+            <a:r>
+              <a:rPr sz="2000" b="1" i="0">
+                <a:solidFill>
+                  <a:srgbClr val="1C1B19"/>
+                </a:solidFill>
+                <a:latin typeface="Source Serif 4"/>
+              </a:rPr>
+              <a:t>"I can't"</a:t>
+            </a:r>
+          </a:p>
+        </p:txBody>
+      </p:sp>
+      <p:cxnSp>
+        <p:nvCxnSpPr>
+          <p:cNvPr id="14" name="Connector 13"/>
+          <p:cNvCxnSpPr/>
+          <p:nvPr/>
+        </p:nvCxnSpPr>
+        <p:spPr>
+          <a:xfrm>
+            <a:off x="7072883" y="3246120"/>
+            <a:ext cx="176023" cy="0"/>
+          </a:xfrm>
+          <a:prstGeom prst="line">
+            <a:avLst/>
+          </a:prstGeom>
+          <a:ln w="31750">
+            <a:solidFill>
+              <a:srgbClr val="F47B20"/>
+            </a:solidFill>
+            <a:tailEnd type="triangle"/>
+          </a:ln>
+        </p:spPr>
+        <p:style>
+          <a:lnRef idx="2">
+            <a:schemeClr val="accent1"/>
+          </a:lnRef>
+          <a:fillRef idx="0">
+            <a:schemeClr val="accent1"/>
+          </a:fillRef>
+          <a:effectRef idx="1">
+            <a:schemeClr val="accent1"/>
+          </a:effectRef>
+          <a:fontRef idx="minor">
+            <a:schemeClr val="tx1"/>
+          </a:fontRef>
+        </p:style>
+      </p:cxnSp>
+      <p:sp>
+        <p:nvSpPr>
+          <p:cNvPr id="15" name="Rectangle 14"/>
+          <p:cNvSpPr/>
+          <p:nvPr/>
+        </p:nvSpPr>
+        <p:spPr>
+          <a:xfrm>
+            <a:off x="7303770" y="2743200"/>
+            <a:ext cx="1874519" cy="1005840"/>
+          </a:xfrm>
+          <a:prstGeom prst="rect">
+            <a:avLst/>
+          </a:prstGeom>
+          <a:solidFill>
+            <a:srgbClr val="FFFFFF"/>
+          </a:solidFill>
+          <a:ln w="15875">
+            <a:solidFill>
+              <a:srgbClr val="0B2D5B"/>
+            </a:solidFill>
+          </a:ln>
+          <a:effectLst/>
+        </p:spPr>
+        <p:style>
+          <a:lnRef idx="1">
+            <a:schemeClr val="accent1"/>
+          </a:lnRef>
+          <a:fillRef idx="3">
+            <a:schemeClr val="accent1"/>
+          </a:fillRef>
+          <a:effectRef idx="2">
+            <a:schemeClr val="accent1"/>
+          </a:effectRef>
+          <a:fontRef idx="minor">
+            <a:schemeClr val="lt1"/>
+          </a:fontRef>
+        </p:style>
+        <p:txBody>
+          <a:bodyPr rtlCol="0" anchor="ctr"/>
+          <a:lstStyle/>
+          <a:p>
+            <a:pPr algn="ctr"/>
+          </a:p>
+        </p:txBody>
+      </p:sp>
+      <p:sp>
+        <p:nvSpPr>
+          <p:cNvPr id="16" name="TextBox 15"/>
+          <p:cNvSpPr txBox="1"/>
+          <p:nvPr/>
+        </p:nvSpPr>
+        <p:spPr>
+          <a:xfrm>
+            <a:off x="7303770" y="2743200"/>
+            <a:ext cx="1874519" cy="1005840"/>
+          </a:xfrm>
+          <a:prstGeom prst="rect">
+            <a:avLst/>
+          </a:prstGeom>
+          <a:noFill/>
+        </p:spPr>
+        <p:txBody>
+          <a:bodyPr wrap="square" anchor="ctr" lIns="0" rIns="0" tIns="0" bIns="0">
+            <a:spAutoFit/>
+          </a:bodyPr>
+          <a:lstStyle/>
+          <a:p>
+            <a:pPr algn="ctr">
+              <a:spcAft>
+                <a:spcPts val="900"/>
+              </a:spcAft>
+            </a:pPr>
+            <a:r>
+              <a:rPr sz="2000" b="1" i="0">
+                <a:solidFill>
+                  <a:srgbClr val="1C1B19"/>
+                </a:solidFill>
+                <a:latin typeface="Source Serif 4"/>
+              </a:rPr>
+              <a:t>Opt out</a:t>
+            </a:r>
+          </a:p>
+        </p:txBody>
+      </p:sp>
+      <p:cxnSp>
+        <p:nvCxnSpPr>
+          <p:cNvPr id="17" name="Connector 16"/>
+          <p:cNvCxnSpPr/>
+          <p:nvPr/>
+        </p:nvCxnSpPr>
+        <p:spPr>
+          <a:xfrm>
+            <a:off x="9233154" y="3246120"/>
+            <a:ext cx="176022" cy="0"/>
+          </a:xfrm>
+          <a:prstGeom prst="line">
+            <a:avLst/>
+          </a:prstGeom>
+          <a:ln w="31750">
+            <a:solidFill>
+              <a:srgbClr val="F47B20"/>
+            </a:solidFill>
+            <a:tailEnd type="triangle"/>
+          </a:ln>
+        </p:spPr>
+        <p:style>
+          <a:lnRef idx="2">
+            <a:schemeClr val="accent1"/>
+          </a:lnRef>
+          <a:fillRef idx="0">
+            <a:schemeClr val="accent1"/>
+          </a:fillRef>
+          <a:effectRef idx="1">
+            <a:schemeClr val="accent1"/>
+          </a:effectRef>
+          <a:fontRef idx="minor">
+            <a:schemeClr val="tx1"/>
+          </a:fontRef>
+        </p:style>
+      </p:cxnSp>
+      <p:sp>
+        <p:nvSpPr>
+          <p:cNvPr id="18" name="Rectangle 17"/>
+          <p:cNvSpPr/>
+          <p:nvPr/>
+        </p:nvSpPr>
+        <p:spPr>
+          <a:xfrm>
+            <a:off x="9464040" y="2743200"/>
+            <a:ext cx="1874519" cy="1005840"/>
+          </a:xfrm>
+          <a:prstGeom prst="rect">
+            <a:avLst/>
+          </a:prstGeom>
+          <a:solidFill>
+            <a:srgbClr val="FFFFFF"/>
+          </a:solidFill>
+          <a:ln w="15875">
+            <a:solidFill>
+              <a:srgbClr val="0B2D5B"/>
+            </a:solidFill>
+          </a:ln>
+          <a:effectLst/>
+        </p:spPr>
+        <p:style>
+          <a:lnRef idx="1">
+            <a:schemeClr val="accent1"/>
+          </a:lnRef>
+          <a:fillRef idx="3">
+            <a:schemeClr val="accent1"/>
+          </a:fillRef>
+          <a:effectRef idx="2">
+            <a:schemeClr val="accent1"/>
+          </a:effectRef>
+          <a:fontRef idx="minor">
+            <a:schemeClr val="lt1"/>
+          </a:fontRef>
+        </p:style>
+        <p:txBody>
+          <a:bodyPr rtlCol="0" anchor="ctr"/>
+          <a:lstStyle/>
+          <a:p>
+            <a:pPr algn="ctr"/>
+          </a:p>
+        </p:txBody>
+      </p:sp>
+      <p:sp>
+        <p:nvSpPr>
+          <p:cNvPr id="19" name="TextBox 18"/>
+          <p:cNvSpPr txBox="1"/>
+          <p:nvPr/>
+        </p:nvSpPr>
+        <p:spPr>
+          <a:xfrm>
+            <a:off x="9464040" y="2743200"/>
+            <a:ext cx="1874519" cy="1005840"/>
+          </a:xfrm>
+          <a:prstGeom prst="rect">
+            <a:avLst/>
+          </a:prstGeom>
+          <a:noFill/>
+        </p:spPr>
+        <p:txBody>
+          <a:bodyPr wrap="square" anchor="ctr" lIns="0" rIns="0" tIns="0" bIns="0">
+            <a:spAutoFit/>
+          </a:bodyPr>
+          <a:lstStyle/>
+          <a:p>
+            <a:pPr algn="ctr">
+              <a:spcAft>
+                <a:spcPts val="900"/>
+              </a:spcAft>
+            </a:pPr>
+            <a:r>
+              <a:rPr sz="2000" b="1" i="0">
+                <a:solidFill>
+                  <a:srgbClr val="1C1B19"/>
+                </a:solidFill>
+                <a:latin typeface="Source Serif 4"/>
+              </a:rPr>
+              <a:t>Less practice</a:t>
+            </a:r>
+          </a:p>
+        </p:txBody>
+      </p:sp>
+      <p:sp>
+        <p:nvSpPr>
+          <p:cNvPr id="20" name="TextBox 19"/>
+          <p:cNvSpPr txBox="1"/>
+          <p:nvPr/>
+        </p:nvSpPr>
+        <p:spPr>
+          <a:xfrm>
+            <a:off x="822960" y="4160520"/>
+            <a:ext cx="10515600" cy="457200"/>
           </a:xfrm>
           <a:prstGeom prst="rect">
             <a:avLst/>
@@ -6757,6 +7268,154 @@
           </a:bodyPr>
           <a:lstStyle/>
           <a:p>
+            <a:pPr algn="ctr">
+              <a:spcAft>
+                <a:spcPts val="810"/>
+              </a:spcAft>
+            </a:pPr>
+            <a:r>
+              <a:rPr sz="1800" b="1" i="0">
+                <a:solidFill>
+                  <a:srgbClr val="F47B20"/>
+                </a:solidFill>
+                <a:latin typeface="Inter Tight"/>
+              </a:rPr>
+              <a:t>↺  next hard task feels harder</a:t>
+            </a:r>
+          </a:p>
+        </p:txBody>
+      </p:sp>
+      <p:sp>
+        <p:nvSpPr>
+          <p:cNvPr id="21" name="TextBox 20"/>
+          <p:cNvSpPr txBox="1"/>
+          <p:nvPr/>
+        </p:nvSpPr>
+        <p:spPr>
+          <a:xfrm>
+            <a:off x="822960" y="4846320"/>
+            <a:ext cx="10515600" cy="1188720"/>
+          </a:xfrm>
+          <a:prstGeom prst="rect">
+            <a:avLst/>
+          </a:prstGeom>
+          <a:noFill/>
+        </p:spPr>
+        <p:txBody>
+          <a:bodyPr wrap="square" anchor="t" lIns="0" rIns="0" tIns="0" bIns="0">
+            <a:spAutoFit/>
+          </a:bodyPr>
+          <a:lstStyle/>
+          <a:p>
+            <a:pPr algn="ctr">
+              <a:spcAft>
+                <a:spcPts val="900"/>
+              </a:spcAft>
+            </a:pPr>
+            <a:r>
+              <a:rPr sz="2000" b="0" i="1">
+                <a:solidFill>
+                  <a:srgbClr val="5D5A54"/>
+                </a:solidFill>
+                <a:latin typeface="Source Serif 4"/>
+              </a:rPr>
+              <a:t>Opting out brings relief right away, so the brain learns to do it again.</a:t>
+            </a:r>
+          </a:p>
+        </p:txBody>
+      </p:sp>
+    </p:spTree>
+  </p:cSld>
+  <p:clrMapOvr>
+    <a:masterClrMapping/>
+  </p:clrMapOvr>
+</p:sld>
+</file>
+
+<file path=ppt/slides/slide14.xml><?xml version="1.0" encoding="utf-8"?>
+<p:sld xmlns:a="http://schemas.openxmlformats.org/drawingml/2006/main" xmlns:p="http://schemas.openxmlformats.org/presentationml/2006/main" xmlns:r="http://schemas.openxmlformats.org/officeDocument/2006/relationships">
+  <p:cSld>
+    <p:bg>
+      <p:bgPr>
+        <a:solidFill>
+          <a:srgbClr val="F7F4EE"/>
+        </a:solidFill>
+        <a:effectLst/>
+      </p:bgPr>
+    </p:bg>
+    <p:spTree>
+      <p:nvGrpSpPr>
+        <p:cNvPr id="1" name=""/>
+        <p:cNvGrpSpPr/>
+        <p:nvPr/>
+      </p:nvGrpSpPr>
+      <p:grpSpPr/>
+      <p:sp>
+        <p:nvSpPr>
+          <p:cNvPr id="2" name="Rectangle 1"/>
+          <p:cNvSpPr/>
+          <p:nvPr/>
+        </p:nvSpPr>
+        <p:spPr>
+          <a:xfrm>
+            <a:off x="548640" y="502920"/>
+            <a:ext cx="457200" cy="54864"/>
+          </a:xfrm>
+          <a:prstGeom prst="rect">
+            <a:avLst/>
+          </a:prstGeom>
+          <a:solidFill>
+            <a:srgbClr val="F47B20"/>
+          </a:solidFill>
+          <a:ln>
+            <a:noFill/>
+          </a:ln>
+          <a:effectLst/>
+        </p:spPr>
+        <p:style>
+          <a:lnRef idx="1">
+            <a:schemeClr val="accent1"/>
+          </a:lnRef>
+          <a:fillRef idx="3">
+            <a:schemeClr val="accent1"/>
+          </a:fillRef>
+          <a:effectRef idx="2">
+            <a:schemeClr val="accent1"/>
+          </a:effectRef>
+          <a:fontRef idx="minor">
+            <a:schemeClr val="lt1"/>
+          </a:fontRef>
+        </p:style>
+        <p:txBody>
+          <a:bodyPr rtlCol="0" anchor="ctr"/>
+          <a:lstStyle/>
+          <a:p>
+            <a:pPr algn="ctr"/>
+          </a:p>
+        </p:txBody>
+      </p:sp>
+      <p:sp>
+        <p:nvSpPr>
+          <p:cNvPr id="3" name="TextBox 2"/>
+          <p:cNvSpPr txBox="1"/>
+          <p:nvPr/>
+        </p:nvSpPr>
+        <p:spPr>
+          <a:xfrm>
+            <a:off x="1143000" y="393192"/>
+            <a:ext cx="8229600" cy="274320"/>
+          </a:xfrm>
+          <a:prstGeom prst="rect">
+            <a:avLst/>
+          </a:prstGeom>
+          <a:noFill/>
+        </p:spPr>
+        <p:txBody>
+          <a:bodyPr wrap="square" anchor="t" lIns="0" rIns="0" tIns="0" bIns="0">
+            <a:spAutoFit/>
+          </a:bodyPr>
+          <a:lstStyle/>
+          <a:p>
             <a:pPr algn="l">
               <a:spcAft>
                 <a:spcPts val="540"/>
@@ -6765,11 +7424,2617 @@
             <a:r>
               <a:rPr sz="1200" b="1" i="0">
                 <a:solidFill>
+                  <a:srgbClr val="5D5A54"/>
+                </a:solidFill>
+                <a:latin typeface="Inter Tight"/>
+              </a:rPr>
+              <a:t>THE RESEARCH</a:t>
+            </a:r>
+          </a:p>
+        </p:txBody>
+      </p:sp>
+      <p:sp>
+        <p:nvSpPr>
+          <p:cNvPr id="4" name="TextBox 3"/>
+          <p:cNvSpPr txBox="1"/>
+          <p:nvPr/>
+        </p:nvSpPr>
+        <p:spPr>
+          <a:xfrm>
+            <a:off x="8229600" y="6400800"/>
+            <a:ext cx="3410712" cy="274320"/>
+          </a:xfrm>
+          <a:prstGeom prst="rect">
+            <a:avLst/>
+          </a:prstGeom>
+          <a:noFill/>
+        </p:spPr>
+        <p:txBody>
+          <a:bodyPr wrap="square" anchor="t" lIns="0" rIns="0" tIns="0" bIns="0">
+            <a:spAutoFit/>
+          </a:bodyPr>
+          <a:lstStyle/>
+          <a:p>
+            <a:pPr algn="r">
+              <a:spcAft>
+                <a:spcPts val="450"/>
+              </a:spcAft>
+            </a:pPr>
+            <a:r>
+              <a:rPr sz="1000" b="0" i="0">
+                <a:solidFill>
+                  <a:srgbClr val="5D5A54"/>
+                </a:solidFill>
+                <a:latin typeface="Inter Tight"/>
+              </a:rPr>
+              <a:t>Beaver Counseling</a:t>
+            </a:r>
+          </a:p>
+        </p:txBody>
+      </p:sp>
+      <p:sp>
+        <p:nvSpPr>
+          <p:cNvPr id="5" name="TextBox 4"/>
+          <p:cNvSpPr txBox="1"/>
+          <p:nvPr/>
+        </p:nvSpPr>
+        <p:spPr>
+          <a:xfrm>
+            <a:off x="822960" y="914400"/>
+            <a:ext cx="10515600" cy="365760"/>
+          </a:xfrm>
+          <a:prstGeom prst="rect">
+            <a:avLst/>
+          </a:prstGeom>
+          <a:noFill/>
+        </p:spPr>
+        <p:txBody>
+          <a:bodyPr wrap="square" anchor="t" lIns="0" rIns="0" tIns="0" bIns="0">
+            <a:spAutoFit/>
+          </a:bodyPr>
+          <a:lstStyle/>
+          <a:p>
+            <a:pPr algn="l">
+              <a:spcAft>
+                <a:spcPts val="630"/>
+              </a:spcAft>
+            </a:pPr>
+            <a:r>
+              <a:rPr sz="1400" b="1" i="0">
+                <a:solidFill>
                   <a:srgbClr val="0B2D5B"/>
                 </a:solidFill>
                 <a:latin typeface="Inter Tight"/>
               </a:rPr>
-              <a:t>STUDENT CARD TO SHARE</a:t>
+              <a:t>Jamieson et al., 2010, Journal of Experimental Social Psychology</a:t>
+            </a:r>
+          </a:p>
+        </p:txBody>
+      </p:sp>
+      <p:sp>
+        <p:nvSpPr>
+          <p:cNvPr id="6" name="TextBox 5"/>
+          <p:cNvSpPr txBox="1"/>
+          <p:nvPr/>
+        </p:nvSpPr>
+        <p:spPr>
+          <a:xfrm>
+            <a:off x="822960" y="1325880"/>
+            <a:ext cx="10515600" cy="1097280"/>
+          </a:xfrm>
+          <a:prstGeom prst="rect">
+            <a:avLst/>
+          </a:prstGeom>
+          <a:noFill/>
+        </p:spPr>
+        <p:txBody>
+          <a:bodyPr wrap="square" anchor="t" lIns="0" rIns="0" tIns="0" bIns="0">
+            <a:spAutoFit/>
+          </a:bodyPr>
+          <a:lstStyle/>
+          <a:p>
+            <a:pPr algn="l">
+              <a:spcAft>
+                <a:spcPts val="1440"/>
+              </a:spcAft>
+            </a:pPr>
+            <a:r>
+              <a:rPr sz="3200" b="1" i="0">
+                <a:solidFill>
+                  <a:srgbClr val="1C1B19"/>
+                </a:solidFill>
+                <a:latin typeface="Source Serif 4"/>
+              </a:rPr>
+              <a:t>Calling the racing heart fuel improved scores.</a:t>
+            </a:r>
+          </a:p>
+        </p:txBody>
+      </p:sp>
+      <p:sp>
+        <p:nvSpPr>
+          <p:cNvPr id="7" name="TextBox 6"/>
+          <p:cNvSpPr txBox="1"/>
+          <p:nvPr/>
+        </p:nvSpPr>
+        <p:spPr>
+          <a:xfrm>
+            <a:off x="822960" y="2514600"/>
+            <a:ext cx="10515600" cy="2194560"/>
+          </a:xfrm>
+          <a:prstGeom prst="rect">
+            <a:avLst/>
+          </a:prstGeom>
+          <a:noFill/>
+        </p:spPr>
+        <p:txBody>
+          <a:bodyPr wrap="square" anchor="t" lIns="0" rIns="0" tIns="0" bIns="0">
+            <a:spAutoFit/>
+          </a:bodyPr>
+          <a:lstStyle/>
+          <a:p>
+            <a:pPr algn="l">
+              <a:spcAft>
+                <a:spcPts val="855"/>
+              </a:spcAft>
+            </a:pPr>
+            <a:r>
+              <a:rPr sz="1900" b="0" i="0">
+                <a:solidFill>
+                  <a:srgbClr val="1C1B19"/>
+                </a:solidFill>
+                <a:latin typeface="Source Serif 4"/>
+              </a:rPr>
+              <a:t>•  Students were told stress arousal before a test can help performance.</a:t>
+            </a:r>
+          </a:p>
+          <a:p>
+            <a:pPr algn="l">
+              <a:spcAft>
+                <a:spcPts val="855"/>
+              </a:spcAft>
+            </a:pPr>
+            <a:r>
+              <a:rPr sz="1900" b="0" i="0">
+                <a:solidFill>
+                  <a:srgbClr val="1C1B19"/>
+                </a:solidFill>
+                <a:latin typeface="Source Serif 4"/>
+              </a:rPr>
+              <a:t>•  They scored higher on GRE math practice, and on the real GRE months later.</a:t>
+            </a:r>
+          </a:p>
+          <a:p>
+            <a:pPr algn="l">
+              <a:spcAft>
+                <a:spcPts val="855"/>
+              </a:spcAft>
+            </a:pPr>
+            <a:r>
+              <a:rPr sz="1900" b="0" i="0">
+                <a:solidFill>
+                  <a:srgbClr val="1C1B19"/>
+                </a:solidFill>
+                <a:latin typeface="Source Serif 4"/>
+              </a:rPr>
+              <a:t>•  The study used college students; the idea is simple enough for any grade.</a:t>
+            </a:r>
+          </a:p>
+        </p:txBody>
+      </p:sp>
+      <p:sp>
+        <p:nvSpPr>
+          <p:cNvPr id="8" name="Rectangle 7"/>
+          <p:cNvSpPr/>
+          <p:nvPr/>
+        </p:nvSpPr>
+        <p:spPr>
+          <a:xfrm>
+            <a:off x="822960" y="4892040"/>
+            <a:ext cx="73152" cy="1097280"/>
+          </a:xfrm>
+          <a:prstGeom prst="rect">
+            <a:avLst/>
+          </a:prstGeom>
+          <a:solidFill>
+            <a:srgbClr val="F47B20"/>
+          </a:solidFill>
+          <a:ln>
+            <a:noFill/>
+          </a:ln>
+          <a:effectLst/>
+        </p:spPr>
+        <p:style>
+          <a:lnRef idx="1">
+            <a:schemeClr val="accent1"/>
+          </a:lnRef>
+          <a:fillRef idx="3">
+            <a:schemeClr val="accent1"/>
+          </a:fillRef>
+          <a:effectRef idx="2">
+            <a:schemeClr val="accent1"/>
+          </a:effectRef>
+          <a:fontRef idx="minor">
+            <a:schemeClr val="lt1"/>
+          </a:fontRef>
+        </p:style>
+        <p:txBody>
+          <a:bodyPr rtlCol="0" anchor="ctr"/>
+          <a:lstStyle/>
+          <a:p>
+            <a:pPr algn="ctr"/>
+          </a:p>
+        </p:txBody>
+      </p:sp>
+      <p:sp>
+        <p:nvSpPr>
+          <p:cNvPr id="9" name="TextBox 8"/>
+          <p:cNvSpPr txBox="1"/>
+          <p:nvPr/>
+        </p:nvSpPr>
+        <p:spPr>
+          <a:xfrm>
+            <a:off x="1097280" y="4892040"/>
+            <a:ext cx="10241280" cy="1188720"/>
+          </a:xfrm>
+          <a:prstGeom prst="rect">
+            <a:avLst/>
+          </a:prstGeom>
+          <a:noFill/>
+        </p:spPr>
+        <p:txBody>
+          <a:bodyPr wrap="square" anchor="t" lIns="0" rIns="0" tIns="0" bIns="0">
+            <a:spAutoFit/>
+          </a:bodyPr>
+          <a:lstStyle/>
+          <a:p>
+            <a:pPr algn="l">
+              <a:spcAft>
+                <a:spcPts val="855"/>
+              </a:spcAft>
+            </a:pPr>
+            <a:r>
+              <a:rPr sz="1200" b="1" i="0">
+                <a:solidFill>
+                  <a:srgbClr val="F47B20"/>
+                </a:solidFill>
+                <a:latin typeface="Inter Tight"/>
+              </a:rPr>
+              <a:t>IN CLASS</a:t>
+            </a:r>
+          </a:p>
+          <a:p>
+            <a:pPr algn="l">
+              <a:spcAft>
+                <a:spcPts val="855"/>
+              </a:spcAft>
+            </a:pPr>
+            <a:r>
+              <a:rPr sz="1900" b="0" i="0">
+                <a:solidFill>
+                  <a:srgbClr val="1C1B19"/>
+                </a:solidFill>
+                <a:latin typeface="Source Serif 4"/>
+              </a:rPr>
+              <a:t>"That racing heart is your body gearing up to work."</a:t>
+            </a:r>
+          </a:p>
+        </p:txBody>
+      </p:sp>
+    </p:spTree>
+  </p:cSld>
+  <p:clrMapOvr>
+    <a:masterClrMapping/>
+  </p:clrMapOvr>
+</p:sld>
+</file>
+
+<file path=ppt/slides/slide15.xml><?xml version="1.0" encoding="utf-8"?>
+<p:sld xmlns:a="http://schemas.openxmlformats.org/drawingml/2006/main" xmlns:p="http://schemas.openxmlformats.org/presentationml/2006/main" xmlns:r="http://schemas.openxmlformats.org/officeDocument/2006/relationships">
+  <p:cSld>
+    <p:bg>
+      <p:bgPr>
+        <a:solidFill>
+          <a:srgbClr val="F7F4EE"/>
+        </a:solidFill>
+        <a:effectLst/>
+      </p:bgPr>
+    </p:bg>
+    <p:spTree>
+      <p:nvGrpSpPr>
+        <p:cNvPr id="1" name=""/>
+        <p:cNvGrpSpPr/>
+        <p:nvPr/>
+      </p:nvGrpSpPr>
+      <p:grpSpPr/>
+      <p:sp>
+        <p:nvSpPr>
+          <p:cNvPr id="2" name="Rectangle 1"/>
+          <p:cNvSpPr/>
+          <p:nvPr/>
+        </p:nvSpPr>
+        <p:spPr>
+          <a:xfrm>
+            <a:off x="548640" y="502920"/>
+            <a:ext cx="457200" cy="54864"/>
+          </a:xfrm>
+          <a:prstGeom prst="rect">
+            <a:avLst/>
+          </a:prstGeom>
+          <a:solidFill>
+            <a:srgbClr val="F47B20"/>
+          </a:solidFill>
+          <a:ln>
+            <a:noFill/>
+          </a:ln>
+          <a:effectLst/>
+        </p:spPr>
+        <p:style>
+          <a:lnRef idx="1">
+            <a:schemeClr val="accent1"/>
+          </a:lnRef>
+          <a:fillRef idx="3">
+            <a:schemeClr val="accent1"/>
+          </a:fillRef>
+          <a:effectRef idx="2">
+            <a:schemeClr val="accent1"/>
+          </a:effectRef>
+          <a:fontRef idx="minor">
+            <a:schemeClr val="lt1"/>
+          </a:fontRef>
+        </p:style>
+        <p:txBody>
+          <a:bodyPr rtlCol="0" anchor="ctr"/>
+          <a:lstStyle/>
+          <a:p>
+            <a:pPr algn="ctr"/>
+          </a:p>
+        </p:txBody>
+      </p:sp>
+      <p:sp>
+        <p:nvSpPr>
+          <p:cNvPr id="3" name="TextBox 2"/>
+          <p:cNvSpPr txBox="1"/>
+          <p:nvPr/>
+        </p:nvSpPr>
+        <p:spPr>
+          <a:xfrm>
+            <a:off x="1143000" y="393192"/>
+            <a:ext cx="8229600" cy="274320"/>
+          </a:xfrm>
+          <a:prstGeom prst="rect">
+            <a:avLst/>
+          </a:prstGeom>
+          <a:noFill/>
+        </p:spPr>
+        <p:txBody>
+          <a:bodyPr wrap="square" anchor="t" lIns="0" rIns="0" tIns="0" bIns="0">
+            <a:spAutoFit/>
+          </a:bodyPr>
+          <a:lstStyle/>
+          <a:p>
+            <a:pPr algn="l">
+              <a:spcAft>
+                <a:spcPts val="540"/>
+              </a:spcAft>
+            </a:pPr>
+            <a:r>
+              <a:rPr sz="1200" b="1" i="0">
+                <a:solidFill>
+                  <a:srgbClr val="5D5A54"/>
+                </a:solidFill>
+                <a:latin typeface="Inter Tight"/>
+              </a:rPr>
+              <a:t>THE RESEARCH</a:t>
+            </a:r>
+          </a:p>
+        </p:txBody>
+      </p:sp>
+      <p:sp>
+        <p:nvSpPr>
+          <p:cNvPr id="4" name="TextBox 3"/>
+          <p:cNvSpPr txBox="1"/>
+          <p:nvPr/>
+        </p:nvSpPr>
+        <p:spPr>
+          <a:xfrm>
+            <a:off x="8229600" y="6400800"/>
+            <a:ext cx="3410712" cy="274320"/>
+          </a:xfrm>
+          <a:prstGeom prst="rect">
+            <a:avLst/>
+          </a:prstGeom>
+          <a:noFill/>
+        </p:spPr>
+        <p:txBody>
+          <a:bodyPr wrap="square" anchor="t" lIns="0" rIns="0" tIns="0" bIns="0">
+            <a:spAutoFit/>
+          </a:bodyPr>
+          <a:lstStyle/>
+          <a:p>
+            <a:pPr algn="r">
+              <a:spcAft>
+                <a:spcPts val="450"/>
+              </a:spcAft>
+            </a:pPr>
+            <a:r>
+              <a:rPr sz="1000" b="0" i="0">
+                <a:solidFill>
+                  <a:srgbClr val="5D5A54"/>
+                </a:solidFill>
+                <a:latin typeface="Inter Tight"/>
+              </a:rPr>
+              <a:t>Beaver Counseling</a:t>
+            </a:r>
+          </a:p>
+        </p:txBody>
+      </p:sp>
+      <p:sp>
+        <p:nvSpPr>
+          <p:cNvPr id="5" name="TextBox 4"/>
+          <p:cNvSpPr txBox="1"/>
+          <p:nvPr/>
+        </p:nvSpPr>
+        <p:spPr>
+          <a:xfrm>
+            <a:off x="822960" y="914400"/>
+            <a:ext cx="10515600" cy="365760"/>
+          </a:xfrm>
+          <a:prstGeom prst="rect">
+            <a:avLst/>
+          </a:prstGeom>
+          <a:noFill/>
+        </p:spPr>
+        <p:txBody>
+          <a:bodyPr wrap="square" anchor="t" lIns="0" rIns="0" tIns="0" bIns="0">
+            <a:spAutoFit/>
+          </a:bodyPr>
+          <a:lstStyle/>
+          <a:p>
+            <a:pPr algn="l">
+              <a:spcAft>
+                <a:spcPts val="630"/>
+              </a:spcAft>
+            </a:pPr>
+            <a:r>
+              <a:rPr sz="1400" b="1" i="0">
+                <a:solidFill>
+                  <a:srgbClr val="0B2D5B"/>
+                </a:solidFill>
+                <a:latin typeface="Inter Tight"/>
+              </a:rPr>
+              <a:t>Yeager et al., 2014, Journal of Experimental Psychology: General</a:t>
+            </a:r>
+          </a:p>
+        </p:txBody>
+      </p:sp>
+      <p:sp>
+        <p:nvSpPr>
+          <p:cNvPr id="6" name="TextBox 5"/>
+          <p:cNvSpPr txBox="1"/>
+          <p:nvPr/>
+        </p:nvSpPr>
+        <p:spPr>
+          <a:xfrm>
+            <a:off x="822960" y="1325880"/>
+            <a:ext cx="10515600" cy="1097280"/>
+          </a:xfrm>
+          <a:prstGeom prst="rect">
+            <a:avLst/>
+          </a:prstGeom>
+          <a:noFill/>
+        </p:spPr>
+        <p:txBody>
+          <a:bodyPr wrap="square" anchor="t" lIns="0" rIns="0" tIns="0" bIns="0">
+            <a:spAutoFit/>
+          </a:bodyPr>
+          <a:lstStyle/>
+          <a:p>
+            <a:pPr algn="l">
+              <a:spcAft>
+                <a:spcPts val="1440"/>
+              </a:spcAft>
+            </a:pPr>
+            <a:r>
+              <a:rPr sz="3200" b="1" i="0">
+                <a:solidFill>
+                  <a:srgbClr val="1C1B19"/>
+                </a:solidFill>
+                <a:latin typeface="Source Serif 4"/>
+              </a:rPr>
+              <a:t>Feedback with high standards and belief got revisions.</a:t>
+            </a:r>
+          </a:p>
+        </p:txBody>
+      </p:sp>
+      <p:sp>
+        <p:nvSpPr>
+          <p:cNvPr id="7" name="TextBox 6"/>
+          <p:cNvSpPr txBox="1"/>
+          <p:nvPr/>
+        </p:nvSpPr>
+        <p:spPr>
+          <a:xfrm>
+            <a:off x="822960" y="2514600"/>
+            <a:ext cx="10515600" cy="2194560"/>
+          </a:xfrm>
+          <a:prstGeom prst="rect">
+            <a:avLst/>
+          </a:prstGeom>
+          <a:noFill/>
+        </p:spPr>
+        <p:txBody>
+          <a:bodyPr wrap="square" anchor="t" lIns="0" rIns="0" tIns="0" bIns="0">
+            <a:spAutoFit/>
+          </a:bodyPr>
+          <a:lstStyle/>
+          <a:p>
+            <a:pPr algn="l">
+              <a:spcAft>
+                <a:spcPts val="855"/>
+              </a:spcAft>
+            </a:pPr>
+            <a:r>
+              <a:rPr sz="1900" b="0" i="0">
+                <a:solidFill>
+                  <a:srgbClr val="1C1B19"/>
+                </a:solidFill>
+                <a:latin typeface="Source Serif 4"/>
+              </a:rPr>
+              <a:t>•  7th graders got critical essay feedback with a short teacher note.</a:t>
+            </a:r>
+          </a:p>
+          <a:p>
+            <a:pPr algn="l">
+              <a:spcAft>
+                <a:spcPts val="855"/>
+              </a:spcAft>
+            </a:pPr>
+            <a:r>
+              <a:rPr sz="1900" b="0" i="0">
+                <a:solidFill>
+                  <a:srgbClr val="1C1B19"/>
+                </a:solidFill>
+                <a:latin typeface="Source Serif 4"/>
+              </a:rPr>
+              <a:t>•  The note: high standards, and "I know you can reach them."</a:t>
+            </a:r>
+          </a:p>
+          <a:p>
+            <a:pPr algn="l">
+              <a:spcAft>
+                <a:spcPts val="855"/>
+              </a:spcAft>
+            </a:pPr>
+            <a:r>
+              <a:rPr sz="1900" b="0" i="0">
+                <a:solidFill>
+                  <a:srgbClr val="1C1B19"/>
+                </a:solidFill>
+                <a:latin typeface="Source Serif 4"/>
+              </a:rPr>
+              <a:t>•  More revised, especially Black students with lower trust in school.</a:t>
+            </a:r>
+          </a:p>
+        </p:txBody>
+      </p:sp>
+      <p:sp>
+        <p:nvSpPr>
+          <p:cNvPr id="8" name="Rectangle 7"/>
+          <p:cNvSpPr/>
+          <p:nvPr/>
+        </p:nvSpPr>
+        <p:spPr>
+          <a:xfrm>
+            <a:off x="822960" y="4892040"/>
+            <a:ext cx="73152" cy="1097280"/>
+          </a:xfrm>
+          <a:prstGeom prst="rect">
+            <a:avLst/>
+          </a:prstGeom>
+          <a:solidFill>
+            <a:srgbClr val="F47B20"/>
+          </a:solidFill>
+          <a:ln>
+            <a:noFill/>
+          </a:ln>
+          <a:effectLst/>
+        </p:spPr>
+        <p:style>
+          <a:lnRef idx="1">
+            <a:schemeClr val="accent1"/>
+          </a:lnRef>
+          <a:fillRef idx="3">
+            <a:schemeClr val="accent1"/>
+          </a:fillRef>
+          <a:effectRef idx="2">
+            <a:schemeClr val="accent1"/>
+          </a:effectRef>
+          <a:fontRef idx="minor">
+            <a:schemeClr val="lt1"/>
+          </a:fontRef>
+        </p:style>
+        <p:txBody>
+          <a:bodyPr rtlCol="0" anchor="ctr"/>
+          <a:lstStyle/>
+          <a:p>
+            <a:pPr algn="ctr"/>
+          </a:p>
+        </p:txBody>
+      </p:sp>
+      <p:sp>
+        <p:nvSpPr>
+          <p:cNvPr id="9" name="TextBox 8"/>
+          <p:cNvSpPr txBox="1"/>
+          <p:nvPr/>
+        </p:nvSpPr>
+        <p:spPr>
+          <a:xfrm>
+            <a:off x="1097280" y="4892040"/>
+            <a:ext cx="10241280" cy="1188720"/>
+          </a:xfrm>
+          <a:prstGeom prst="rect">
+            <a:avLst/>
+          </a:prstGeom>
+          <a:noFill/>
+        </p:spPr>
+        <p:txBody>
+          <a:bodyPr wrap="square" anchor="t" lIns="0" rIns="0" tIns="0" bIns="0">
+            <a:spAutoFit/>
+          </a:bodyPr>
+          <a:lstStyle/>
+          <a:p>
+            <a:pPr algn="l">
+              <a:spcAft>
+                <a:spcPts val="855"/>
+              </a:spcAft>
+            </a:pPr>
+            <a:r>
+              <a:rPr sz="1200" b="1" i="0">
+                <a:solidFill>
+                  <a:srgbClr val="F47B20"/>
+                </a:solidFill>
+                <a:latin typeface="Inter Tight"/>
+              </a:rPr>
+              <a:t>IN CLASS</a:t>
+            </a:r>
+          </a:p>
+          <a:p>
+            <a:pPr algn="l">
+              <a:spcAft>
+                <a:spcPts val="855"/>
+              </a:spcAft>
+            </a:pPr>
+            <a:r>
+              <a:rPr sz="1900" b="0" i="0">
+                <a:solidFill>
+                  <a:srgbClr val="1C1B19"/>
+                </a:solidFill>
+                <a:latin typeface="Source Serif 4"/>
+              </a:rPr>
+              <a:t>"I'm giving you these comments because I know you can reach a high standard."</a:t>
+            </a:r>
+          </a:p>
+        </p:txBody>
+      </p:sp>
+    </p:spTree>
+  </p:cSld>
+  <p:clrMapOvr>
+    <a:masterClrMapping/>
+  </p:clrMapOvr>
+</p:sld>
+</file>
+
+<file path=ppt/slides/slide16.xml><?xml version="1.0" encoding="utf-8"?>
+<p:sld xmlns:a="http://schemas.openxmlformats.org/drawingml/2006/main" xmlns:p="http://schemas.openxmlformats.org/presentationml/2006/main" xmlns:r="http://schemas.openxmlformats.org/officeDocument/2006/relationships">
+  <p:cSld>
+    <p:bg>
+      <p:bgPr>
+        <a:solidFill>
+          <a:srgbClr val="F7F4EE"/>
+        </a:solidFill>
+        <a:effectLst/>
+      </p:bgPr>
+    </p:bg>
+    <p:spTree>
+      <p:nvGrpSpPr>
+        <p:cNvPr id="1" name=""/>
+        <p:cNvGrpSpPr/>
+        <p:nvPr/>
+      </p:nvGrpSpPr>
+      <p:grpSpPr/>
+      <p:sp>
+        <p:nvSpPr>
+          <p:cNvPr id="2" name="Rectangle 1"/>
+          <p:cNvSpPr/>
+          <p:nvPr/>
+        </p:nvSpPr>
+        <p:spPr>
+          <a:xfrm>
+            <a:off x="548640" y="502920"/>
+            <a:ext cx="457200" cy="54864"/>
+          </a:xfrm>
+          <a:prstGeom prst="rect">
+            <a:avLst/>
+          </a:prstGeom>
+          <a:solidFill>
+            <a:srgbClr val="F47B20"/>
+          </a:solidFill>
+          <a:ln>
+            <a:noFill/>
+          </a:ln>
+          <a:effectLst/>
+        </p:spPr>
+        <p:style>
+          <a:lnRef idx="1">
+            <a:schemeClr val="accent1"/>
+          </a:lnRef>
+          <a:fillRef idx="3">
+            <a:schemeClr val="accent1"/>
+          </a:fillRef>
+          <a:effectRef idx="2">
+            <a:schemeClr val="accent1"/>
+          </a:effectRef>
+          <a:fontRef idx="minor">
+            <a:schemeClr val="lt1"/>
+          </a:fontRef>
+        </p:style>
+        <p:txBody>
+          <a:bodyPr rtlCol="0" anchor="ctr"/>
+          <a:lstStyle/>
+          <a:p>
+            <a:pPr algn="ctr"/>
+          </a:p>
+        </p:txBody>
+      </p:sp>
+      <p:sp>
+        <p:nvSpPr>
+          <p:cNvPr id="3" name="TextBox 2"/>
+          <p:cNvSpPr txBox="1"/>
+          <p:nvPr/>
+        </p:nvSpPr>
+        <p:spPr>
+          <a:xfrm>
+            <a:off x="1143000" y="393192"/>
+            <a:ext cx="8229600" cy="274320"/>
+          </a:xfrm>
+          <a:prstGeom prst="rect">
+            <a:avLst/>
+          </a:prstGeom>
+          <a:noFill/>
+        </p:spPr>
+        <p:txBody>
+          <a:bodyPr wrap="square" anchor="t" lIns="0" rIns="0" tIns="0" bIns="0">
+            <a:spAutoFit/>
+          </a:bodyPr>
+          <a:lstStyle/>
+          <a:p>
+            <a:pPr algn="l">
+              <a:spcAft>
+                <a:spcPts val="540"/>
+              </a:spcAft>
+            </a:pPr>
+            <a:r>
+              <a:rPr sz="1200" b="1" i="0">
+                <a:solidFill>
+                  <a:srgbClr val="5D5A54"/>
+                </a:solidFill>
+                <a:latin typeface="Inter Tight"/>
+              </a:rPr>
+              <a:t>THE RESEARCH</a:t>
+            </a:r>
+          </a:p>
+        </p:txBody>
+      </p:sp>
+      <p:sp>
+        <p:nvSpPr>
+          <p:cNvPr id="4" name="TextBox 3"/>
+          <p:cNvSpPr txBox="1"/>
+          <p:nvPr/>
+        </p:nvSpPr>
+        <p:spPr>
+          <a:xfrm>
+            <a:off x="8229600" y="6400800"/>
+            <a:ext cx="3410712" cy="274320"/>
+          </a:xfrm>
+          <a:prstGeom prst="rect">
+            <a:avLst/>
+          </a:prstGeom>
+          <a:noFill/>
+        </p:spPr>
+        <p:txBody>
+          <a:bodyPr wrap="square" anchor="t" lIns="0" rIns="0" tIns="0" bIns="0">
+            <a:spAutoFit/>
+          </a:bodyPr>
+          <a:lstStyle/>
+          <a:p>
+            <a:pPr algn="r">
+              <a:spcAft>
+                <a:spcPts val="450"/>
+              </a:spcAft>
+            </a:pPr>
+            <a:r>
+              <a:rPr sz="1000" b="0" i="0">
+                <a:solidFill>
+                  <a:srgbClr val="5D5A54"/>
+                </a:solidFill>
+                <a:latin typeface="Inter Tight"/>
+              </a:rPr>
+              <a:t>Beaver Counseling</a:t>
+            </a:r>
+          </a:p>
+        </p:txBody>
+      </p:sp>
+      <p:sp>
+        <p:nvSpPr>
+          <p:cNvPr id="5" name="TextBox 4"/>
+          <p:cNvSpPr txBox="1"/>
+          <p:nvPr/>
+        </p:nvSpPr>
+        <p:spPr>
+          <a:xfrm>
+            <a:off x="822960" y="914400"/>
+            <a:ext cx="10515600" cy="365760"/>
+          </a:xfrm>
+          <a:prstGeom prst="rect">
+            <a:avLst/>
+          </a:prstGeom>
+          <a:noFill/>
+        </p:spPr>
+        <p:txBody>
+          <a:bodyPr wrap="square" anchor="t" lIns="0" rIns="0" tIns="0" bIns="0">
+            <a:spAutoFit/>
+          </a:bodyPr>
+          <a:lstStyle/>
+          <a:p>
+            <a:pPr algn="l">
+              <a:spcAft>
+                <a:spcPts val="630"/>
+              </a:spcAft>
+            </a:pPr>
+            <a:r>
+              <a:rPr sz="1400" b="1" i="0">
+                <a:solidFill>
+                  <a:srgbClr val="0B2D5B"/>
+                </a:solidFill>
+                <a:latin typeface="Inter Tight"/>
+              </a:rPr>
+              <a:t>Sisk et al., 2018, Psychological Science</a:t>
+            </a:r>
+          </a:p>
+        </p:txBody>
+      </p:sp>
+      <p:sp>
+        <p:nvSpPr>
+          <p:cNvPr id="6" name="TextBox 5"/>
+          <p:cNvSpPr txBox="1"/>
+          <p:nvPr/>
+        </p:nvSpPr>
+        <p:spPr>
+          <a:xfrm>
+            <a:off x="822960" y="1325880"/>
+            <a:ext cx="10515600" cy="1097280"/>
+          </a:xfrm>
+          <a:prstGeom prst="rect">
+            <a:avLst/>
+          </a:prstGeom>
+          <a:noFill/>
+        </p:spPr>
+        <p:txBody>
+          <a:bodyPr wrap="square" anchor="t" lIns="0" rIns="0" tIns="0" bIns="0">
+            <a:spAutoFit/>
+          </a:bodyPr>
+          <a:lstStyle/>
+          <a:p>
+            <a:pPr algn="l">
+              <a:spcAft>
+                <a:spcPts val="1440"/>
+              </a:spcAft>
+            </a:pPr>
+            <a:r>
+              <a:rPr sz="3200" b="1" i="0">
+                <a:solidFill>
+                  <a:srgbClr val="1C1B19"/>
+                </a:solidFill>
+                <a:latin typeface="Source Serif 4"/>
+              </a:rPr>
+              <a:t>Mindset messages alone do little.</a:t>
+            </a:r>
+          </a:p>
+        </p:txBody>
+      </p:sp>
+      <p:sp>
+        <p:nvSpPr>
+          <p:cNvPr id="7" name="TextBox 6"/>
+          <p:cNvSpPr txBox="1"/>
+          <p:nvPr/>
+        </p:nvSpPr>
+        <p:spPr>
+          <a:xfrm>
+            <a:off x="822960" y="2514600"/>
+            <a:ext cx="10515600" cy="2194560"/>
+          </a:xfrm>
+          <a:prstGeom prst="rect">
+            <a:avLst/>
+          </a:prstGeom>
+          <a:noFill/>
+        </p:spPr>
+        <p:txBody>
+          <a:bodyPr wrap="square" anchor="t" lIns="0" rIns="0" tIns="0" bIns="0">
+            <a:spAutoFit/>
+          </a:bodyPr>
+          <a:lstStyle/>
+          <a:p>
+            <a:pPr algn="l">
+              <a:spcAft>
+                <a:spcPts val="855"/>
+              </a:spcAft>
+            </a:pPr>
+            <a:r>
+              <a:rPr sz="1900" b="0" i="0">
+                <a:solidFill>
+                  <a:srgbClr val="1C1B19"/>
+                </a:solidFill>
+                <a:latin typeface="Source Serif 4"/>
+              </a:rPr>
+              <a:t>•  Two meta-analyses found small average effects of growth-mindset programs.</a:t>
+            </a:r>
+          </a:p>
+          <a:p>
+            <a:pPr algn="l">
+              <a:spcAft>
+                <a:spcPts val="855"/>
+              </a:spcAft>
+            </a:pPr>
+            <a:r>
+              <a:rPr sz="1900" b="0" i="0">
+                <a:solidFill>
+                  <a:srgbClr val="1C1B19"/>
+                </a:solidFill>
+                <a:latin typeface="Source Serif 4"/>
+              </a:rPr>
+              <a:t>•  Effects were larger for students at risk or from lower-income families.</a:t>
+            </a:r>
+          </a:p>
+          <a:p>
+            <a:pPr algn="l">
+              <a:spcAft>
+                <a:spcPts val="855"/>
+              </a:spcAft>
+            </a:pPr>
+            <a:r>
+              <a:rPr sz="1900" b="0" i="0">
+                <a:solidFill>
+                  <a:srgbClr val="1C1B19"/>
+                </a:solidFill>
+                <a:latin typeface="Source Serif 4"/>
+              </a:rPr>
+              <a:t>•  Posters and slogans are the weakest form.</a:t>
+            </a:r>
+          </a:p>
+        </p:txBody>
+      </p:sp>
+      <p:sp>
+        <p:nvSpPr>
+          <p:cNvPr id="8" name="Rectangle 7"/>
+          <p:cNvSpPr/>
+          <p:nvPr/>
+        </p:nvSpPr>
+        <p:spPr>
+          <a:xfrm>
+            <a:off x="822960" y="4892040"/>
+            <a:ext cx="73152" cy="1097280"/>
+          </a:xfrm>
+          <a:prstGeom prst="rect">
+            <a:avLst/>
+          </a:prstGeom>
+          <a:solidFill>
+            <a:srgbClr val="F47B20"/>
+          </a:solidFill>
+          <a:ln>
+            <a:noFill/>
+          </a:ln>
+          <a:effectLst/>
+        </p:spPr>
+        <p:style>
+          <a:lnRef idx="1">
+            <a:schemeClr val="accent1"/>
+          </a:lnRef>
+          <a:fillRef idx="3">
+            <a:schemeClr val="accent1"/>
+          </a:fillRef>
+          <a:effectRef idx="2">
+            <a:schemeClr val="accent1"/>
+          </a:effectRef>
+          <a:fontRef idx="minor">
+            <a:schemeClr val="lt1"/>
+          </a:fontRef>
+        </p:style>
+        <p:txBody>
+          <a:bodyPr rtlCol="0" anchor="ctr"/>
+          <a:lstStyle/>
+          <a:p>
+            <a:pPr algn="ctr"/>
+          </a:p>
+        </p:txBody>
+      </p:sp>
+      <p:sp>
+        <p:nvSpPr>
+          <p:cNvPr id="9" name="TextBox 8"/>
+          <p:cNvSpPr txBox="1"/>
+          <p:nvPr/>
+        </p:nvSpPr>
+        <p:spPr>
+          <a:xfrm>
+            <a:off x="1097280" y="4892040"/>
+            <a:ext cx="10241280" cy="1188720"/>
+          </a:xfrm>
+          <a:prstGeom prst="rect">
+            <a:avLst/>
+          </a:prstGeom>
+          <a:noFill/>
+        </p:spPr>
+        <p:txBody>
+          <a:bodyPr wrap="square" anchor="t" lIns="0" rIns="0" tIns="0" bIns="0">
+            <a:spAutoFit/>
+          </a:bodyPr>
+          <a:lstStyle/>
+          <a:p>
+            <a:pPr algn="l">
+              <a:spcAft>
+                <a:spcPts val="855"/>
+              </a:spcAft>
+            </a:pPr>
+            <a:r>
+              <a:rPr sz="1200" b="1" i="0">
+                <a:solidFill>
+                  <a:srgbClr val="F47B20"/>
+                </a:solidFill>
+                <a:latin typeface="Inter Tight"/>
+              </a:rPr>
+              <a:t>IN CLASS</a:t>
+            </a:r>
+          </a:p>
+          <a:p>
+            <a:pPr algn="l">
+              <a:spcAft>
+                <a:spcPts val="855"/>
+              </a:spcAft>
+            </a:pPr>
+            <a:r>
+              <a:rPr sz="1900" b="0" i="0">
+                <a:solidFill>
+                  <a:srgbClr val="1C1B19"/>
+                </a:solidFill>
+                <a:latin typeface="Source Serif 4"/>
+              </a:rPr>
+              <a:t>Build the message into the moves: worked examples, feedback, and naming the hard part.</a:t>
+            </a:r>
+          </a:p>
+        </p:txBody>
+      </p:sp>
+    </p:spTree>
+  </p:cSld>
+  <p:clrMapOvr>
+    <a:masterClrMapping/>
+  </p:clrMapOvr>
+</p:sld>
+</file>
+
+<file path=ppt/slides/slide17.xml><?xml version="1.0" encoding="utf-8"?>
+<p:sld xmlns:a="http://schemas.openxmlformats.org/drawingml/2006/main" xmlns:p="http://schemas.openxmlformats.org/presentationml/2006/main" xmlns:r="http://schemas.openxmlformats.org/officeDocument/2006/relationships">
+  <p:cSld>
+    <p:bg>
+      <p:bgPr>
+        <a:solidFill>
+          <a:srgbClr val="F7F4EE"/>
+        </a:solidFill>
+        <a:effectLst/>
+      </p:bgPr>
+    </p:bg>
+    <p:spTree>
+      <p:nvGrpSpPr>
+        <p:cNvPr id="1" name=""/>
+        <p:cNvGrpSpPr/>
+        <p:nvPr/>
+      </p:nvGrpSpPr>
+      <p:grpSpPr/>
+      <p:sp>
+        <p:nvSpPr>
+          <p:cNvPr id="2" name="Rectangle 1"/>
+          <p:cNvSpPr/>
+          <p:nvPr/>
+        </p:nvSpPr>
+        <p:spPr>
+          <a:xfrm>
+            <a:off x="548640" y="502920"/>
+            <a:ext cx="457200" cy="54864"/>
+          </a:xfrm>
+          <a:prstGeom prst="rect">
+            <a:avLst/>
+          </a:prstGeom>
+          <a:solidFill>
+            <a:srgbClr val="F47B20"/>
+          </a:solidFill>
+          <a:ln>
+            <a:noFill/>
+          </a:ln>
+          <a:effectLst/>
+        </p:spPr>
+        <p:style>
+          <a:lnRef idx="1">
+            <a:schemeClr val="accent1"/>
+          </a:lnRef>
+          <a:fillRef idx="3">
+            <a:schemeClr val="accent1"/>
+          </a:fillRef>
+          <a:effectRef idx="2">
+            <a:schemeClr val="accent1"/>
+          </a:effectRef>
+          <a:fontRef idx="minor">
+            <a:schemeClr val="lt1"/>
+          </a:fontRef>
+        </p:style>
+        <p:txBody>
+          <a:bodyPr rtlCol="0" anchor="ctr"/>
+          <a:lstStyle/>
+          <a:p>
+            <a:pPr algn="ctr"/>
+          </a:p>
+        </p:txBody>
+      </p:sp>
+      <p:sp>
+        <p:nvSpPr>
+          <p:cNvPr id="3" name="TextBox 2"/>
+          <p:cNvSpPr txBox="1"/>
+          <p:nvPr/>
+        </p:nvSpPr>
+        <p:spPr>
+          <a:xfrm>
+            <a:off x="1143000" y="393192"/>
+            <a:ext cx="8229600" cy="274320"/>
+          </a:xfrm>
+          <a:prstGeom prst="rect">
+            <a:avLst/>
+          </a:prstGeom>
+          <a:noFill/>
+        </p:spPr>
+        <p:txBody>
+          <a:bodyPr wrap="square" anchor="t" lIns="0" rIns="0" tIns="0" bIns="0">
+            <a:spAutoFit/>
+          </a:bodyPr>
+          <a:lstStyle/>
+          <a:p>
+            <a:pPr algn="l">
+              <a:spcAft>
+                <a:spcPts val="540"/>
+              </a:spcAft>
+            </a:pPr>
+            <a:r>
+              <a:rPr sz="1200" b="1" i="0">
+                <a:solidFill>
+                  <a:srgbClr val="5D5A54"/>
+                </a:solidFill>
+                <a:latin typeface="Inter Tight"/>
+              </a:rPr>
+              <a:t>FOR MONDAY</a:t>
+            </a:r>
+          </a:p>
+        </p:txBody>
+      </p:sp>
+      <p:sp>
+        <p:nvSpPr>
+          <p:cNvPr id="4" name="TextBox 3"/>
+          <p:cNvSpPr txBox="1"/>
+          <p:nvPr/>
+        </p:nvSpPr>
+        <p:spPr>
+          <a:xfrm>
+            <a:off x="8229600" y="6400800"/>
+            <a:ext cx="3410712" cy="274320"/>
+          </a:xfrm>
+          <a:prstGeom prst="rect">
+            <a:avLst/>
+          </a:prstGeom>
+          <a:noFill/>
+        </p:spPr>
+        <p:txBody>
+          <a:bodyPr wrap="square" anchor="t" lIns="0" rIns="0" tIns="0" bIns="0">
+            <a:spAutoFit/>
+          </a:bodyPr>
+          <a:lstStyle/>
+          <a:p>
+            <a:pPr algn="r">
+              <a:spcAft>
+                <a:spcPts val="450"/>
+              </a:spcAft>
+            </a:pPr>
+            <a:r>
+              <a:rPr sz="1000" b="0" i="0">
+                <a:solidFill>
+                  <a:srgbClr val="5D5A54"/>
+                </a:solidFill>
+                <a:latin typeface="Inter Tight"/>
+              </a:rPr>
+              <a:t>Beaver Counseling</a:t>
+            </a:r>
+          </a:p>
+        </p:txBody>
+      </p:sp>
+      <p:sp>
+        <p:nvSpPr>
+          <p:cNvPr id="5" name="TextBox 4"/>
+          <p:cNvSpPr txBox="1"/>
+          <p:nvPr/>
+        </p:nvSpPr>
+        <p:spPr>
+          <a:xfrm>
+            <a:off x="822960" y="1005840"/>
+            <a:ext cx="10515600" cy="1097280"/>
+          </a:xfrm>
+          <a:prstGeom prst="rect">
+            <a:avLst/>
+          </a:prstGeom>
+          <a:noFill/>
+        </p:spPr>
+        <p:txBody>
+          <a:bodyPr wrap="square" anchor="t" lIns="0" rIns="0" tIns="0" bIns="0">
+            <a:spAutoFit/>
+          </a:bodyPr>
+          <a:lstStyle/>
+          <a:p>
+            <a:pPr algn="l">
+              <a:spcAft>
+                <a:spcPts val="1620"/>
+              </a:spcAft>
+            </a:pPr>
+            <a:r>
+              <a:rPr sz="3600" b="1" i="0">
+                <a:solidFill>
+                  <a:srgbClr val="1C1B19"/>
+                </a:solidFill>
+                <a:latin typeface="Source Serif 4"/>
+              </a:rPr>
+              <a:t>Five moves that keep the struggle</a:t>
+            </a:r>
+          </a:p>
+        </p:txBody>
+      </p:sp>
+      <p:sp>
+        <p:nvSpPr>
+          <p:cNvPr id="6" name="TextBox 5"/>
+          <p:cNvSpPr txBox="1"/>
+          <p:nvPr/>
+        </p:nvSpPr>
+        <p:spPr>
+          <a:xfrm>
+            <a:off x="822960" y="2057400"/>
+            <a:ext cx="548640" cy="804672"/>
+          </a:xfrm>
+          <a:prstGeom prst="rect">
+            <a:avLst/>
+          </a:prstGeom>
+          <a:noFill/>
+        </p:spPr>
+        <p:txBody>
+          <a:bodyPr wrap="square" anchor="t" lIns="0" rIns="0" tIns="0" bIns="0">
+            <a:spAutoFit/>
+          </a:bodyPr>
+          <a:lstStyle/>
+          <a:p>
+            <a:pPr algn="l">
+              <a:spcAft>
+                <a:spcPts val="1170"/>
+              </a:spcAft>
+            </a:pPr>
+            <a:r>
+              <a:rPr sz="2600" b="1" i="0">
+                <a:solidFill>
+                  <a:srgbClr val="F47B20"/>
+                </a:solidFill>
+                <a:latin typeface="Source Serif 4"/>
+              </a:rPr>
+              <a:t>1</a:t>
+            </a:r>
+          </a:p>
+        </p:txBody>
+      </p:sp>
+      <p:sp>
+        <p:nvSpPr>
+          <p:cNvPr id="7" name="TextBox 6"/>
+          <p:cNvSpPr txBox="1"/>
+          <p:nvPr/>
+        </p:nvSpPr>
+        <p:spPr>
+          <a:xfrm>
+            <a:off x="1463040" y="2093976"/>
+            <a:ext cx="9875520" cy="804672"/>
+          </a:xfrm>
+          <a:prstGeom prst="rect">
+            <a:avLst/>
+          </a:prstGeom>
+          <a:noFill/>
+        </p:spPr>
+        <p:txBody>
+          <a:bodyPr wrap="square" anchor="t" lIns="0" rIns="0" tIns="0" bIns="0">
+            <a:spAutoFit/>
+          </a:bodyPr>
+          <a:lstStyle/>
+          <a:p>
+            <a:pPr algn="l">
+              <a:spcAft>
+                <a:spcPts val="945"/>
+              </a:spcAft>
+            </a:pPr>
+            <a:r>
+              <a:rPr sz="2100" b="1" i="0">
+                <a:solidFill>
+                  <a:srgbClr val="1C1B19"/>
+                </a:solidFill>
+                <a:latin typeface="Source Serif 4"/>
+              </a:rPr>
+              <a:t>Worked example, then fade it.</a:t>
+            </a:r>
+          </a:p>
+          <a:p>
+            <a:pPr algn="l">
+              <a:spcAft>
+                <a:spcPts val="945"/>
+              </a:spcAft>
+            </a:pPr>
+            <a:r>
+              <a:rPr sz="1600" b="0" i="0">
+                <a:solidFill>
+                  <a:srgbClr val="5D5A54"/>
+                </a:solidFill>
+                <a:latin typeface="Source Serif 4"/>
+              </a:rPr>
+              <a:t>Solved, then half-solved, then on their own.</a:t>
+            </a:r>
+          </a:p>
+        </p:txBody>
+      </p:sp>
+      <p:sp>
+        <p:nvSpPr>
+          <p:cNvPr id="8" name="TextBox 7"/>
+          <p:cNvSpPr txBox="1"/>
+          <p:nvPr/>
+        </p:nvSpPr>
+        <p:spPr>
+          <a:xfrm>
+            <a:off x="822960" y="2862072"/>
+            <a:ext cx="548640" cy="804672"/>
+          </a:xfrm>
+          <a:prstGeom prst="rect">
+            <a:avLst/>
+          </a:prstGeom>
+          <a:noFill/>
+        </p:spPr>
+        <p:txBody>
+          <a:bodyPr wrap="square" anchor="t" lIns="0" rIns="0" tIns="0" bIns="0">
+            <a:spAutoFit/>
+          </a:bodyPr>
+          <a:lstStyle/>
+          <a:p>
+            <a:pPr algn="l">
+              <a:spcAft>
+                <a:spcPts val="1170"/>
+              </a:spcAft>
+            </a:pPr>
+            <a:r>
+              <a:rPr sz="2600" b="1" i="0">
+                <a:solidFill>
+                  <a:srgbClr val="F47B20"/>
+                </a:solidFill>
+                <a:latin typeface="Source Serif 4"/>
+              </a:rPr>
+              <a:t>2</a:t>
+            </a:r>
+          </a:p>
+        </p:txBody>
+      </p:sp>
+      <p:sp>
+        <p:nvSpPr>
+          <p:cNvPr id="9" name="TextBox 8"/>
+          <p:cNvSpPr txBox="1"/>
+          <p:nvPr/>
+        </p:nvSpPr>
+        <p:spPr>
+          <a:xfrm>
+            <a:off x="1463040" y="2898648"/>
+            <a:ext cx="9875520" cy="804672"/>
+          </a:xfrm>
+          <a:prstGeom prst="rect">
+            <a:avLst/>
+          </a:prstGeom>
+          <a:noFill/>
+        </p:spPr>
+        <p:txBody>
+          <a:bodyPr wrap="square" anchor="t" lIns="0" rIns="0" tIns="0" bIns="0">
+            <a:spAutoFit/>
+          </a:bodyPr>
+          <a:lstStyle/>
+          <a:p>
+            <a:pPr algn="l">
+              <a:spcAft>
+                <a:spcPts val="945"/>
+              </a:spcAft>
+            </a:pPr>
+            <a:r>
+              <a:rPr sz="2100" b="1" i="0">
+                <a:solidFill>
+                  <a:srgbClr val="1C1B19"/>
+                </a:solidFill>
+                <a:latin typeface="Source Serif 4"/>
+              </a:rPr>
+              <a:t>Time-box the struggle.</a:t>
+            </a:r>
+          </a:p>
+          <a:p>
+            <a:pPr algn="l">
+              <a:spcAft>
+                <a:spcPts val="945"/>
+              </a:spcAft>
+            </a:pPr>
+            <a:r>
+              <a:rPr sz="1600" b="0" i="0">
+                <a:solidFill>
+                  <a:srgbClr val="5D5A54"/>
+                </a:solidFill>
+                <a:latin typeface="Source Serif 4"/>
+              </a:rPr>
+              <a:t>"Try it for 5 minutes, then use a hint."</a:t>
+            </a:r>
+          </a:p>
+        </p:txBody>
+      </p:sp>
+      <p:sp>
+        <p:nvSpPr>
+          <p:cNvPr id="10" name="TextBox 9"/>
+          <p:cNvSpPr txBox="1"/>
+          <p:nvPr/>
+        </p:nvSpPr>
+        <p:spPr>
+          <a:xfrm>
+            <a:off x="822960" y="3666744"/>
+            <a:ext cx="548640" cy="804672"/>
+          </a:xfrm>
+          <a:prstGeom prst="rect">
+            <a:avLst/>
+          </a:prstGeom>
+          <a:noFill/>
+        </p:spPr>
+        <p:txBody>
+          <a:bodyPr wrap="square" anchor="t" lIns="0" rIns="0" tIns="0" bIns="0">
+            <a:spAutoFit/>
+          </a:bodyPr>
+          <a:lstStyle/>
+          <a:p>
+            <a:pPr algn="l">
+              <a:spcAft>
+                <a:spcPts val="1170"/>
+              </a:spcAft>
+            </a:pPr>
+            <a:r>
+              <a:rPr sz="2600" b="1" i="0">
+                <a:solidFill>
+                  <a:srgbClr val="F47B20"/>
+                </a:solidFill>
+                <a:latin typeface="Source Serif 4"/>
+              </a:rPr>
+              <a:t>3</a:t>
+            </a:r>
+          </a:p>
+        </p:txBody>
+      </p:sp>
+      <p:sp>
+        <p:nvSpPr>
+          <p:cNvPr id="11" name="TextBox 10"/>
+          <p:cNvSpPr txBox="1"/>
+          <p:nvPr/>
+        </p:nvSpPr>
+        <p:spPr>
+          <a:xfrm>
+            <a:off x="1463040" y="3703320"/>
+            <a:ext cx="9875520" cy="804672"/>
+          </a:xfrm>
+          <a:prstGeom prst="rect">
+            <a:avLst/>
+          </a:prstGeom>
+          <a:noFill/>
+        </p:spPr>
+        <p:txBody>
+          <a:bodyPr wrap="square" anchor="t" lIns="0" rIns="0" tIns="0" bIns="0">
+            <a:spAutoFit/>
+          </a:bodyPr>
+          <a:lstStyle/>
+          <a:p>
+            <a:pPr algn="l">
+              <a:spcAft>
+                <a:spcPts val="945"/>
+              </a:spcAft>
+            </a:pPr>
+            <a:r>
+              <a:rPr sz="2100" b="1" i="0">
+                <a:solidFill>
+                  <a:srgbClr val="1C1B19"/>
+                </a:solidFill>
+                <a:latin typeface="Source Serif 4"/>
+              </a:rPr>
+              <a:t>Post a hint ladder.</a:t>
+            </a:r>
+          </a:p>
+          <a:p>
+            <a:pPr algn="l">
+              <a:spcAft>
+                <a:spcPts val="945"/>
+              </a:spcAft>
+            </a:pPr>
+            <a:r>
+              <a:rPr sz="1600" b="0" i="0">
+                <a:solidFill>
+                  <a:srgbClr val="5D5A54"/>
+                </a:solidFill>
+                <a:latin typeface="Source Serif 4"/>
+              </a:rPr>
+              <a:t>Re-read, find an example, ask a peer, then ask me.</a:t>
+            </a:r>
+          </a:p>
+        </p:txBody>
+      </p:sp>
+      <p:sp>
+        <p:nvSpPr>
+          <p:cNvPr id="12" name="TextBox 11"/>
+          <p:cNvSpPr txBox="1"/>
+          <p:nvPr/>
+        </p:nvSpPr>
+        <p:spPr>
+          <a:xfrm>
+            <a:off x="822960" y="4471416"/>
+            <a:ext cx="548640" cy="804672"/>
+          </a:xfrm>
+          <a:prstGeom prst="rect">
+            <a:avLst/>
+          </a:prstGeom>
+          <a:noFill/>
+        </p:spPr>
+        <p:txBody>
+          <a:bodyPr wrap="square" anchor="t" lIns="0" rIns="0" tIns="0" bIns="0">
+            <a:spAutoFit/>
+          </a:bodyPr>
+          <a:lstStyle/>
+          <a:p>
+            <a:pPr algn="l">
+              <a:spcAft>
+                <a:spcPts val="1170"/>
+              </a:spcAft>
+            </a:pPr>
+            <a:r>
+              <a:rPr sz="2600" b="1" i="0">
+                <a:solidFill>
+                  <a:srgbClr val="F47B20"/>
+                </a:solidFill>
+                <a:latin typeface="Source Serif 4"/>
+              </a:rPr>
+              <a:t>4</a:t>
+            </a:r>
+          </a:p>
+        </p:txBody>
+      </p:sp>
+      <p:sp>
+        <p:nvSpPr>
+          <p:cNvPr id="13" name="TextBox 12"/>
+          <p:cNvSpPr txBox="1"/>
+          <p:nvPr/>
+        </p:nvSpPr>
+        <p:spPr>
+          <a:xfrm>
+            <a:off x="1463040" y="4507992"/>
+            <a:ext cx="9875520" cy="804672"/>
+          </a:xfrm>
+          <a:prstGeom prst="rect">
+            <a:avLst/>
+          </a:prstGeom>
+          <a:noFill/>
+        </p:spPr>
+        <p:txBody>
+          <a:bodyPr wrap="square" anchor="t" lIns="0" rIns="0" tIns="0" bIns="0">
+            <a:spAutoFit/>
+          </a:bodyPr>
+          <a:lstStyle/>
+          <a:p>
+            <a:pPr algn="l">
+              <a:spcAft>
+                <a:spcPts val="945"/>
+              </a:spcAft>
+            </a:pPr>
+            <a:r>
+              <a:rPr sz="2100" b="1" i="0">
+                <a:solidFill>
+                  <a:srgbClr val="1C1B19"/>
+                </a:solidFill>
+                <a:latin typeface="Source Serif 4"/>
+              </a:rPr>
+              <a:t>Name the hard part.</a:t>
+            </a:r>
+          </a:p>
+          <a:p>
+            <a:pPr algn="l">
+              <a:spcAft>
+                <a:spcPts val="945"/>
+              </a:spcAft>
+            </a:pPr>
+            <a:r>
+              <a:rPr sz="1600" b="0" i="0">
+                <a:solidFill>
+                  <a:srgbClr val="5D5A54"/>
+                </a:solidFill>
+                <a:latin typeface="Source Serif 4"/>
+              </a:rPr>
+              <a:t>"This is where most people get stuck."</a:t>
+            </a:r>
+          </a:p>
+        </p:txBody>
+      </p:sp>
+      <p:sp>
+        <p:nvSpPr>
+          <p:cNvPr id="14" name="TextBox 13"/>
+          <p:cNvSpPr txBox="1"/>
+          <p:nvPr/>
+        </p:nvSpPr>
+        <p:spPr>
+          <a:xfrm>
+            <a:off x="822960" y="5276088"/>
+            <a:ext cx="548640" cy="804672"/>
+          </a:xfrm>
+          <a:prstGeom prst="rect">
+            <a:avLst/>
+          </a:prstGeom>
+          <a:noFill/>
+        </p:spPr>
+        <p:txBody>
+          <a:bodyPr wrap="square" anchor="t" lIns="0" rIns="0" tIns="0" bIns="0">
+            <a:spAutoFit/>
+          </a:bodyPr>
+          <a:lstStyle/>
+          <a:p>
+            <a:pPr algn="l">
+              <a:spcAft>
+                <a:spcPts val="1170"/>
+              </a:spcAft>
+            </a:pPr>
+            <a:r>
+              <a:rPr sz="2600" b="1" i="0">
+                <a:solidFill>
+                  <a:srgbClr val="F47B20"/>
+                </a:solidFill>
+                <a:latin typeface="Source Serif 4"/>
+              </a:rPr>
+              <a:t>5</a:t>
+            </a:r>
+          </a:p>
+        </p:txBody>
+      </p:sp>
+      <p:sp>
+        <p:nvSpPr>
+          <p:cNvPr id="15" name="TextBox 14"/>
+          <p:cNvSpPr txBox="1"/>
+          <p:nvPr/>
+        </p:nvSpPr>
+        <p:spPr>
+          <a:xfrm>
+            <a:off x="1463040" y="5312664"/>
+            <a:ext cx="9875520" cy="804672"/>
+          </a:xfrm>
+          <a:prstGeom prst="rect">
+            <a:avLst/>
+          </a:prstGeom>
+          <a:noFill/>
+        </p:spPr>
+        <p:txBody>
+          <a:bodyPr wrap="square" anchor="t" lIns="0" rIns="0" tIns="0" bIns="0">
+            <a:spAutoFit/>
+          </a:bodyPr>
+          <a:lstStyle/>
+          <a:p>
+            <a:pPr algn="l">
+              <a:spcAft>
+                <a:spcPts val="945"/>
+              </a:spcAft>
+            </a:pPr>
+            <a:r>
+              <a:rPr sz="2100" b="1" i="0">
+                <a:solidFill>
+                  <a:srgbClr val="1C1B19"/>
+                </a:solidFill>
+                <a:latin typeface="Source Serif 4"/>
+              </a:rPr>
+              <a:t>Reframe and give wise feedback.</a:t>
+            </a:r>
+          </a:p>
+          <a:p>
+            <a:pPr algn="l">
+              <a:spcAft>
+                <a:spcPts val="945"/>
+              </a:spcAft>
+            </a:pPr>
+            <a:r>
+              <a:rPr sz="1600" b="0" i="0">
+                <a:solidFill>
+                  <a:srgbClr val="5D5A54"/>
+                </a:solidFill>
+                <a:latin typeface="Source Serif 4"/>
+              </a:rPr>
+              <a:t>"Your body's gearing up." "I know you can."</a:t>
+            </a:r>
+          </a:p>
+        </p:txBody>
+      </p:sp>
+    </p:spTree>
+  </p:cSld>
+  <p:clrMapOvr>
+    <a:masterClrMapping/>
+  </p:clrMapOvr>
+</p:sld>
+</file>
+
+<file path=ppt/slides/slide18.xml><?xml version="1.0" encoding="utf-8"?>
+<p:sld xmlns:a="http://schemas.openxmlformats.org/drawingml/2006/main" xmlns:p="http://schemas.openxmlformats.org/presentationml/2006/main" xmlns:r="http://schemas.openxmlformats.org/officeDocument/2006/relationships">
+  <p:cSld>
+    <p:bg>
+      <p:bgPr>
+        <a:solidFill>
+          <a:srgbClr val="F7F4EE"/>
+        </a:solidFill>
+        <a:effectLst/>
+      </p:bgPr>
+    </p:bg>
+    <p:spTree>
+      <p:nvGrpSpPr>
+        <p:cNvPr id="1" name=""/>
+        <p:cNvGrpSpPr/>
+        <p:nvPr/>
+      </p:nvGrpSpPr>
+      <p:grpSpPr/>
+      <p:sp>
+        <p:nvSpPr>
+          <p:cNvPr id="2" name="Rectangle 1"/>
+          <p:cNvSpPr/>
+          <p:nvPr/>
+        </p:nvSpPr>
+        <p:spPr>
+          <a:xfrm>
+            <a:off x="548640" y="502920"/>
+            <a:ext cx="457200" cy="54864"/>
+          </a:xfrm>
+          <a:prstGeom prst="rect">
+            <a:avLst/>
+          </a:prstGeom>
+          <a:solidFill>
+            <a:srgbClr val="F47B20"/>
+          </a:solidFill>
+          <a:ln>
+            <a:noFill/>
+          </a:ln>
+          <a:effectLst/>
+        </p:spPr>
+        <p:style>
+          <a:lnRef idx="1">
+            <a:schemeClr val="accent1"/>
+          </a:lnRef>
+          <a:fillRef idx="3">
+            <a:schemeClr val="accent1"/>
+          </a:fillRef>
+          <a:effectRef idx="2">
+            <a:schemeClr val="accent1"/>
+          </a:effectRef>
+          <a:fontRef idx="minor">
+            <a:schemeClr val="lt1"/>
+          </a:fontRef>
+        </p:style>
+        <p:txBody>
+          <a:bodyPr rtlCol="0" anchor="ctr"/>
+          <a:lstStyle/>
+          <a:p>
+            <a:pPr algn="ctr"/>
+          </a:p>
+        </p:txBody>
+      </p:sp>
+      <p:sp>
+        <p:nvSpPr>
+          <p:cNvPr id="3" name="TextBox 2"/>
+          <p:cNvSpPr txBox="1"/>
+          <p:nvPr/>
+        </p:nvSpPr>
+        <p:spPr>
+          <a:xfrm>
+            <a:off x="1143000" y="393192"/>
+            <a:ext cx="8229600" cy="274320"/>
+          </a:xfrm>
+          <a:prstGeom prst="rect">
+            <a:avLst/>
+          </a:prstGeom>
+          <a:noFill/>
+        </p:spPr>
+        <p:txBody>
+          <a:bodyPr wrap="square" anchor="t" lIns="0" rIns="0" tIns="0" bIns="0">
+            <a:spAutoFit/>
+          </a:bodyPr>
+          <a:lstStyle/>
+          <a:p>
+            <a:pPr algn="l">
+              <a:spcAft>
+                <a:spcPts val="540"/>
+              </a:spcAft>
+            </a:pPr>
+            <a:r>
+              <a:rPr sz="1200" b="1" i="0">
+                <a:solidFill>
+                  <a:srgbClr val="5D5A54"/>
+                </a:solidFill>
+                <a:latin typeface="Inter Tight"/>
+              </a:rPr>
+              <a:t>TRY IT</a:t>
+            </a:r>
+          </a:p>
+        </p:txBody>
+      </p:sp>
+      <p:sp>
+        <p:nvSpPr>
+          <p:cNvPr id="4" name="TextBox 3"/>
+          <p:cNvSpPr txBox="1"/>
+          <p:nvPr/>
+        </p:nvSpPr>
+        <p:spPr>
+          <a:xfrm>
+            <a:off x="8229600" y="6400800"/>
+            <a:ext cx="3410712" cy="274320"/>
+          </a:xfrm>
+          <a:prstGeom prst="rect">
+            <a:avLst/>
+          </a:prstGeom>
+          <a:noFill/>
+        </p:spPr>
+        <p:txBody>
+          <a:bodyPr wrap="square" anchor="t" lIns="0" rIns="0" tIns="0" bIns="0">
+            <a:spAutoFit/>
+          </a:bodyPr>
+          <a:lstStyle/>
+          <a:p>
+            <a:pPr algn="r">
+              <a:spcAft>
+                <a:spcPts val="450"/>
+              </a:spcAft>
+            </a:pPr>
+            <a:r>
+              <a:rPr sz="1000" b="0" i="0">
+                <a:solidFill>
+                  <a:srgbClr val="5D5A54"/>
+                </a:solidFill>
+                <a:latin typeface="Inter Tight"/>
+              </a:rPr>
+              <a:t>Beaver Counseling</a:t>
+            </a:r>
+          </a:p>
+        </p:txBody>
+      </p:sp>
+      <p:sp>
+        <p:nvSpPr>
+          <p:cNvPr id="5" name="TextBox 4"/>
+          <p:cNvSpPr txBox="1"/>
+          <p:nvPr/>
+        </p:nvSpPr>
+        <p:spPr>
+          <a:xfrm>
+            <a:off x="822960" y="1005840"/>
+            <a:ext cx="10515600" cy="914400"/>
+          </a:xfrm>
+          <a:prstGeom prst="rect">
+            <a:avLst/>
+          </a:prstGeom>
+          <a:noFill/>
+        </p:spPr>
+        <p:txBody>
+          <a:bodyPr wrap="square" anchor="t" lIns="0" rIns="0" tIns="0" bIns="0">
+            <a:spAutoFit/>
+          </a:bodyPr>
+          <a:lstStyle/>
+          <a:p>
+            <a:pPr algn="l">
+              <a:spcAft>
+                <a:spcPts val="1530"/>
+              </a:spcAft>
+            </a:pPr>
+            <a:r>
+              <a:rPr sz="3400" b="1" i="0">
+                <a:solidFill>
+                  <a:srgbClr val="1C1B19"/>
+                </a:solidFill>
+                <a:latin typeface="Source Serif 4"/>
+              </a:rPr>
+              <a:t>What would you try first?</a:t>
+            </a:r>
+          </a:p>
+        </p:txBody>
+      </p:sp>
+      <p:sp>
+        <p:nvSpPr>
+          <p:cNvPr id="6" name="Rectangle 5"/>
+          <p:cNvSpPr/>
+          <p:nvPr/>
+        </p:nvSpPr>
+        <p:spPr>
+          <a:xfrm>
+            <a:off x="822960" y="2103120"/>
+            <a:ext cx="3322320" cy="3840480"/>
+          </a:xfrm>
+          <a:prstGeom prst="rect">
+            <a:avLst/>
+          </a:prstGeom>
+          <a:solidFill>
+            <a:srgbClr val="FFFFFF"/>
+          </a:solidFill>
+          <a:ln w="15875">
+            <a:solidFill>
+              <a:srgbClr val="D8D2C6"/>
+            </a:solidFill>
+          </a:ln>
+          <a:effectLst/>
+        </p:spPr>
+        <p:style>
+          <a:lnRef idx="1">
+            <a:schemeClr val="accent1"/>
+          </a:lnRef>
+          <a:fillRef idx="3">
+            <a:schemeClr val="accent1"/>
+          </a:fillRef>
+          <a:effectRef idx="2">
+            <a:schemeClr val="accent1"/>
+          </a:effectRef>
+          <a:fontRef idx="minor">
+            <a:schemeClr val="lt1"/>
+          </a:fontRef>
+        </p:style>
+        <p:txBody>
+          <a:bodyPr rtlCol="0" anchor="ctr"/>
+          <a:lstStyle/>
+          <a:p>
+            <a:pPr algn="ctr"/>
+          </a:p>
+        </p:txBody>
+      </p:sp>
+      <p:sp>
+        <p:nvSpPr>
+          <p:cNvPr id="7" name="TextBox 6"/>
+          <p:cNvSpPr txBox="1"/>
+          <p:nvPr/>
+        </p:nvSpPr>
+        <p:spPr>
+          <a:xfrm>
+            <a:off x="1051560" y="2286000"/>
+            <a:ext cx="2865120" cy="365760"/>
+          </a:xfrm>
+          <a:prstGeom prst="rect">
+            <a:avLst/>
+          </a:prstGeom>
+          <a:noFill/>
+        </p:spPr>
+        <p:txBody>
+          <a:bodyPr wrap="square" anchor="t" lIns="0" rIns="0" tIns="0" bIns="0">
+            <a:spAutoFit/>
+          </a:bodyPr>
+          <a:lstStyle/>
+          <a:p>
+            <a:pPr algn="l">
+              <a:spcAft>
+                <a:spcPts val="585"/>
+              </a:spcAft>
+            </a:pPr>
+            <a:r>
+              <a:rPr sz="1300" b="1" i="0">
+                <a:solidFill>
+                  <a:srgbClr val="0B2D5B"/>
+                </a:solidFill>
+                <a:latin typeface="Inter Tight"/>
+              </a:rPr>
+              <a:t>MAYA, 9TH GRADE CHEMISTRY</a:t>
+            </a:r>
+          </a:p>
+        </p:txBody>
+      </p:sp>
+      <p:sp>
+        <p:nvSpPr>
+          <p:cNvPr id="8" name="TextBox 7"/>
+          <p:cNvSpPr txBox="1"/>
+          <p:nvPr/>
+        </p:nvSpPr>
+        <p:spPr>
+          <a:xfrm>
+            <a:off x="1051560" y="2743200"/>
+            <a:ext cx="2865120" cy="3017520"/>
+          </a:xfrm>
+          <a:prstGeom prst="rect">
+            <a:avLst/>
+          </a:prstGeom>
+          <a:noFill/>
+        </p:spPr>
+        <p:txBody>
+          <a:bodyPr wrap="square" anchor="t" lIns="0" rIns="0" tIns="0" bIns="0">
+            <a:spAutoFit/>
+          </a:bodyPr>
+          <a:lstStyle/>
+          <a:p>
+            <a:pPr algn="l">
+              <a:spcAft>
+                <a:spcPts val="810"/>
+              </a:spcAft>
+            </a:pPr>
+            <a:r>
+              <a:rPr sz="1800" b="0" i="0">
+                <a:solidFill>
+                  <a:srgbClr val="1C1B19"/>
+                </a:solidFill>
+                <a:latin typeface="Source Serif 4"/>
+              </a:rPr>
+              <a:t>Ten minutes into a stoichiometry set, her page is blank. When you walk by she says, "I'm fine."</a:t>
+            </a:r>
+          </a:p>
+        </p:txBody>
+      </p:sp>
+      <p:sp>
+        <p:nvSpPr>
+          <p:cNvPr id="9" name="Rectangle 8"/>
+          <p:cNvSpPr/>
+          <p:nvPr/>
+        </p:nvSpPr>
+        <p:spPr>
+          <a:xfrm>
+            <a:off x="4419600" y="2103120"/>
+            <a:ext cx="3322320" cy="3840480"/>
+          </a:xfrm>
+          <a:prstGeom prst="rect">
+            <a:avLst/>
+          </a:prstGeom>
+          <a:solidFill>
+            <a:srgbClr val="FFFFFF"/>
+          </a:solidFill>
+          <a:ln w="15875">
+            <a:solidFill>
+              <a:srgbClr val="D8D2C6"/>
+            </a:solidFill>
+          </a:ln>
+          <a:effectLst/>
+        </p:spPr>
+        <p:style>
+          <a:lnRef idx="1">
+            <a:schemeClr val="accent1"/>
+          </a:lnRef>
+          <a:fillRef idx="3">
+            <a:schemeClr val="accent1"/>
+          </a:fillRef>
+          <a:effectRef idx="2">
+            <a:schemeClr val="accent1"/>
+          </a:effectRef>
+          <a:fontRef idx="minor">
+            <a:schemeClr val="lt1"/>
+          </a:fontRef>
+        </p:style>
+        <p:txBody>
+          <a:bodyPr rtlCol="0" anchor="ctr"/>
+          <a:lstStyle/>
+          <a:p>
+            <a:pPr algn="ctr"/>
+          </a:p>
+        </p:txBody>
+      </p:sp>
+      <p:sp>
+        <p:nvSpPr>
+          <p:cNvPr id="10" name="TextBox 9"/>
+          <p:cNvSpPr txBox="1"/>
+          <p:nvPr/>
+        </p:nvSpPr>
+        <p:spPr>
+          <a:xfrm>
+            <a:off x="4648200" y="2286000"/>
+            <a:ext cx="2865120" cy="365760"/>
+          </a:xfrm>
+          <a:prstGeom prst="rect">
+            <a:avLst/>
+          </a:prstGeom>
+          <a:noFill/>
+        </p:spPr>
+        <p:txBody>
+          <a:bodyPr wrap="square" anchor="t" lIns="0" rIns="0" tIns="0" bIns="0">
+            <a:spAutoFit/>
+          </a:bodyPr>
+          <a:lstStyle/>
+          <a:p>
+            <a:pPr algn="l">
+              <a:spcAft>
+                <a:spcPts val="585"/>
+              </a:spcAft>
+            </a:pPr>
+            <a:r>
+              <a:rPr sz="1300" b="1" i="0">
+                <a:solidFill>
+                  <a:srgbClr val="0B2D5B"/>
+                </a:solidFill>
+                <a:latin typeface="Inter Tight"/>
+              </a:rPr>
+              <a:t>THEO, 7TH GRADE SCIENCE</a:t>
+            </a:r>
+          </a:p>
+        </p:txBody>
+      </p:sp>
+      <p:sp>
+        <p:nvSpPr>
+          <p:cNvPr id="11" name="TextBox 10"/>
+          <p:cNvSpPr txBox="1"/>
+          <p:nvPr/>
+        </p:nvSpPr>
+        <p:spPr>
+          <a:xfrm>
+            <a:off x="4648200" y="2743200"/>
+            <a:ext cx="2865120" cy="3017520"/>
+          </a:xfrm>
+          <a:prstGeom prst="rect">
+            <a:avLst/>
+          </a:prstGeom>
+          <a:noFill/>
+        </p:spPr>
+        <p:txBody>
+          <a:bodyPr wrap="square" anchor="t" lIns="0" rIns="0" tIns="0" bIns="0">
+            <a:spAutoFit/>
+          </a:bodyPr>
+          <a:lstStyle/>
+          <a:p>
+            <a:pPr algn="l">
+              <a:spcAft>
+                <a:spcPts val="810"/>
+              </a:spcAft>
+            </a:pPr>
+            <a:r>
+              <a:rPr sz="1800" b="0" i="0">
+                <a:solidFill>
+                  <a:srgbClr val="1C1B19"/>
+                </a:solidFill>
+                <a:latin typeface="Source Serif 4"/>
+              </a:rPr>
+              <a:t>Halfway through the lab write-up he says, "I'm just not a science person," and asks for the nurse.</a:t>
+            </a:r>
+          </a:p>
+        </p:txBody>
+      </p:sp>
+      <p:sp>
+        <p:nvSpPr>
+          <p:cNvPr id="12" name="Rectangle 11"/>
+          <p:cNvSpPr/>
+          <p:nvPr/>
+        </p:nvSpPr>
+        <p:spPr>
+          <a:xfrm>
+            <a:off x="8016239" y="2103120"/>
+            <a:ext cx="3322320" cy="3840480"/>
+          </a:xfrm>
+          <a:prstGeom prst="rect">
+            <a:avLst/>
+          </a:prstGeom>
+          <a:solidFill>
+            <a:srgbClr val="FFFFFF"/>
+          </a:solidFill>
+          <a:ln w="15875">
+            <a:solidFill>
+              <a:srgbClr val="D8D2C6"/>
+            </a:solidFill>
+          </a:ln>
+          <a:effectLst/>
+        </p:spPr>
+        <p:style>
+          <a:lnRef idx="1">
+            <a:schemeClr val="accent1"/>
+          </a:lnRef>
+          <a:fillRef idx="3">
+            <a:schemeClr val="accent1"/>
+          </a:fillRef>
+          <a:effectRef idx="2">
+            <a:schemeClr val="accent1"/>
+          </a:effectRef>
+          <a:fontRef idx="minor">
+            <a:schemeClr val="lt1"/>
+          </a:fontRef>
+        </p:style>
+        <p:txBody>
+          <a:bodyPr rtlCol="0" anchor="ctr"/>
+          <a:lstStyle/>
+          <a:p>
+            <a:pPr algn="ctr"/>
+          </a:p>
+        </p:txBody>
+      </p:sp>
+      <p:sp>
+        <p:nvSpPr>
+          <p:cNvPr id="13" name="TextBox 12"/>
+          <p:cNvSpPr txBox="1"/>
+          <p:nvPr/>
+        </p:nvSpPr>
+        <p:spPr>
+          <a:xfrm>
+            <a:off x="8244839" y="2286000"/>
+            <a:ext cx="2865120" cy="365760"/>
+          </a:xfrm>
+          <a:prstGeom prst="rect">
+            <a:avLst/>
+          </a:prstGeom>
+          <a:noFill/>
+        </p:spPr>
+        <p:txBody>
+          <a:bodyPr wrap="square" anchor="t" lIns="0" rIns="0" tIns="0" bIns="0">
+            <a:spAutoFit/>
+          </a:bodyPr>
+          <a:lstStyle/>
+          <a:p>
+            <a:pPr algn="l">
+              <a:spcAft>
+                <a:spcPts val="585"/>
+              </a:spcAft>
+            </a:pPr>
+            <a:r>
+              <a:rPr sz="1300" b="1" i="0">
+                <a:solidFill>
+                  <a:srgbClr val="0B2D5B"/>
+                </a:solidFill>
+                <a:latin typeface="Inter Tight"/>
+              </a:rPr>
+              <a:t>ANA, 10TH GRADE PHYSICS</a:t>
+            </a:r>
+          </a:p>
+        </p:txBody>
+      </p:sp>
+      <p:sp>
+        <p:nvSpPr>
+          <p:cNvPr id="14" name="TextBox 13"/>
+          <p:cNvSpPr txBox="1"/>
+          <p:nvPr/>
+        </p:nvSpPr>
+        <p:spPr>
+          <a:xfrm>
+            <a:off x="8244839" y="2743200"/>
+            <a:ext cx="2865120" cy="3017520"/>
+          </a:xfrm>
+          <a:prstGeom prst="rect">
+            <a:avLst/>
+          </a:prstGeom>
+          <a:noFill/>
+        </p:spPr>
+        <p:txBody>
+          <a:bodyPr wrap="square" anchor="t" lIns="0" rIns="0" tIns="0" bIns="0">
+            <a:spAutoFit/>
+          </a:bodyPr>
+          <a:lstStyle/>
+          <a:p>
+            <a:pPr algn="l">
+              <a:spcAft>
+                <a:spcPts val="810"/>
+              </a:spcAft>
+            </a:pPr>
+            <a:r>
+              <a:rPr sz="1800" b="0" i="0">
+                <a:solidFill>
+                  <a:srgbClr val="1C1B19"/>
+                </a:solidFill>
+                <a:latin typeface="Source Serif 4"/>
+              </a:rPr>
+              <a:t>Raises her hand after every step to ask, "Is this right?" She's usually right.</a:t>
+            </a:r>
+          </a:p>
+        </p:txBody>
+      </p:sp>
+    </p:spTree>
+  </p:cSld>
+  <p:clrMapOvr>
+    <a:masterClrMapping/>
+  </p:clrMapOvr>
+</p:sld>
+</file>
+
+<file path=ppt/slides/slide19.xml><?xml version="1.0" encoding="utf-8"?>
+<p:sld xmlns:a="http://schemas.openxmlformats.org/drawingml/2006/main" xmlns:p="http://schemas.openxmlformats.org/presentationml/2006/main" xmlns:r="http://schemas.openxmlformats.org/officeDocument/2006/relationships">
+  <p:cSld>
+    <p:bg>
+      <p:bgPr>
+        <a:solidFill>
+          <a:srgbClr val="F7F4EE"/>
+        </a:solidFill>
+        <a:effectLst/>
+      </p:bgPr>
+    </p:bg>
+    <p:spTree>
+      <p:nvGrpSpPr>
+        <p:cNvPr id="1" name=""/>
+        <p:cNvGrpSpPr/>
+        <p:nvPr/>
+      </p:nvGrpSpPr>
+      <p:grpSpPr/>
+      <p:sp>
+        <p:nvSpPr>
+          <p:cNvPr id="2" name="Rectangle 1"/>
+          <p:cNvSpPr/>
+          <p:nvPr/>
+        </p:nvSpPr>
+        <p:spPr>
+          <a:xfrm>
+            <a:off x="548640" y="502920"/>
+            <a:ext cx="457200" cy="54864"/>
+          </a:xfrm>
+          <a:prstGeom prst="rect">
+            <a:avLst/>
+          </a:prstGeom>
+          <a:solidFill>
+            <a:srgbClr val="F47B20"/>
+          </a:solidFill>
+          <a:ln>
+            <a:noFill/>
+          </a:ln>
+          <a:effectLst/>
+        </p:spPr>
+        <p:style>
+          <a:lnRef idx="1">
+            <a:schemeClr val="accent1"/>
+          </a:lnRef>
+          <a:fillRef idx="3">
+            <a:schemeClr val="accent1"/>
+          </a:fillRef>
+          <a:effectRef idx="2">
+            <a:schemeClr val="accent1"/>
+          </a:effectRef>
+          <a:fontRef idx="minor">
+            <a:schemeClr val="lt1"/>
+          </a:fontRef>
+        </p:style>
+        <p:txBody>
+          <a:bodyPr rtlCol="0" anchor="ctr"/>
+          <a:lstStyle/>
+          <a:p>
+            <a:pPr algn="ctr"/>
+          </a:p>
+        </p:txBody>
+      </p:sp>
+      <p:sp>
+        <p:nvSpPr>
+          <p:cNvPr id="3" name="TextBox 2"/>
+          <p:cNvSpPr txBox="1"/>
+          <p:nvPr/>
+        </p:nvSpPr>
+        <p:spPr>
+          <a:xfrm>
+            <a:off x="1143000" y="393192"/>
+            <a:ext cx="8229600" cy="274320"/>
+          </a:xfrm>
+          <a:prstGeom prst="rect">
+            <a:avLst/>
+          </a:prstGeom>
+          <a:noFill/>
+        </p:spPr>
+        <p:txBody>
+          <a:bodyPr wrap="square" anchor="t" lIns="0" rIns="0" tIns="0" bIns="0">
+            <a:spAutoFit/>
+          </a:bodyPr>
+          <a:lstStyle/>
+          <a:p>
+            <a:pPr algn="l">
+              <a:spcAft>
+                <a:spcPts val="540"/>
+              </a:spcAft>
+            </a:pPr>
+            <a:r>
+              <a:rPr sz="1200" b="1" i="0">
+                <a:solidFill>
+                  <a:srgbClr val="5D5A54"/>
+                </a:solidFill>
+                <a:latin typeface="Inter Tight"/>
+              </a:rPr>
+              <a:t>BEFORE YOU GO</a:t>
+            </a:r>
+          </a:p>
+        </p:txBody>
+      </p:sp>
+      <p:sp>
+        <p:nvSpPr>
+          <p:cNvPr id="4" name="TextBox 3"/>
+          <p:cNvSpPr txBox="1"/>
+          <p:nvPr/>
+        </p:nvSpPr>
+        <p:spPr>
+          <a:xfrm>
+            <a:off x="8229600" y="6400800"/>
+            <a:ext cx="3410712" cy="274320"/>
+          </a:xfrm>
+          <a:prstGeom prst="rect">
+            <a:avLst/>
+          </a:prstGeom>
+          <a:noFill/>
+        </p:spPr>
+        <p:txBody>
+          <a:bodyPr wrap="square" anchor="t" lIns="0" rIns="0" tIns="0" bIns="0">
+            <a:spAutoFit/>
+          </a:bodyPr>
+          <a:lstStyle/>
+          <a:p>
+            <a:pPr algn="r">
+              <a:spcAft>
+                <a:spcPts val="450"/>
+              </a:spcAft>
+            </a:pPr>
+            <a:r>
+              <a:rPr sz="1000" b="0" i="0">
+                <a:solidFill>
+                  <a:srgbClr val="5D5A54"/>
+                </a:solidFill>
+                <a:latin typeface="Inter Tight"/>
+              </a:rPr>
+              <a:t>Beaver Counseling</a:t>
+            </a:r>
+          </a:p>
+        </p:txBody>
+      </p:sp>
+      <p:sp>
+        <p:nvSpPr>
+          <p:cNvPr id="5" name="TextBox 4"/>
+          <p:cNvSpPr txBox="1"/>
+          <p:nvPr/>
+        </p:nvSpPr>
+        <p:spPr>
+          <a:xfrm>
+            <a:off x="822960" y="1188720"/>
+            <a:ext cx="10515600" cy="914400"/>
+          </a:xfrm>
+          <a:prstGeom prst="rect">
+            <a:avLst/>
+          </a:prstGeom>
+          <a:noFill/>
+        </p:spPr>
+        <p:txBody>
+          <a:bodyPr wrap="square" anchor="t" lIns="0" rIns="0" tIns="0" bIns="0">
+            <a:spAutoFit/>
+          </a:bodyPr>
+          <a:lstStyle/>
+          <a:p>
+            <a:pPr algn="l">
+              <a:spcAft>
+                <a:spcPts val="1620"/>
+              </a:spcAft>
+            </a:pPr>
+            <a:r>
+              <a:rPr sz="3600" b="1" i="0">
+                <a:solidFill>
+                  <a:srgbClr val="1C1B19"/>
+                </a:solidFill>
+                <a:latin typeface="Source Serif 4"/>
+              </a:rPr>
+              <a:t>One move this week</a:t>
+            </a:r>
+          </a:p>
+        </p:txBody>
+      </p:sp>
+      <p:sp>
+        <p:nvSpPr>
+          <p:cNvPr id="6" name="TextBox 5"/>
+          <p:cNvSpPr txBox="1"/>
+          <p:nvPr/>
+        </p:nvSpPr>
+        <p:spPr>
+          <a:xfrm>
+            <a:off x="822960" y="2286000"/>
+            <a:ext cx="10515600" cy="1463040"/>
+          </a:xfrm>
+          <a:prstGeom prst="rect">
+            <a:avLst/>
+          </a:prstGeom>
+          <a:noFill/>
+        </p:spPr>
+        <p:txBody>
+          <a:bodyPr wrap="square" anchor="t" lIns="0" rIns="0" tIns="0" bIns="0">
+            <a:spAutoFit/>
+          </a:bodyPr>
+          <a:lstStyle/>
+          <a:p>
+            <a:pPr algn="l">
+              <a:spcAft>
+                <a:spcPts val="1080"/>
+              </a:spcAft>
+            </a:pPr>
+            <a:r>
+              <a:rPr sz="2400" b="0" i="0">
+                <a:solidFill>
+                  <a:srgbClr val="1C1B19"/>
+                </a:solidFill>
+                <a:latin typeface="Source Serif 4"/>
+              </a:rPr>
+              <a:t>Pick one to try with one class. We'll swap notes next time.</a:t>
+            </a:r>
+          </a:p>
+        </p:txBody>
+      </p:sp>
+      <p:sp>
+        <p:nvSpPr>
+          <p:cNvPr id="7" name="Rectangle 6"/>
+          <p:cNvSpPr/>
+          <p:nvPr/>
+        </p:nvSpPr>
+        <p:spPr>
+          <a:xfrm>
+            <a:off x="822960" y="4023360"/>
+            <a:ext cx="10515600" cy="1371600"/>
+          </a:xfrm>
+          <a:prstGeom prst="rect">
+            <a:avLst/>
+          </a:prstGeom>
+          <a:solidFill>
+            <a:srgbClr val="FFFFFF"/>
+          </a:solidFill>
+          <a:ln w="15875">
+            <a:solidFill>
+              <a:srgbClr val="1C1B19"/>
+            </a:solidFill>
+          </a:ln>
+          <a:effectLst/>
+        </p:spPr>
+        <p:style>
+          <a:lnRef idx="1">
+            <a:schemeClr val="accent1"/>
+          </a:lnRef>
+          <a:fillRef idx="3">
+            <a:schemeClr val="accent1"/>
+          </a:fillRef>
+          <a:effectRef idx="2">
+            <a:schemeClr val="accent1"/>
+          </a:effectRef>
+          <a:fontRef idx="minor">
+            <a:schemeClr val="lt1"/>
+          </a:fontRef>
+        </p:style>
+        <p:txBody>
+          <a:bodyPr rtlCol="0" anchor="ctr"/>
+          <a:lstStyle/>
+          <a:p>
+            <a:pPr algn="ctr"/>
+          </a:p>
+        </p:txBody>
+      </p:sp>
+      <p:sp>
+        <p:nvSpPr>
+          <p:cNvPr id="8" name="TextBox 7"/>
+          <p:cNvSpPr txBox="1"/>
+          <p:nvPr/>
+        </p:nvSpPr>
+        <p:spPr>
+          <a:xfrm>
+            <a:off x="1097280" y="4206240"/>
+            <a:ext cx="10058400" cy="365760"/>
+          </a:xfrm>
+          <a:prstGeom prst="rect">
+            <a:avLst/>
+          </a:prstGeom>
+          <a:noFill/>
+        </p:spPr>
+        <p:txBody>
+          <a:bodyPr wrap="square" anchor="t" lIns="0" rIns="0" tIns="0" bIns="0">
+            <a:spAutoFit/>
+          </a:bodyPr>
+          <a:lstStyle/>
+          <a:p>
+            <a:pPr algn="l">
+              <a:spcAft>
+                <a:spcPts val="540"/>
+              </a:spcAft>
+            </a:pPr>
+            <a:r>
+              <a:rPr sz="1200" b="1" i="0">
+                <a:solidFill>
+                  <a:srgbClr val="0B2D5B"/>
+                </a:solidFill>
+                <a:latin typeface="Inter Tight"/>
+              </a:rPr>
+              <a:t>STUDENT CARD TEACHERS CAN SHARE</a:t>
             </a:r>
           </a:p>
         </p:txBody>
@@ -6917,7 +10182,7 @@
                 </a:solidFill>
                 <a:latin typeface="Inter Tight"/>
               </a:rPr>
-              <a:t>TEACHER PAGE  ·  skipped when you present  ·  Before you teach</a:t>
+              <a:t>TEACHER PAGE  ·  skipped when you present  ·  Before you present</a:t>
             </a:r>
           </a:p>
         </p:txBody>
@@ -6956,7 +10221,7 @@
                 </a:solidFill>
                 <a:latin typeface="Source Serif 4"/>
               </a:rPr>
-              <a:t>Before you teach</a:t>
+              <a:t>Before you present</a:t>
             </a:r>
           </a:p>
         </p:txBody>
@@ -6995,6 +10260,54 @@
                 </a:solidFill>
                 <a:latin typeface="Source Serif 4"/>
               </a:rPr>
+              <a:t>Two presenters, one voice.</a:t>
+            </a:r>
+          </a:p>
+          <a:p>
+            <a:pPr algn="l">
+              <a:spcAft>
+                <a:spcPts val="585"/>
+              </a:spcAft>
+            </a:pPr>
+            <a:r>
+              <a:rPr sz="1300" b="0" i="0">
+                <a:solidFill>
+                  <a:srgbClr val="1C1B19"/>
+                </a:solidFill>
+                <a:latin typeface="Source Serif 4"/>
+              </a:rPr>
+              <a:t>A natural split: the counselor or psychologist presents the stress and motivation research (the shutdown loop, reappraisal, wise feedback, mindset), and learning support presents the instructional research (desirable difficulties, the 80% finding, worked examples, productive failure). Each of you can take one of the student scenarios in the debrief.</a:t>
+            </a:r>
+          </a:p>
+          <a:p>
+            <a:pPr algn="l">
+              <a:spcAft>
+                <a:spcPts val="585"/>
+              </a:spcAft>
+            </a:pPr>
+            <a:r>
+              <a:rPr sz="1300" b="0" i="0">
+                <a:solidFill>
+                  <a:srgbClr val="1C1B19"/>
+                </a:solidFill>
+                <a:latin typeface="Source Serif 4"/>
+              </a:rPr>
+              <a:t/>
+            </a:r>
+          </a:p>
+          <a:p>
+            <a:pPr algn="l">
+              <a:spcAft>
+                <a:spcPts val="585"/>
+              </a:spcAft>
+            </a:pPr>
+            <a:r>
+              <a:rPr sz="1500" b="1" i="0">
+                <a:solidFill>
+                  <a:srgbClr val="1C1B19"/>
+                </a:solidFill>
+                <a:latin typeface="Source Serif 4"/>
+              </a:rPr>
               <a:t>Nobody here is doing it wrong.</a:t>
             </a:r>
           </a:p>
@@ -7059,55 +10372,7 @@
                 </a:solidFill>
                 <a:latin typeface="Source Serif 4"/>
               </a:rPr>
-              <a:t>Watching a student struggle is hard, and rescuing is a kind instinct. Part of this session is helping adults sit with a student's discomfort a little longer, the same skill we're asking of students.</a:t>
-            </a:r>
-          </a:p>
-          <a:p>
-            <a:pPr algn="l">
-              <a:spcAft>
-                <a:spcPts val="585"/>
-              </a:spcAft>
-            </a:pPr>
-            <a:r>
-              <a:rPr sz="1300" b="0" i="0">
-                <a:solidFill>
-                  <a:srgbClr val="1C1B19"/>
-                </a:solidFill>
-                <a:latin typeface="Source Serif 4"/>
-              </a:rPr>
-              <a:t/>
-            </a:r>
-          </a:p>
-          <a:p>
-            <a:pPr algn="l">
-              <a:spcAft>
-                <a:spcPts val="585"/>
-              </a:spcAft>
-            </a:pPr>
-            <a:r>
-              <a:rPr sz="1500" b="1" i="0">
-                <a:solidFill>
-                  <a:srgbClr val="1C1B19"/>
-                </a:solidFill>
-                <a:latin typeface="Source Serif 4"/>
-              </a:rPr>
-              <a:t>Shutdown and crisis are different.</a:t>
-            </a:r>
-          </a:p>
-          <a:p>
-            <a:pPr algn="l">
-              <a:spcAft>
-                <a:spcPts val="585"/>
-              </a:spcAft>
-            </a:pPr>
-            <a:r>
-              <a:rPr sz="1300" b="0" i="0">
-                <a:solidFill>
-                  <a:srgbClr val="1C1B19"/>
-                </a:solidFill>
-                <a:latin typeface="Source Serif 4"/>
-              </a:rPr>
-              <a:t>This session is about everyday academic struggle. A student who seems hopeless, panicked most days, or unsafe needs a counselor the same day. Teachers don't screen or diagnose; they notice and walk the student over.</a:t>
+              <a:t>Watching a student struggle is hard, and rescuing is a kind instinct. Part of this talk is helping adults sit with a student's discomfort a little longer, the same skill we're asking of students.</a:t>
             </a:r>
           </a:p>
           <a:p>
@@ -7162,7 +10427,7 @@
                 </a:solidFill>
                 <a:latin typeface="Source Serif 4"/>
               </a:rPr>
-              <a:t>Accommodations are scaffolds.</a:t>
+              <a:t>Shutdown and crisis are different.</a:t>
             </a:r>
           </a:p>
           <a:p>
@@ -7178,7 +10443,7 @@
                 </a:solidFill>
                 <a:latin typeface="Source Serif 4"/>
               </a:rPr>
-              <a:t>Extended time, notes, or a quiet space under a 504 or IEP keep a student in the stretch zone. Frame them that way, never as a shortcut.</a:t>
+              <a:t>This talk is about everyday academic struggle. A student who seems hopeless, panicked most days, or unsafe needs a counselor the same day. Teachers don't screen or diagnose; they notice and walk the student over.</a:t>
             </a:r>
           </a:p>
           <a:p>
@@ -7210,7 +10475,7 @@
                 </a:solidFill>
                 <a:latin typeface="Source Serif 4"/>
               </a:rPr>
-              <a:t>Middle and Upper School differ.</a:t>
+              <a:t>Be honest about the evidence.</a:t>
             </a:r>
           </a:p>
           <a:p>
@@ -7226,7 +10491,7 @@
                 </a:solidFill>
                 <a:latin typeface="Source Serif 4"/>
               </a:rPr>
-              <a:t>Younger students need more visible structure (a printed hint ladder, a timer on the board). Older students can own more of it. Invite each division to adapt the moves.</a:t>
+              <a:t>Several studies used college students or adults, and some effects are modest. Teachers trust a presenter who says so. Where a move comes from classroom practice rather than a study (the hint ladder, time-boxing), say that too.</a:t>
             </a:r>
           </a:p>
           <a:p>
@@ -7258,7 +10523,7 @@
                 </a:solidFill>
                 <a:latin typeface="Source Serif 4"/>
               </a:rPr>
-              <a:t>Keep mindset messaging modest.</a:t>
+              <a:t>Learning plans are scaffolds.</a:t>
             </a:r>
           </a:p>
           <a:p>
@@ -7274,7 +10539,7 @@
                 </a:solidFill>
                 <a:latin typeface="Source Serif 4"/>
               </a:rPr>
-              <a:t>Growth-mindset posters alone show small effects in large studies. The research supports the concrete moves in this session, with the message built into them.</a:t>
+              <a:t>Extended time, notes, or a quiet space under a learning plan keep a student in the stretch zone. Frame them that way, never as a shortcut. Middle School students usually need the moves more visible (a printed hint ladder, a timer on the board).</a:t>
             </a:r>
           </a:p>
           <a:p>
@@ -7532,7 +10797,7 @@
                 </a:solidFill>
                 <a:latin typeface="Source Serif 4"/>
               </a:rPr>
-              <a:t>A student learning English may be stuck on the words, not the science. Glossaries, sentence starters, and a worked example in plain language lower the language load so the real challenge is the content.</a:t>
+              <a:t>A student learning English may be stuck on the words, not the science. Glossaries, sentence starters, and worked examples in plain language lower the language load so the real challenge is the content.</a:t>
             </a:r>
           </a:p>
           <a:p>
@@ -7998,7 +11263,7 @@
                 </a:solidFill>
                 <a:latin typeface="Source Serif 4"/>
               </a:rPr>
-              <a:t>Learning conditions that make practice harder in the short term, like spacing, mixing problem types, and testing yourself, often produce better long-term learning than easier practice. Bjork calls these desirable difficulties.</a:t>
+              <a:t>Learning conditions that make practice harder in the short term, like spacing, mixing problem types, and testing yourself, often produce better long-term learning. How well students perform during practice is a poor guide to how much they're learning.</a:t>
             </a:r>
           </a:p>
           <a:p>
@@ -8030,7 +11295,7 @@
                 </a:solidFill>
                 <a:latin typeface="Source Serif 4"/>
               </a:rPr>
-              <a:t>Rosenshine's review of research on effective teachers found that the most successful teachers kept students at a high success rate during practice, about 80%, which keeps practice challenging without steady failure.</a:t>
+              <a:t>Vygotsky described the zone of proximal development: the gap between what a learner can do alone and what they can do with guidance. Teaching aimed there moves development forward.</a:t>
             </a:r>
           </a:p>
           <a:p>
@@ -8046,6 +11311,38 @@
                 </a:solidFill>
                 <a:latin typeface="Inter Tight"/>
               </a:rPr>
+              <a:t>Vygotsky, 1978, Mind in Society</a:t>
+            </a:r>
+          </a:p>
+          <a:p>
+            <a:pPr algn="l">
+              <a:spcAft>
+                <a:spcPts val="585"/>
+              </a:spcAft>
+            </a:pPr>
+            <a:r>
+              <a:rPr sz="1300" b="0" i="0">
+                <a:solidFill>
+                  <a:srgbClr val="1C1B19"/>
+                </a:solidFill>
+                <a:latin typeface="Source Serif 4"/>
+              </a:rPr>
+              <a:t>Rosenshine's review of research on effective teachers found the most successful teachers kept students at a high success rate during practice, around 80%.</a:t>
+            </a:r>
+          </a:p>
+          <a:p>
+            <a:pPr algn="l">
+              <a:spcAft>
+                <a:spcPts val="585"/>
+              </a:spcAft>
+            </a:pPr>
+            <a:r>
+              <a:rPr sz="1050" b="0" i="0">
+                <a:solidFill>
+                  <a:srgbClr val="5D5A54"/>
+                </a:solidFill>
+                <a:latin typeface="Inter Tight"/>
+              </a:rPr>
               <a:t>Rosenshine, 2012, American Educator</a:t>
             </a:r>
           </a:p>
@@ -8062,7 +11359,7 @@
                 </a:solidFill>
                 <a:latin typeface="Source Serif 4"/>
               </a:rPr>
-              <a:t>Novices learn more from studying worked examples than from solving the same problems unaided, because unaided problem solving overloads working memory.</a:t>
+              <a:t>Algebra students who studied worked examples learned faster and solved similar problems better than students who solved the same problems on their own.</a:t>
             </a:r>
           </a:p>
           <a:p>
@@ -8149,7 +11446,7 @@
                 </a:solidFill>
                 <a:latin typeface="Source Serif 4"/>
               </a:rPr>
-              <a:t>Struggling first on a problem before instruction can help, when the struggle is designed and followed by good teaching. Kapur calls this productive failure and contrasts it with failure that teaches nothing.</a:t>
+              <a:t>Students who first tried to solve a new kind of problem, then got instruction, often showed deeper understanding and transfer than students taught first. It works when the struggle is designed and followed by teaching that builds on the students' attempts.</a:t>
             </a:r>
           </a:p>
           <a:p>
@@ -8181,7 +11478,7 @@
                 </a:solidFill>
                 <a:latin typeface="Source Serif 4"/>
               </a:rPr>
-              <a:t>Critical feedback paired with a note saying the teacher has high standards and believes the student can meet them made middle schoolers more likely to revise their work, with the largest effect for Black students who had lower trust in school.</a:t>
+              <a:t>Students told that a racing heart before a test is the body preparing to perform scored higher on GRE math practice and on the real exam months later.</a:t>
             </a:r>
           </a:p>
           <a:p>
@@ -8197,39 +11494,39 @@
                 </a:solidFill>
                 <a:latin typeface="Inter Tight"/>
               </a:rPr>
+              <a:t>Jamieson et al., 2010, Journal of Experimental Social Psychology</a:t>
+            </a:r>
+          </a:p>
+          <a:p>
+            <a:pPr algn="l">
+              <a:spcAft>
+                <a:spcPts val="585"/>
+              </a:spcAft>
+            </a:pPr>
+            <a:r>
+              <a:rPr sz="1300" b="0" i="0">
+                <a:solidFill>
+                  <a:srgbClr val="1C1B19"/>
+                </a:solidFill>
+                <a:latin typeface="Source Serif 4"/>
+              </a:rPr>
+              <a:t>Critical feedback paired with a note about high standards and the teacher's belief that the student could meet them made 7th graders more likely to revise their essays, with the largest effect for Black students who had lower trust in school.</a:t>
+            </a:r>
+          </a:p>
+          <a:p>
+            <a:pPr algn="l">
+              <a:spcAft>
+                <a:spcPts val="585"/>
+              </a:spcAft>
+            </a:pPr>
+            <a:r>
+              <a:rPr sz="1050" b="0" i="0">
+                <a:solidFill>
+                  <a:srgbClr val="5D5A54"/>
+                </a:solidFill>
+                <a:latin typeface="Inter Tight"/>
+              </a:rPr>
               <a:t>Yeager et al., 2014, Journal of Experimental Psychology: General</a:t>
-            </a:r>
-          </a:p>
-          <a:p>
-            <a:pPr algn="l">
-              <a:spcAft>
-                <a:spcPts val="585"/>
-              </a:spcAft>
-            </a:pPr>
-            <a:r>
-              <a:rPr sz="1300" b="0" i="0">
-                <a:solidFill>
-                  <a:srgbClr val="1C1B19"/>
-                </a:solidFill>
-                <a:latin typeface="Source Serif 4"/>
-              </a:rPr>
-              <a:t>Students told that a racing heart before a test is the body preparing to perform scored higher on GRE math practice and the real exam than students not told this.</a:t>
-            </a:r>
-          </a:p>
-          <a:p>
-            <a:pPr algn="l">
-              <a:spcAft>
-                <a:spcPts val="585"/>
-              </a:spcAft>
-            </a:pPr>
-            <a:r>
-              <a:rPr sz="1050" b="0" i="0">
-                <a:solidFill>
-                  <a:srgbClr val="5D5A54"/>
-                </a:solidFill>
-                <a:latin typeface="Inter Tight"/>
-              </a:rPr>
-              <a:t>Jamieson et al., 2010, Journal of Experimental Social Psychology</a:t>
             </a:r>
           </a:p>
           <a:p>
@@ -8487,7 +11784,7 @@
                 </a:solidFill>
                 <a:latin typeface="Source Serif 4"/>
               </a:rPr>
-              <a:t>Helping students push through hard work without shutting down.</a:t>
+              <a:t>What the research says about productive struggle, and what to try on Monday.</a:t>
             </a:r>
           </a:p>
         </p:txBody>
@@ -8526,7 +11823,7 @@
                 </a:solidFill>
                 <a:latin typeface="Inter Tight"/>
               </a:rPr>
-              <a:t>Beaver Upper School · Counseling</a:t>
+              <a:t>Beaver · Faculty professional development</a:t>
             </a:r>
           </a:p>
         </p:txBody>
@@ -8635,7 +11932,7 @@
                 </a:solidFill>
                 <a:latin typeface="Inter Tight"/>
               </a:rPr>
-              <a:t>START HERE</a:t>
+              <a:t>TO START</a:t>
             </a:r>
           </a:p>
         </p:txBody>
@@ -8905,7 +12202,7 @@
                 </a:solidFill>
                 <a:latin typeface="Inter Tight"/>
               </a:rPr>
-              <a:t>READING THE LINE</a:t>
+              <a:t>YOUR QUESTION</a:t>
             </a:r>
           </a:p>
         </p:txBody>
@@ -8957,8 +12254,47 @@
         </p:nvSpPr>
         <p:spPr>
           <a:xfrm>
-            <a:off x="822960" y="1005840"/>
-            <a:ext cx="10515600" cy="914400"/>
+            <a:off x="822960" y="1463040"/>
+            <a:ext cx="10515600" cy="3291840"/>
+          </a:xfrm>
+          <a:prstGeom prst="rect">
+            <a:avLst/>
+          </a:prstGeom>
+          <a:noFill/>
+        </p:spPr>
+        <p:txBody>
+          <a:bodyPr wrap="square" anchor="ctr" lIns="0" rIns="0" tIns="0" bIns="0">
+            <a:spAutoFit/>
+          </a:bodyPr>
+          <a:lstStyle/>
+          <a:p>
+            <a:pPr algn="l">
+              <a:spcAft>
+                <a:spcPts val="2070"/>
+              </a:spcAft>
+            </a:pPr>
+            <a:r>
+              <a:rPr sz="4600" b="1" i="0">
+                <a:solidFill>
+                  <a:srgbClr val="1C1B19"/>
+                </a:solidFill>
+                <a:latin typeface="Source Serif 4"/>
+              </a:rPr>
+              <a:t>How do we push just enough for growth without shutdown?</a:t>
+            </a:r>
+          </a:p>
+        </p:txBody>
+      </p:sp>
+      <p:sp>
+        <p:nvSpPr>
+          <p:cNvPr id="6" name="TextBox 5"/>
+          <p:cNvSpPr txBox="1"/>
+          <p:nvPr/>
+        </p:nvSpPr>
+        <p:spPr>
+          <a:xfrm>
+            <a:off x="822960" y="4846320"/>
+            <a:ext cx="10515600" cy="1097280"/>
           </a:xfrm>
           <a:prstGeom prst="rect">
             <a:avLst/>
@@ -8973,361 +12309,17 @@
           <a:p>
             <a:pPr algn="l">
               <a:spcAft>
-                <a:spcPts val="1530"/>
-              </a:spcAft>
-            </a:pPr>
-            <a:r>
-              <a:rPr sz="3400" b="1" i="0">
-                <a:solidFill>
-                  <a:srgbClr val="1C1B19"/>
-                </a:solidFill>
-                <a:latin typeface="Source Serif 4"/>
-              </a:rPr>
-              <a:t>Stretch or shutdown?</a:t>
-            </a:r>
-          </a:p>
-        </p:txBody>
-      </p:sp>
-      <p:sp>
-        <p:nvSpPr>
-          <p:cNvPr id="6" name="Rectangle 5"/>
-          <p:cNvSpPr/>
-          <p:nvPr/>
-        </p:nvSpPr>
-        <p:spPr>
-          <a:xfrm>
-            <a:off x="822960" y="2103120"/>
-            <a:ext cx="5120640" cy="3931920"/>
-          </a:xfrm>
-          <a:prstGeom prst="rect">
-            <a:avLst/>
-          </a:prstGeom>
-          <a:solidFill>
-            <a:srgbClr val="FFFFFF"/>
-          </a:solidFill>
-          <a:ln w="15875">
-            <a:solidFill>
-              <a:srgbClr val="D8D2C6"/>
-            </a:solidFill>
-          </a:ln>
-          <a:effectLst/>
-        </p:spPr>
-        <p:style>
-          <a:lnRef idx="1">
-            <a:schemeClr val="accent1"/>
-          </a:lnRef>
-          <a:fillRef idx="3">
-            <a:schemeClr val="accent1"/>
-          </a:fillRef>
-          <a:effectRef idx="2">
-            <a:schemeClr val="accent1"/>
-          </a:effectRef>
-          <a:fontRef idx="minor">
-            <a:schemeClr val="lt1"/>
-          </a:fontRef>
-        </p:style>
-        <p:txBody>
-          <a:bodyPr rtlCol="0" anchor="ctr"/>
-          <a:lstStyle/>
-          <a:p>
-            <a:pPr algn="ctr"/>
-          </a:p>
-        </p:txBody>
-      </p:sp>
-      <p:sp>
-        <p:nvSpPr>
-          <p:cNvPr id="7" name="TextBox 6"/>
-          <p:cNvSpPr txBox="1"/>
-          <p:nvPr/>
-        </p:nvSpPr>
-        <p:spPr>
-          <a:xfrm>
-            <a:off x="1097280" y="2286000"/>
-            <a:ext cx="4572000" cy="457200"/>
-          </a:xfrm>
-          <a:prstGeom prst="rect">
-            <a:avLst/>
-          </a:prstGeom>
-          <a:noFill/>
-        </p:spPr>
-        <p:txBody>
-          <a:bodyPr wrap="square" anchor="t" lIns="0" rIns="0" tIns="0" bIns="0">
-            <a:spAutoFit/>
-          </a:bodyPr>
-          <a:lstStyle/>
-          <a:p>
-            <a:pPr algn="l">
-              <a:spcAft>
-                <a:spcPts val="585"/>
-              </a:spcAft>
-            </a:pPr>
-            <a:r>
-              <a:rPr sz="1300" b="1" i="0">
-                <a:solidFill>
-                  <a:srgbClr val="0B2D5B"/>
-                </a:solidFill>
-                <a:latin typeface="Inter Tight"/>
-              </a:rPr>
-              <a:t>STRETCH (KEEP GOING)</a:t>
-            </a:r>
-          </a:p>
-        </p:txBody>
-      </p:sp>
-      <p:sp>
-        <p:nvSpPr>
-          <p:cNvPr id="8" name="TextBox 7"/>
-          <p:cNvSpPr txBox="1"/>
-          <p:nvPr/>
-        </p:nvSpPr>
-        <p:spPr>
-          <a:xfrm>
-            <a:off x="1097280" y="2788920"/>
-            <a:ext cx="4572000" cy="3108960"/>
-          </a:xfrm>
-          <a:prstGeom prst="rect">
-            <a:avLst/>
-          </a:prstGeom>
-          <a:noFill/>
-        </p:spPr>
-        <p:txBody>
-          <a:bodyPr wrap="square" anchor="t" lIns="0" rIns="0" tIns="0" bIns="0">
-            <a:spAutoFit/>
-          </a:bodyPr>
-          <a:lstStyle/>
-          <a:p>
-            <a:pPr algn="l">
-              <a:spcAft>
-                <a:spcPts val="855"/>
-              </a:spcAft>
-            </a:pPr>
-            <a:r>
-              <a:rPr sz="1900" b="0" i="0">
-                <a:solidFill>
-                  <a:srgbClr val="1C1B19"/>
-                </a:solidFill>
-                <a:latin typeface="Source Serif 4"/>
-              </a:rPr>
-              <a:t>Still trying new attempts</a:t>
-            </a:r>
-          </a:p>
-          <a:p>
-            <a:pPr algn="l">
-              <a:spcAft>
-                <a:spcPts val="855"/>
-              </a:spcAft>
-            </a:pPr>
-            <a:r>
-              <a:rPr sz="1900" b="0" i="0">
-                <a:solidFill>
-                  <a:srgbClr val="1C1B19"/>
-                </a:solidFill>
-                <a:latin typeface="Source Serif 4"/>
-              </a:rPr>
-              <a:t>Asks narrower questions</a:t>
-            </a:r>
-          </a:p>
-          <a:p>
-            <a:pPr algn="l">
-              <a:spcAft>
-                <a:spcPts val="855"/>
-              </a:spcAft>
-            </a:pPr>
-            <a:r>
-              <a:rPr sz="1900" b="0" i="0">
-                <a:solidFill>
-                  <a:srgbClr val="1C1B19"/>
-                </a:solidFill>
-                <a:latin typeface="Source Serif 4"/>
-              </a:rPr>
-              <a:t>Erases and retries</a:t>
-            </a:r>
-          </a:p>
-          <a:p>
-            <a:pPr algn="l">
-              <a:spcAft>
-                <a:spcPts val="855"/>
-              </a:spcAft>
-            </a:pPr>
-            <a:r>
-              <a:rPr sz="1900" b="0" i="0">
-                <a:solidFill>
-                  <a:srgbClr val="1C1B19"/>
-                </a:solidFill>
-                <a:latin typeface="Source Serif 4"/>
-              </a:rPr>
-              <a:t>Frustrated but still in it</a:t>
-            </a:r>
-          </a:p>
-        </p:txBody>
-      </p:sp>
-      <p:sp>
-        <p:nvSpPr>
-          <p:cNvPr id="9" name="Rectangle 8"/>
-          <p:cNvSpPr/>
-          <p:nvPr/>
-        </p:nvSpPr>
-        <p:spPr>
-          <a:xfrm>
-            <a:off x="6309360" y="2103120"/>
-            <a:ext cx="5120640" cy="3931920"/>
-          </a:xfrm>
-          <a:prstGeom prst="rect">
-            <a:avLst/>
-          </a:prstGeom>
-          <a:solidFill>
-            <a:srgbClr val="FFFFFF"/>
-          </a:solidFill>
-          <a:ln w="15875">
-            <a:solidFill>
-              <a:srgbClr val="D8D2C6"/>
-            </a:solidFill>
-          </a:ln>
-          <a:effectLst/>
-        </p:spPr>
-        <p:style>
-          <a:lnRef idx="1">
-            <a:schemeClr val="accent1"/>
-          </a:lnRef>
-          <a:fillRef idx="3">
-            <a:schemeClr val="accent1"/>
-          </a:fillRef>
-          <a:effectRef idx="2">
-            <a:schemeClr val="accent1"/>
-          </a:effectRef>
-          <a:fontRef idx="minor">
-            <a:schemeClr val="lt1"/>
-          </a:fontRef>
-        </p:style>
-        <p:txBody>
-          <a:bodyPr rtlCol="0" anchor="ctr"/>
-          <a:lstStyle/>
-          <a:p>
-            <a:pPr algn="ctr"/>
-          </a:p>
-        </p:txBody>
-      </p:sp>
-      <p:sp>
-        <p:nvSpPr>
-          <p:cNvPr id="10" name="TextBox 9"/>
-          <p:cNvSpPr txBox="1"/>
-          <p:nvPr/>
-        </p:nvSpPr>
-        <p:spPr>
-          <a:xfrm>
-            <a:off x="6583680" y="2286000"/>
-            <a:ext cx="4572000" cy="457200"/>
-          </a:xfrm>
-          <a:prstGeom prst="rect">
-            <a:avLst/>
-          </a:prstGeom>
-          <a:noFill/>
-        </p:spPr>
-        <p:txBody>
-          <a:bodyPr wrap="square" anchor="t" lIns="0" rIns="0" tIns="0" bIns="0">
-            <a:spAutoFit/>
-          </a:bodyPr>
-          <a:lstStyle/>
-          <a:p>
-            <a:pPr algn="l">
-              <a:spcAft>
-                <a:spcPts val="585"/>
-              </a:spcAft>
-            </a:pPr>
-            <a:r>
-              <a:rPr sz="1300" b="1" i="0">
-                <a:solidFill>
-                  <a:srgbClr val="0B2D5B"/>
-                </a:solidFill>
-                <a:latin typeface="Inter Tight"/>
-              </a:rPr>
-              <a:t>SHUTDOWN (CHANGE SOMETHING)</a:t>
-            </a:r>
-          </a:p>
-        </p:txBody>
-      </p:sp>
-      <p:sp>
-        <p:nvSpPr>
-          <p:cNvPr id="11" name="TextBox 10"/>
-          <p:cNvSpPr txBox="1"/>
-          <p:nvPr/>
-        </p:nvSpPr>
-        <p:spPr>
-          <a:xfrm>
-            <a:off x="6583680" y="2788920"/>
-            <a:ext cx="4572000" cy="3108960"/>
-          </a:xfrm>
-          <a:prstGeom prst="rect">
-            <a:avLst/>
-          </a:prstGeom>
-          <a:noFill/>
-        </p:spPr>
-        <p:txBody>
-          <a:bodyPr wrap="square" anchor="t" lIns="0" rIns="0" tIns="0" bIns="0">
-            <a:spAutoFit/>
-          </a:bodyPr>
-          <a:lstStyle/>
-          <a:p>
-            <a:pPr algn="l">
-              <a:spcAft>
-                <a:spcPts val="855"/>
-              </a:spcAft>
-            </a:pPr>
-            <a:r>
-              <a:rPr sz="1900" b="0" i="0">
-                <a:solidFill>
-                  <a:srgbClr val="1C1B19"/>
-                </a:solidFill>
-                <a:latin typeface="Source Serif 4"/>
-              </a:rPr>
-              <a:t>Nothing on the page</a:t>
-            </a:r>
-          </a:p>
-          <a:p>
-            <a:pPr algn="l">
-              <a:spcAft>
-                <a:spcPts val="855"/>
-              </a:spcAft>
-            </a:pPr>
-            <a:r>
-              <a:rPr sz="1900" b="0" i="0">
-                <a:solidFill>
-                  <a:srgbClr val="1C1B19"/>
-                </a:solidFill>
-                <a:latin typeface="Source Serif 4"/>
-              </a:rPr>
-              <a:t>"I don't get any of this"</a:t>
-            </a:r>
-          </a:p>
-          <a:p>
-            <a:pPr algn="l">
-              <a:spcAft>
-                <a:spcPts val="855"/>
-              </a:spcAft>
-            </a:pPr>
-            <a:r>
-              <a:rPr sz="1900" b="0" i="0">
-                <a:solidFill>
-                  <a:srgbClr val="1C1B19"/>
-                </a:solidFill>
-                <a:latin typeface="Source Serif 4"/>
-              </a:rPr>
-              <a:t>Phone out, bathroom, jokes</a:t>
-            </a:r>
-          </a:p>
-          <a:p>
-            <a:pPr algn="l">
-              <a:spcAft>
-                <a:spcPts val="855"/>
-              </a:spcAft>
-            </a:pPr>
-            <a:r>
-              <a:rPr sz="1900" b="0" i="0">
-                <a:solidFill>
-                  <a:srgbClr val="1C1B19"/>
-                </a:solidFill>
-                <a:latin typeface="Source Serif 4"/>
-              </a:rPr>
-              <a:t>Tears, anger, or blank stare</a:t>
+                <a:spcPts val="990"/>
+              </a:spcAft>
+            </a:pPr>
+            <a:r>
+              <a:rPr sz="2200" b="0" i="1">
+                <a:solidFill>
+                  <a:srgbClr val="5D5A54"/>
+                </a:solidFill>
+                <a:latin typeface="Source Serif 4"/>
+              </a:rPr>
+              <a:t>The research gives a fairly clear answer, with a few honest caveats.</a:t>
             </a:r>
           </a:p>
         </p:txBody>
@@ -9436,7 +12428,7 @@
                 </a:solidFill>
                 <a:latin typeface="Inter Tight"/>
               </a:rPr>
-              <a:t>THE TARGET</a:t>
+              <a:t>THE RESEARCH</a:t>
             </a:r>
           </a:p>
         </p:txBody>
@@ -9488,47 +12480,8 @@
         </p:nvSpPr>
         <p:spPr>
           <a:xfrm>
-            <a:off x="822960" y="1463040"/>
-            <a:ext cx="10515600" cy="3291840"/>
-          </a:xfrm>
-          <a:prstGeom prst="rect">
-            <a:avLst/>
-          </a:prstGeom>
-          <a:noFill/>
-        </p:spPr>
-        <p:txBody>
-          <a:bodyPr wrap="square" anchor="ctr" lIns="0" rIns="0" tIns="0" bIns="0">
-            <a:spAutoFit/>
-          </a:bodyPr>
-          <a:lstStyle/>
-          <a:p>
-            <a:pPr algn="l">
-              <a:spcAft>
-                <a:spcPts val="2070"/>
-              </a:spcAft>
-            </a:pPr>
-            <a:r>
-              <a:rPr sz="4600" b="1" i="0">
-                <a:solidFill>
-                  <a:srgbClr val="1C1B19"/>
-                </a:solidFill>
-                <a:latin typeface="Source Serif 4"/>
-              </a:rPr>
-              <a:t>Aim for about 80% success during practice.</a:t>
-            </a:r>
-          </a:p>
-        </p:txBody>
-      </p:sp>
-      <p:sp>
-        <p:nvSpPr>
-          <p:cNvPr id="6" name="TextBox 5"/>
-          <p:cNvSpPr txBox="1"/>
-          <p:nvPr/>
-        </p:nvSpPr>
-        <p:spPr>
-          <a:xfrm>
-            <a:off x="822960" y="4846320"/>
-            <a:ext cx="10515600" cy="1097280"/>
+            <a:off x="822960" y="914400"/>
+            <a:ext cx="10515600" cy="365760"/>
           </a:xfrm>
           <a:prstGeom prst="rect">
             <a:avLst/>
@@ -9543,17 +12496,226 @@
           <a:p>
             <a:pPr algn="l">
               <a:spcAft>
-                <a:spcPts val="990"/>
-              </a:spcAft>
-            </a:pPr>
-            <a:r>
-              <a:rPr sz="2200" b="0" i="1">
-                <a:solidFill>
-                  <a:srgbClr val="5D5A54"/>
-                </a:solidFill>
-                <a:latin typeface="Source Serif 4"/>
-              </a:rPr>
-              <a:t>Hard enough to cost effort. Winnable enough to keep going.</a:t>
+                <a:spcPts val="630"/>
+              </a:spcAft>
+            </a:pPr>
+            <a:r>
+              <a:rPr sz="1400" b="1" i="0">
+                <a:solidFill>
+                  <a:srgbClr val="0B2D5B"/>
+                </a:solidFill>
+                <a:latin typeface="Inter Tight"/>
+              </a:rPr>
+              <a:t>Bjork &amp; Bjork, 2011  ·  Vygotsky, 1978</a:t>
+            </a:r>
+          </a:p>
+        </p:txBody>
+      </p:sp>
+      <p:sp>
+        <p:nvSpPr>
+          <p:cNvPr id="6" name="TextBox 5"/>
+          <p:cNvSpPr txBox="1"/>
+          <p:nvPr/>
+        </p:nvSpPr>
+        <p:spPr>
+          <a:xfrm>
+            <a:off x="822960" y="1325880"/>
+            <a:ext cx="10515600" cy="1097280"/>
+          </a:xfrm>
+          <a:prstGeom prst="rect">
+            <a:avLst/>
+          </a:prstGeom>
+          <a:noFill/>
+        </p:spPr>
+        <p:txBody>
+          <a:bodyPr wrap="square" anchor="t" lIns="0" rIns="0" tIns="0" bIns="0">
+            <a:spAutoFit/>
+          </a:bodyPr>
+          <a:lstStyle/>
+          <a:p>
+            <a:pPr algn="l">
+              <a:spcAft>
+                <a:spcPts val="1440"/>
+              </a:spcAft>
+            </a:pPr>
+            <a:r>
+              <a:rPr sz="3200" b="1" i="0">
+                <a:solidFill>
+                  <a:srgbClr val="1C1B19"/>
+                </a:solidFill>
+                <a:latin typeface="Source Serif 4"/>
+              </a:rPr>
+              <a:t>Some difficulty helps learning stick.</a:t>
+            </a:r>
+          </a:p>
+        </p:txBody>
+      </p:sp>
+      <p:sp>
+        <p:nvSpPr>
+          <p:cNvPr id="7" name="TextBox 6"/>
+          <p:cNvSpPr txBox="1"/>
+          <p:nvPr/>
+        </p:nvSpPr>
+        <p:spPr>
+          <a:xfrm>
+            <a:off x="822960" y="2514600"/>
+            <a:ext cx="10515600" cy="2194560"/>
+          </a:xfrm>
+          <a:prstGeom prst="rect">
+            <a:avLst/>
+          </a:prstGeom>
+          <a:noFill/>
+        </p:spPr>
+        <p:txBody>
+          <a:bodyPr wrap="square" anchor="t" lIns="0" rIns="0" tIns="0" bIns="0">
+            <a:spAutoFit/>
+          </a:bodyPr>
+          <a:lstStyle/>
+          <a:p>
+            <a:pPr algn="l">
+              <a:spcAft>
+                <a:spcPts val="855"/>
+              </a:spcAft>
+            </a:pPr>
+            <a:r>
+              <a:rPr sz="1900" b="0" i="0">
+                <a:solidFill>
+                  <a:srgbClr val="1C1B19"/>
+                </a:solidFill>
+                <a:latin typeface="Source Serif 4"/>
+              </a:rPr>
+              <a:t>•  Spacing, mixing problem types, and quizzing feel harder and work better than rereading.</a:t>
+            </a:r>
+          </a:p>
+          <a:p>
+            <a:pPr algn="l">
+              <a:spcAft>
+                <a:spcPts val="855"/>
+              </a:spcAft>
+            </a:pPr>
+            <a:r>
+              <a:rPr sz="1900" b="0" i="0">
+                <a:solidFill>
+                  <a:srgbClr val="1C1B19"/>
+                </a:solidFill>
+                <a:latin typeface="Source Serif 4"/>
+              </a:rPr>
+              <a:t>•  How well students do during practice is a poor guide to how much they're learning.</a:t>
+            </a:r>
+          </a:p>
+          <a:p>
+            <a:pPr algn="l">
+              <a:spcAft>
+                <a:spcPts val="855"/>
+              </a:spcAft>
+            </a:pPr>
+            <a:r>
+              <a:rPr sz="1900" b="0" i="0">
+                <a:solidFill>
+                  <a:srgbClr val="1C1B19"/>
+                </a:solidFill>
+                <a:latin typeface="Source Serif 4"/>
+              </a:rPr>
+              <a:t>•  Vygotsky: aim at what students can do with help, not yet alone.</a:t>
+            </a:r>
+          </a:p>
+        </p:txBody>
+      </p:sp>
+      <p:sp>
+        <p:nvSpPr>
+          <p:cNvPr id="8" name="Rectangle 7"/>
+          <p:cNvSpPr/>
+          <p:nvPr/>
+        </p:nvSpPr>
+        <p:spPr>
+          <a:xfrm>
+            <a:off x="822960" y="4892040"/>
+            <a:ext cx="73152" cy="1097280"/>
+          </a:xfrm>
+          <a:prstGeom prst="rect">
+            <a:avLst/>
+          </a:prstGeom>
+          <a:solidFill>
+            <a:srgbClr val="F47B20"/>
+          </a:solidFill>
+          <a:ln>
+            <a:noFill/>
+          </a:ln>
+          <a:effectLst/>
+        </p:spPr>
+        <p:style>
+          <a:lnRef idx="1">
+            <a:schemeClr val="accent1"/>
+          </a:lnRef>
+          <a:fillRef idx="3">
+            <a:schemeClr val="accent1"/>
+          </a:fillRef>
+          <a:effectRef idx="2">
+            <a:schemeClr val="accent1"/>
+          </a:effectRef>
+          <a:fontRef idx="minor">
+            <a:schemeClr val="lt1"/>
+          </a:fontRef>
+        </p:style>
+        <p:txBody>
+          <a:bodyPr rtlCol="0" anchor="ctr"/>
+          <a:lstStyle/>
+          <a:p>
+            <a:pPr algn="ctr"/>
+          </a:p>
+        </p:txBody>
+      </p:sp>
+      <p:sp>
+        <p:nvSpPr>
+          <p:cNvPr id="9" name="TextBox 8"/>
+          <p:cNvSpPr txBox="1"/>
+          <p:nvPr/>
+        </p:nvSpPr>
+        <p:spPr>
+          <a:xfrm>
+            <a:off x="1097280" y="4892040"/>
+            <a:ext cx="10241280" cy="1188720"/>
+          </a:xfrm>
+          <a:prstGeom prst="rect">
+            <a:avLst/>
+          </a:prstGeom>
+          <a:noFill/>
+        </p:spPr>
+        <p:txBody>
+          <a:bodyPr wrap="square" anchor="t" lIns="0" rIns="0" tIns="0" bIns="0">
+            <a:spAutoFit/>
+          </a:bodyPr>
+          <a:lstStyle/>
+          <a:p>
+            <a:pPr algn="l">
+              <a:spcAft>
+                <a:spcPts val="855"/>
+              </a:spcAft>
+            </a:pPr>
+            <a:r>
+              <a:rPr sz="1200" b="1" i="0">
+                <a:solidFill>
+                  <a:srgbClr val="F47B20"/>
+                </a:solidFill>
+                <a:latin typeface="Inter Tight"/>
+              </a:rPr>
+              <a:t>IN CLASS</a:t>
+            </a:r>
+          </a:p>
+          <a:p>
+            <a:pPr algn="l">
+              <a:spcAft>
+                <a:spcPts val="855"/>
+              </a:spcAft>
+            </a:pPr>
+            <a:r>
+              <a:rPr sz="1900" b="0" i="0">
+                <a:solidFill>
+                  <a:srgbClr val="1C1B19"/>
+                </a:solidFill>
+                <a:latin typeface="Source Serif 4"/>
+              </a:rPr>
+              <a:t>If practice feels easy, it may not be sticking. Some struggle is the point.</a:t>
             </a:r>
           </a:p>
         </p:txBody>
@@ -9662,7 +12824,7 @@
                 </a:solidFill>
                 <a:latin typeface="Inter Tight"/>
               </a:rPr>
-              <a:t>WHY THEY OPT OUT</a:t>
+              <a:t>THE RESEARCH</a:t>
             </a:r>
           </a:p>
         </p:txBody>
@@ -9714,8 +12876,8 @@
         </p:nvSpPr>
         <p:spPr>
           <a:xfrm>
-            <a:off x="822960" y="1005840"/>
-            <a:ext cx="10515600" cy="914400"/>
+            <a:off x="822960" y="914400"/>
+            <a:ext cx="10515600" cy="365760"/>
           </a:xfrm>
           <a:prstGeom prst="rect">
             <a:avLst/>
@@ -9730,42 +12892,150 @@
           <a:p>
             <a:pPr algn="l">
               <a:spcAft>
-                <a:spcPts val="1530"/>
-              </a:spcAft>
-            </a:pPr>
-            <a:r>
-              <a:rPr sz="3400" b="1" i="0">
+                <a:spcPts val="630"/>
+              </a:spcAft>
+            </a:pPr>
+            <a:r>
+              <a:rPr sz="1400" b="1" i="0">
+                <a:solidFill>
+                  <a:srgbClr val="0B2D5B"/>
+                </a:solidFill>
+                <a:latin typeface="Inter Tight"/>
+              </a:rPr>
+              <a:t>Rosenshine, 2012, American Educator</a:t>
+            </a:r>
+          </a:p>
+        </p:txBody>
+      </p:sp>
+      <p:sp>
+        <p:nvSpPr>
+          <p:cNvPr id="6" name="TextBox 5"/>
+          <p:cNvSpPr txBox="1"/>
+          <p:nvPr/>
+        </p:nvSpPr>
+        <p:spPr>
+          <a:xfrm>
+            <a:off x="822960" y="1325880"/>
+            <a:ext cx="10515600" cy="1097280"/>
+          </a:xfrm>
+          <a:prstGeom prst="rect">
+            <a:avLst/>
+          </a:prstGeom>
+          <a:noFill/>
+        </p:spPr>
+        <p:txBody>
+          <a:bodyPr wrap="square" anchor="t" lIns="0" rIns="0" tIns="0" bIns="0">
+            <a:spAutoFit/>
+          </a:bodyPr>
+          <a:lstStyle/>
+          <a:p>
+            <a:pPr algn="l">
+              <a:spcAft>
+                <a:spcPts val="1440"/>
+              </a:spcAft>
+            </a:pPr>
+            <a:r>
+              <a:rPr sz="3200" b="1" i="0">
                 <a:solidFill>
                   <a:srgbClr val="1C1B19"/>
                 </a:solidFill>
                 <a:latin typeface="Source Serif 4"/>
               </a:rPr>
-              <a:t>The shutdown loop</a:t>
-            </a:r>
-          </a:p>
-        </p:txBody>
-      </p:sp>
-      <p:sp>
-        <p:nvSpPr>
-          <p:cNvPr id="6" name="Rectangle 5"/>
+              <a:t>Strong teachers keep practice success near 80%.</a:t>
+            </a:r>
+          </a:p>
+        </p:txBody>
+      </p:sp>
+      <p:sp>
+        <p:nvSpPr>
+          <p:cNvPr id="7" name="TextBox 6"/>
+          <p:cNvSpPr txBox="1"/>
+          <p:nvPr/>
+        </p:nvSpPr>
+        <p:spPr>
+          <a:xfrm>
+            <a:off x="822960" y="2514600"/>
+            <a:ext cx="10515600" cy="2194560"/>
+          </a:xfrm>
+          <a:prstGeom prst="rect">
+            <a:avLst/>
+          </a:prstGeom>
+          <a:noFill/>
+        </p:spPr>
+        <p:txBody>
+          <a:bodyPr wrap="square" anchor="t" lIns="0" rIns="0" tIns="0" bIns="0">
+            <a:spAutoFit/>
+          </a:bodyPr>
+          <a:lstStyle/>
+          <a:p>
+            <a:pPr algn="l">
+              <a:spcAft>
+                <a:spcPts val="855"/>
+              </a:spcAft>
+            </a:pPr>
+            <a:r>
+              <a:rPr sz="1900" b="0" i="0">
+                <a:solidFill>
+                  <a:srgbClr val="1C1B19"/>
+                </a:solidFill>
+                <a:latin typeface="Source Serif 4"/>
+              </a:rPr>
+              <a:t>•  Rosenshine reviewed classroom research on effective teachers.</a:t>
+            </a:r>
+          </a:p>
+          <a:p>
+            <a:pPr algn="l">
+              <a:spcAft>
+                <a:spcPts val="855"/>
+              </a:spcAft>
+            </a:pPr>
+            <a:r>
+              <a:rPr sz="1900" b="0" i="0">
+                <a:solidFill>
+                  <a:srgbClr val="1C1B19"/>
+                </a:solidFill>
+                <a:latin typeface="Source Serif 4"/>
+              </a:rPr>
+              <a:t>•  The most effective kept students succeeding most of the time during practice.</a:t>
+            </a:r>
+          </a:p>
+          <a:p>
+            <a:pPr algn="l">
+              <a:spcAft>
+                <a:spcPts val="855"/>
+              </a:spcAft>
+            </a:pPr>
+            <a:r>
+              <a:rPr sz="1900" b="0" i="0">
+                <a:solidFill>
+                  <a:srgbClr val="1C1B19"/>
+                </a:solidFill>
+                <a:latin typeface="Source Serif 4"/>
+              </a:rPr>
+              <a:t>•  Too much failure during practice builds errors and avoidance.</a:t>
+            </a:r>
+          </a:p>
+        </p:txBody>
+      </p:sp>
+      <p:sp>
+        <p:nvSpPr>
+          <p:cNvPr id="8" name="Rectangle 7"/>
           <p:cNvSpPr/>
           <p:nvPr/>
         </p:nvSpPr>
         <p:spPr>
           <a:xfrm>
-            <a:off x="822960" y="2743200"/>
-            <a:ext cx="1874519" cy="1005840"/>
+            <a:off x="822960" y="4892040"/>
+            <a:ext cx="73152" cy="1097280"/>
           </a:xfrm>
           <a:prstGeom prst="rect">
             <a:avLst/>
           </a:prstGeom>
           <a:solidFill>
-            <a:srgbClr val="FFFFFF"/>
+            <a:srgbClr val="F47B20"/>
           </a:solidFill>
-          <a:ln w="15875">
-            <a:solidFill>
-              <a:srgbClr val="0B2D5B"/>
-            </a:solidFill>
+          <a:ln>
+            <a:noFill/>
           </a:ln>
           <a:effectLst/>
         </p:spPr>
@@ -9793,537 +13063,14 @@
       </p:sp>
       <p:sp>
         <p:nvSpPr>
-          <p:cNvPr id="7" name="TextBox 6"/>
+          <p:cNvPr id="9" name="TextBox 8"/>
           <p:cNvSpPr txBox="1"/>
           <p:nvPr/>
         </p:nvSpPr>
         <p:spPr>
           <a:xfrm>
-            <a:off x="822960" y="2743200"/>
-            <a:ext cx="1874519" cy="1005840"/>
-          </a:xfrm>
-          <a:prstGeom prst="rect">
-            <a:avLst/>
-          </a:prstGeom>
-          <a:noFill/>
-        </p:spPr>
-        <p:txBody>
-          <a:bodyPr wrap="square" anchor="ctr" lIns="0" rIns="0" tIns="0" bIns="0">
-            <a:spAutoFit/>
-          </a:bodyPr>
-          <a:lstStyle/>
-          <a:p>
-            <a:pPr algn="ctr">
-              <a:spcAft>
-                <a:spcPts val="900"/>
-              </a:spcAft>
-            </a:pPr>
-            <a:r>
-              <a:rPr sz="2000" b="1" i="0">
-                <a:solidFill>
-                  <a:srgbClr val="1C1B19"/>
-                </a:solidFill>
-                <a:latin typeface="Source Serif 4"/>
-              </a:rPr>
-              <a:t>Hard task</a:t>
-            </a:r>
-          </a:p>
-        </p:txBody>
-      </p:sp>
-      <p:cxnSp>
-        <p:nvCxnSpPr>
-          <p:cNvPr id="8" name="Connector 7"/>
-          <p:cNvCxnSpPr/>
-          <p:nvPr/>
-        </p:nvCxnSpPr>
-        <p:spPr>
-          <a:xfrm>
-            <a:off x="2752344" y="3246120"/>
-            <a:ext cx="176021" cy="0"/>
-          </a:xfrm>
-          <a:prstGeom prst="line">
-            <a:avLst/>
-          </a:prstGeom>
-          <a:ln w="31750">
-            <a:solidFill>
-              <a:srgbClr val="F47B20"/>
-            </a:solidFill>
-            <a:tailEnd type="triangle"/>
-          </a:ln>
-        </p:spPr>
-        <p:style>
-          <a:lnRef idx="2">
-            <a:schemeClr val="accent1"/>
-          </a:lnRef>
-          <a:fillRef idx="0">
-            <a:schemeClr val="accent1"/>
-          </a:fillRef>
-          <a:effectRef idx="1">
-            <a:schemeClr val="accent1"/>
-          </a:effectRef>
-          <a:fontRef idx="minor">
-            <a:schemeClr val="tx1"/>
-          </a:fontRef>
-        </p:style>
-      </p:cxnSp>
-      <p:sp>
-        <p:nvSpPr>
-          <p:cNvPr id="9" name="Rectangle 8"/>
-          <p:cNvSpPr/>
-          <p:nvPr/>
-        </p:nvSpPr>
-        <p:spPr>
-          <a:xfrm>
-            <a:off x="2983229" y="2743200"/>
-            <a:ext cx="1874519" cy="1005840"/>
-          </a:xfrm>
-          <a:prstGeom prst="rect">
-            <a:avLst/>
-          </a:prstGeom>
-          <a:solidFill>
-            <a:srgbClr val="FFFFFF"/>
-          </a:solidFill>
-          <a:ln w="15875">
-            <a:solidFill>
-              <a:srgbClr val="0B2D5B"/>
-            </a:solidFill>
-          </a:ln>
-          <a:effectLst/>
-        </p:spPr>
-        <p:style>
-          <a:lnRef idx="1">
-            <a:schemeClr val="accent1"/>
-          </a:lnRef>
-          <a:fillRef idx="3">
-            <a:schemeClr val="accent1"/>
-          </a:fillRef>
-          <a:effectRef idx="2">
-            <a:schemeClr val="accent1"/>
-          </a:effectRef>
-          <a:fontRef idx="minor">
-            <a:schemeClr val="lt1"/>
-          </a:fontRef>
-        </p:style>
-        <p:txBody>
-          <a:bodyPr rtlCol="0" anchor="ctr"/>
-          <a:lstStyle/>
-          <a:p>
-            <a:pPr algn="ctr"/>
-          </a:p>
-        </p:txBody>
-      </p:sp>
-      <p:sp>
-        <p:nvSpPr>
-          <p:cNvPr id="10" name="TextBox 9"/>
-          <p:cNvSpPr txBox="1"/>
-          <p:nvPr/>
-        </p:nvSpPr>
-        <p:spPr>
-          <a:xfrm>
-            <a:off x="2983229" y="2743200"/>
-            <a:ext cx="1874519" cy="1005840"/>
-          </a:xfrm>
-          <a:prstGeom prst="rect">
-            <a:avLst/>
-          </a:prstGeom>
-          <a:noFill/>
-        </p:spPr>
-        <p:txBody>
-          <a:bodyPr wrap="square" anchor="ctr" lIns="0" rIns="0" tIns="0" bIns="0">
-            <a:spAutoFit/>
-          </a:bodyPr>
-          <a:lstStyle/>
-          <a:p>
-            <a:pPr algn="ctr">
-              <a:spcAft>
-                <a:spcPts val="900"/>
-              </a:spcAft>
-            </a:pPr>
-            <a:r>
-              <a:rPr sz="2000" b="1" i="0">
-                <a:solidFill>
-                  <a:srgbClr val="1C1B19"/>
-                </a:solidFill>
-                <a:latin typeface="Source Serif 4"/>
-              </a:rPr>
-              <a:t>Alarm</a:t>
-            </a:r>
-          </a:p>
-        </p:txBody>
-      </p:sp>
-      <p:cxnSp>
-        <p:nvCxnSpPr>
-          <p:cNvPr id="11" name="Connector 10"/>
-          <p:cNvCxnSpPr/>
-          <p:nvPr/>
-        </p:nvCxnSpPr>
-        <p:spPr>
-          <a:xfrm>
-            <a:off x="4912614" y="3246120"/>
-            <a:ext cx="176022" cy="0"/>
-          </a:xfrm>
-          <a:prstGeom prst="line">
-            <a:avLst/>
-          </a:prstGeom>
-          <a:ln w="31750">
-            <a:solidFill>
-              <a:srgbClr val="F47B20"/>
-            </a:solidFill>
-            <a:tailEnd type="triangle"/>
-          </a:ln>
-        </p:spPr>
-        <p:style>
-          <a:lnRef idx="2">
-            <a:schemeClr val="accent1"/>
-          </a:lnRef>
-          <a:fillRef idx="0">
-            <a:schemeClr val="accent1"/>
-          </a:fillRef>
-          <a:effectRef idx="1">
-            <a:schemeClr val="accent1"/>
-          </a:effectRef>
-          <a:fontRef idx="minor">
-            <a:schemeClr val="tx1"/>
-          </a:fontRef>
-        </p:style>
-      </p:cxnSp>
-      <p:sp>
-        <p:nvSpPr>
-          <p:cNvPr id="12" name="Rectangle 11"/>
-          <p:cNvSpPr/>
-          <p:nvPr/>
-        </p:nvSpPr>
-        <p:spPr>
-          <a:xfrm>
-            <a:off x="5143500" y="2743200"/>
-            <a:ext cx="1874519" cy="1005840"/>
-          </a:xfrm>
-          <a:prstGeom prst="rect">
-            <a:avLst/>
-          </a:prstGeom>
-          <a:solidFill>
-            <a:srgbClr val="FFFFFF"/>
-          </a:solidFill>
-          <a:ln w="15875">
-            <a:solidFill>
-              <a:srgbClr val="0B2D5B"/>
-            </a:solidFill>
-          </a:ln>
-          <a:effectLst/>
-        </p:spPr>
-        <p:style>
-          <a:lnRef idx="1">
-            <a:schemeClr val="accent1"/>
-          </a:lnRef>
-          <a:fillRef idx="3">
-            <a:schemeClr val="accent1"/>
-          </a:fillRef>
-          <a:effectRef idx="2">
-            <a:schemeClr val="accent1"/>
-          </a:effectRef>
-          <a:fontRef idx="minor">
-            <a:schemeClr val="lt1"/>
-          </a:fontRef>
-        </p:style>
-        <p:txBody>
-          <a:bodyPr rtlCol="0" anchor="ctr"/>
-          <a:lstStyle/>
-          <a:p>
-            <a:pPr algn="ctr"/>
-          </a:p>
-        </p:txBody>
-      </p:sp>
-      <p:sp>
-        <p:nvSpPr>
-          <p:cNvPr id="13" name="TextBox 12"/>
-          <p:cNvSpPr txBox="1"/>
-          <p:nvPr/>
-        </p:nvSpPr>
-        <p:spPr>
-          <a:xfrm>
-            <a:off x="5143500" y="2743200"/>
-            <a:ext cx="1874519" cy="1005840"/>
-          </a:xfrm>
-          <a:prstGeom prst="rect">
-            <a:avLst/>
-          </a:prstGeom>
-          <a:noFill/>
-        </p:spPr>
-        <p:txBody>
-          <a:bodyPr wrap="square" anchor="ctr" lIns="0" rIns="0" tIns="0" bIns="0">
-            <a:spAutoFit/>
-          </a:bodyPr>
-          <a:lstStyle/>
-          <a:p>
-            <a:pPr algn="ctr">
-              <a:spcAft>
-                <a:spcPts val="900"/>
-              </a:spcAft>
-            </a:pPr>
-            <a:r>
-              <a:rPr sz="2000" b="1" i="0">
-                <a:solidFill>
-                  <a:srgbClr val="1C1B19"/>
-                </a:solidFill>
-                <a:latin typeface="Source Serif 4"/>
-              </a:rPr>
-              <a:t>"I can't"</a:t>
-            </a:r>
-          </a:p>
-        </p:txBody>
-      </p:sp>
-      <p:cxnSp>
-        <p:nvCxnSpPr>
-          <p:cNvPr id="14" name="Connector 13"/>
-          <p:cNvCxnSpPr/>
-          <p:nvPr/>
-        </p:nvCxnSpPr>
-        <p:spPr>
-          <a:xfrm>
-            <a:off x="7072883" y="3246120"/>
-            <a:ext cx="176023" cy="0"/>
-          </a:xfrm>
-          <a:prstGeom prst="line">
-            <a:avLst/>
-          </a:prstGeom>
-          <a:ln w="31750">
-            <a:solidFill>
-              <a:srgbClr val="F47B20"/>
-            </a:solidFill>
-            <a:tailEnd type="triangle"/>
-          </a:ln>
-        </p:spPr>
-        <p:style>
-          <a:lnRef idx="2">
-            <a:schemeClr val="accent1"/>
-          </a:lnRef>
-          <a:fillRef idx="0">
-            <a:schemeClr val="accent1"/>
-          </a:fillRef>
-          <a:effectRef idx="1">
-            <a:schemeClr val="accent1"/>
-          </a:effectRef>
-          <a:fontRef idx="minor">
-            <a:schemeClr val="tx1"/>
-          </a:fontRef>
-        </p:style>
-      </p:cxnSp>
-      <p:sp>
-        <p:nvSpPr>
-          <p:cNvPr id="15" name="Rectangle 14"/>
-          <p:cNvSpPr/>
-          <p:nvPr/>
-        </p:nvSpPr>
-        <p:spPr>
-          <a:xfrm>
-            <a:off x="7303770" y="2743200"/>
-            <a:ext cx="1874519" cy="1005840"/>
-          </a:xfrm>
-          <a:prstGeom prst="rect">
-            <a:avLst/>
-          </a:prstGeom>
-          <a:solidFill>
-            <a:srgbClr val="FFFFFF"/>
-          </a:solidFill>
-          <a:ln w="15875">
-            <a:solidFill>
-              <a:srgbClr val="0B2D5B"/>
-            </a:solidFill>
-          </a:ln>
-          <a:effectLst/>
-        </p:spPr>
-        <p:style>
-          <a:lnRef idx="1">
-            <a:schemeClr val="accent1"/>
-          </a:lnRef>
-          <a:fillRef idx="3">
-            <a:schemeClr val="accent1"/>
-          </a:fillRef>
-          <a:effectRef idx="2">
-            <a:schemeClr val="accent1"/>
-          </a:effectRef>
-          <a:fontRef idx="minor">
-            <a:schemeClr val="lt1"/>
-          </a:fontRef>
-        </p:style>
-        <p:txBody>
-          <a:bodyPr rtlCol="0" anchor="ctr"/>
-          <a:lstStyle/>
-          <a:p>
-            <a:pPr algn="ctr"/>
-          </a:p>
-        </p:txBody>
-      </p:sp>
-      <p:sp>
-        <p:nvSpPr>
-          <p:cNvPr id="16" name="TextBox 15"/>
-          <p:cNvSpPr txBox="1"/>
-          <p:nvPr/>
-        </p:nvSpPr>
-        <p:spPr>
-          <a:xfrm>
-            <a:off x="7303770" y="2743200"/>
-            <a:ext cx="1874519" cy="1005840"/>
-          </a:xfrm>
-          <a:prstGeom prst="rect">
-            <a:avLst/>
-          </a:prstGeom>
-          <a:noFill/>
-        </p:spPr>
-        <p:txBody>
-          <a:bodyPr wrap="square" anchor="ctr" lIns="0" rIns="0" tIns="0" bIns="0">
-            <a:spAutoFit/>
-          </a:bodyPr>
-          <a:lstStyle/>
-          <a:p>
-            <a:pPr algn="ctr">
-              <a:spcAft>
-                <a:spcPts val="900"/>
-              </a:spcAft>
-            </a:pPr>
-            <a:r>
-              <a:rPr sz="2000" b="1" i="0">
-                <a:solidFill>
-                  <a:srgbClr val="1C1B19"/>
-                </a:solidFill>
-                <a:latin typeface="Source Serif 4"/>
-              </a:rPr>
-              <a:t>Opt out</a:t>
-            </a:r>
-          </a:p>
-        </p:txBody>
-      </p:sp>
-      <p:cxnSp>
-        <p:nvCxnSpPr>
-          <p:cNvPr id="17" name="Connector 16"/>
-          <p:cNvCxnSpPr/>
-          <p:nvPr/>
-        </p:nvCxnSpPr>
-        <p:spPr>
-          <a:xfrm>
-            <a:off x="9233154" y="3246120"/>
-            <a:ext cx="176022" cy="0"/>
-          </a:xfrm>
-          <a:prstGeom prst="line">
-            <a:avLst/>
-          </a:prstGeom>
-          <a:ln w="31750">
-            <a:solidFill>
-              <a:srgbClr val="F47B20"/>
-            </a:solidFill>
-            <a:tailEnd type="triangle"/>
-          </a:ln>
-        </p:spPr>
-        <p:style>
-          <a:lnRef idx="2">
-            <a:schemeClr val="accent1"/>
-          </a:lnRef>
-          <a:fillRef idx="0">
-            <a:schemeClr val="accent1"/>
-          </a:fillRef>
-          <a:effectRef idx="1">
-            <a:schemeClr val="accent1"/>
-          </a:effectRef>
-          <a:fontRef idx="minor">
-            <a:schemeClr val="tx1"/>
-          </a:fontRef>
-        </p:style>
-      </p:cxnSp>
-      <p:sp>
-        <p:nvSpPr>
-          <p:cNvPr id="18" name="Rectangle 17"/>
-          <p:cNvSpPr/>
-          <p:nvPr/>
-        </p:nvSpPr>
-        <p:spPr>
-          <a:xfrm>
-            <a:off x="9464040" y="2743200"/>
-            <a:ext cx="1874519" cy="1005840"/>
-          </a:xfrm>
-          <a:prstGeom prst="rect">
-            <a:avLst/>
-          </a:prstGeom>
-          <a:solidFill>
-            <a:srgbClr val="FFFFFF"/>
-          </a:solidFill>
-          <a:ln w="15875">
-            <a:solidFill>
-              <a:srgbClr val="0B2D5B"/>
-            </a:solidFill>
-          </a:ln>
-          <a:effectLst/>
-        </p:spPr>
-        <p:style>
-          <a:lnRef idx="1">
-            <a:schemeClr val="accent1"/>
-          </a:lnRef>
-          <a:fillRef idx="3">
-            <a:schemeClr val="accent1"/>
-          </a:fillRef>
-          <a:effectRef idx="2">
-            <a:schemeClr val="accent1"/>
-          </a:effectRef>
-          <a:fontRef idx="minor">
-            <a:schemeClr val="lt1"/>
-          </a:fontRef>
-        </p:style>
-        <p:txBody>
-          <a:bodyPr rtlCol="0" anchor="ctr"/>
-          <a:lstStyle/>
-          <a:p>
-            <a:pPr algn="ctr"/>
-          </a:p>
-        </p:txBody>
-      </p:sp>
-      <p:sp>
-        <p:nvSpPr>
-          <p:cNvPr id="19" name="TextBox 18"/>
-          <p:cNvSpPr txBox="1"/>
-          <p:nvPr/>
-        </p:nvSpPr>
-        <p:spPr>
-          <a:xfrm>
-            <a:off x="9464040" y="2743200"/>
-            <a:ext cx="1874519" cy="1005840"/>
-          </a:xfrm>
-          <a:prstGeom prst="rect">
-            <a:avLst/>
-          </a:prstGeom>
-          <a:noFill/>
-        </p:spPr>
-        <p:txBody>
-          <a:bodyPr wrap="square" anchor="ctr" lIns="0" rIns="0" tIns="0" bIns="0">
-            <a:spAutoFit/>
-          </a:bodyPr>
-          <a:lstStyle/>
-          <a:p>
-            <a:pPr algn="ctr">
-              <a:spcAft>
-                <a:spcPts val="900"/>
-              </a:spcAft>
-            </a:pPr>
-            <a:r>
-              <a:rPr sz="2000" b="1" i="0">
-                <a:solidFill>
-                  <a:srgbClr val="1C1B19"/>
-                </a:solidFill>
-                <a:latin typeface="Source Serif 4"/>
-              </a:rPr>
-              <a:t>Less practice</a:t>
-            </a:r>
-          </a:p>
-        </p:txBody>
-      </p:sp>
-      <p:sp>
-        <p:nvSpPr>
-          <p:cNvPr id="20" name="TextBox 19"/>
-          <p:cNvSpPr txBox="1"/>
-          <p:nvPr/>
-        </p:nvSpPr>
-        <p:spPr>
-          <a:xfrm>
-            <a:off x="822960" y="4160520"/>
-            <a:ext cx="10515600" cy="457200"/>
+            <a:off x="1097280" y="4892040"/>
+            <a:ext cx="10241280" cy="1188720"/>
           </a:xfrm>
           <a:prstGeom prst="rect">
             <a:avLst/>
@@ -10336,58 +13083,35 @@
           </a:bodyPr>
           <a:lstStyle/>
           <a:p>
-            <a:pPr algn="ctr">
-              <a:spcAft>
-                <a:spcPts val="810"/>
-              </a:spcAft>
-            </a:pPr>
-            <a:r>
-              <a:rPr sz="1800" b="1" i="0">
+            <a:pPr algn="l">
+              <a:spcAft>
+                <a:spcPts val="855"/>
+              </a:spcAft>
+            </a:pPr>
+            <a:r>
+              <a:rPr sz="1200" b="1" i="0">
                 <a:solidFill>
                   <a:srgbClr val="F47B20"/>
                 </a:solidFill>
                 <a:latin typeface="Inter Tight"/>
               </a:rPr>
-              <a:t>↺  next hard task feels harder</a:t>
-            </a:r>
-          </a:p>
-        </p:txBody>
-      </p:sp>
-      <p:sp>
-        <p:nvSpPr>
-          <p:cNvPr id="21" name="TextBox 20"/>
-          <p:cNvSpPr txBox="1"/>
-          <p:nvPr/>
-        </p:nvSpPr>
-        <p:spPr>
-          <a:xfrm>
-            <a:off x="822960" y="4846320"/>
-            <a:ext cx="10515600" cy="1188720"/>
-          </a:xfrm>
-          <a:prstGeom prst="rect">
-            <a:avLst/>
-          </a:prstGeom>
-          <a:noFill/>
-        </p:spPr>
-        <p:txBody>
-          <a:bodyPr wrap="square" anchor="t" lIns="0" rIns="0" tIns="0" bIns="0">
-            <a:spAutoFit/>
-          </a:bodyPr>
-          <a:lstStyle/>
-          <a:p>
-            <a:pPr algn="ctr">
-              <a:spcAft>
-                <a:spcPts val="900"/>
-              </a:spcAft>
-            </a:pPr>
-            <a:r>
-              <a:rPr sz="2000" b="0" i="1">
-                <a:solidFill>
-                  <a:srgbClr val="5D5A54"/>
-                </a:solidFill>
-                <a:latin typeface="Source Serif 4"/>
-              </a:rPr>
-              <a:t>Opting out brings relief right away, so the brain learns to do it again.</a:t>
+              <a:t>IN CLASS</a:t>
+            </a:r>
+          </a:p>
+          <a:p>
+            <a:pPr algn="l">
+              <a:spcAft>
+                <a:spcPts val="855"/>
+              </a:spcAft>
+            </a:pPr>
+            <a:r>
+              <a:rPr sz="1900" b="0" i="0">
+                <a:solidFill>
+                  <a:srgbClr val="1C1B19"/>
+                </a:solidFill>
+                <a:latin typeface="Source Serif 4"/>
+              </a:rPr>
+              <a:t>If most students get far below 80% on their own, add a scaffold before adding a pep talk.</a:t>
             </a:r>
           </a:p>
         </p:txBody>

--- a/decks/stretch-not-strain-lesson-v2.pptx
+++ b/decks/stretch-not-strain-lesson-v2.pptx
@@ -1010,7 +1010,7 @@
           <a:lstStyle/>
           <a:p>
             <a:r>
-              <a:t>4 MINUTES. Invite, don't assign: "Which move will you try?" The student card on this slide gives students the same language (stretch vs. shutdown, the hint ladder, the 5-minute rule) and who to talk to. Teachers can share it after naming the idea in class. If the department wants a follow-up, collect anonymous notes on which moves worked.</a:t>
+              <a:t>4 MINUTES. Invite, don't assign: "Which move will you try?" The quick reference on this slide puts stretch vs. shutdown, the five moves and the key phrases on one page teachers can print or keep open. If the department wants a follow-up, collect anonymous notes on which moves worked.</a:t>
             </a:r>
           </a:p>
         </p:txBody>
@@ -4875,7 +4875,7 @@
                 </a:solidFill>
                 <a:latin typeface="Source Serif 4"/>
               </a:rPr>
-              <a:t>The student card link (last slide) for teachers to share with classes</a:t>
+              <a:t>The faculty quick reference (last slide): one page to print or keep open</a:t>
             </a:r>
           </a:p>
         </p:txBody>
@@ -5162,7 +5162,7 @@
                 </a:solidFill>
                 <a:latin typeface="Source Serif 4"/>
               </a:rPr>
-              <a:t>Thirty minutes: the question (3), the 80% finding and worked examples (6), stretch or shutdown (5), wise feedback and reappraisal (6), five moves (5), one move this week (5). Share the student card link afterward.</a:t>
+              <a:t>Thirty minutes: the question (3), the 80% finding and worked examples (6), stretch or shutdown (5), wise feedback and reappraisal (6), five moves (5), one move this week (5). Share the faculty quick reference afterward.</a:t>
             </a:r>
           </a:p>
         </p:txBody>
@@ -10034,7 +10034,7 @@
                 </a:solidFill>
                 <a:latin typeface="Inter Tight"/>
               </a:rPr>
-              <a:t>STUDENT CARD TEACHERS CAN SHARE</a:t>
+              <a:t>FACULTY QUICK REFERENCE</a:t>
             </a:r>
           </a:p>
         </p:txBody>
@@ -10073,7 +10073,7 @@
                 </a:solidFill>
                 <a:latin typeface="Inter Tight"/>
               </a:rPr>
-              <a:t>https://rmwtoolkit.github.io/bcds-toolkit/when-it-gets-hard-high-school.html</a:t>
+              <a:t>https://rmwtoolkit.github.io/bcds-toolkit/stretch-not-strain-faculty-card.html</a:t>
             </a:r>
           </a:p>
         </p:txBody>

--- a/decks/stretch-not-strain-lesson-v2.pptx
+++ b/decks/stretch-not-strain-lesson-v2.pptx
@@ -11824,6 +11824,45 @@
                 <a:latin typeface="Inter Tight"/>
               </a:rPr>
               <a:t>Beaver · Faculty professional development</a:t>
+            </a:r>
+          </a:p>
+        </p:txBody>
+      </p:sp>
+      <p:sp>
+        <p:nvSpPr>
+          <p:cNvPr id="8" name="TextBox 7"/>
+          <p:cNvSpPr txBox="1"/>
+          <p:nvPr/>
+        </p:nvSpPr>
+        <p:spPr>
+          <a:xfrm>
+            <a:off x="6766560" y="5897880"/>
+            <a:ext cx="4846320" cy="640080"/>
+          </a:xfrm>
+          <a:prstGeom prst="rect">
+            <a:avLst/>
+          </a:prstGeom>
+          <a:noFill/>
+        </p:spPr>
+        <p:txBody>
+          <a:bodyPr wrap="square" anchor="t" lIns="0" rIns="0" tIns="0" bIns="0">
+            <a:spAutoFit/>
+          </a:bodyPr>
+          <a:lstStyle/>
+          <a:p>
+            <a:pPr algn="r">
+              <a:spcAft>
+                <a:spcPts val="495"/>
+              </a:spcAft>
+            </a:pPr>
+            <a:r>
+              <a:rPr sz="1100" b="0" i="0">
+                <a:solidFill>
+                  <a:srgbClr val="E8E4DA"/>
+                </a:solidFill>
+                <a:latin typeface="Inter Tight"/>
+              </a:rPr>
+              <a:t>Written by Dr. Rick Wilson, with AI-assisted drafting. Every lesson is reviewed and edited by Dr. Wilson.</a:t>
             </a:r>
           </a:p>
         </p:txBody>

--- a/decks/stretch-not-strain-lesson-v2.pptx
+++ b/decks/stretch-not-strain-lesson-v2.pptx
@@ -11862,7 +11862,7 @@
                 </a:solidFill>
                 <a:latin typeface="Inter Tight"/>
               </a:rPr>
-              <a:t>Written by Dr. Rick Wilson, with AI-assisted drafting. Every lesson is reviewed and edited by Dr. Wilson.</a:t>
+              <a:t>Rick drafted this talk with help from AI, then reviewed and edited every slide.</a:t>
             </a:r>
           </a:p>
         </p:txBody>
